--- a/Zwischenpräsentation/WebGPU Technischer Überblick.pptx
+++ b/Zwischenpräsentation/WebGPU Technischer Überblick.pptx
@@ -2,7 +2,7 @@
 <file path=ppt/presentation.xml><?xml version="1.0" encoding="utf-8"?>
 <p:presentation xmlns:a="http://schemas.openxmlformats.org/drawingml/2006/main" xmlns:r="http://schemas.openxmlformats.org/officeDocument/2006/relationships" xmlns:mc="http://schemas.openxmlformats.org/markup-compatibility/2006" xmlns:mv="urn:schemas-microsoft-com:mac:vml" xmlns:p="http://schemas.openxmlformats.org/presentationml/2006/main" xmlns:c="http://schemas.openxmlformats.org/drawingml/2006/chart" xmlns:dgm="http://schemas.openxmlformats.org/drawingml/2006/diagram" xmlns:o="urn:schemas-microsoft-com:office:office" xmlns:v="urn:schemas-microsoft-com:vml" xmlns:pvml="urn:schemas-microsoft-com:office:powerpoint" xmlns:com="http://schemas.openxmlformats.org/drawingml/2006/compatibility" xmlns:p14="http://schemas.microsoft.com/office/powerpoint/2010/main" xmlns:p15="http://schemas.microsoft.com/office/powerpoint/2012/main" xmlns:ahyp="http://schemas.microsoft.com/office/drawing/2018/hyperlinkcolor" autoCompressPictures="0" strictFirstAndLastChars="0" saveSubsetFonts="1">
   <p:sldMasterIdLst>
-    <p:sldMasterId id="2147483649" r:id="rId3"/>
+    <p:sldMasterId id="2147483660" r:id="rId3"/>
   </p:sldMasterIdLst>
   <p:notesMasterIdLst>
     <p:notesMasterId r:id="rId4"/>
@@ -17,6 +17,7 @@
     <p:sldId id="262" r:id="rId11"/>
     <p:sldId id="263" r:id="rId12"/>
     <p:sldId id="264" r:id="rId13"/>
+    <p:sldId id="265" r:id="rId14"/>
   </p:sldIdLst>
   <p:sldSz cy="5143500" cx="9144000"/>
   <p:notesSz cx="5143500" cy="9144000"/>
@@ -1425,7 +1426,7 @@
   <p:cSld>
     <p:spTree>
       <p:nvGrpSpPr>
-        <p:cNvPr id="11" name="Shape 11"/>
+        <p:cNvPr id="55" name="Shape 55"/>
         <p:cNvGrpSpPr/>
         <p:nvPr/>
       </p:nvGrpSpPr>
@@ -1439,7 +1440,7 @@
       </p:grpSpPr>
       <p:sp>
         <p:nvSpPr>
-          <p:cNvPr id="12" name="Google Shape;12;p1:notes"/>
+          <p:cNvPr id="56" name="Google Shape;56;p1:notes"/>
           <p:cNvSpPr/>
           <p:nvPr>
             <p:ph idx="2" type="sldImg"/>
@@ -1484,7 +1485,7 @@
       </p:sp>
       <p:sp>
         <p:nvSpPr>
-          <p:cNvPr id="13" name="Google Shape;13;p1:notes"/>
+          <p:cNvPr id="57" name="Google Shape;57;p1:notes"/>
           <p:cNvSpPr txBox="1"/>
           <p:nvPr>
             <p:ph idx="1" type="body"/>
@@ -1527,7 +1528,7 @@
       </p:sp>
       <p:sp>
         <p:nvSpPr>
-          <p:cNvPr id="14" name="Google Shape;14;p1:notes"/>
+          <p:cNvPr id="58" name="Google Shape;58;p1:notes"/>
           <p:cNvSpPr txBox="1"/>
           <p:nvPr>
             <p:ph idx="12" type="sldNum"/>
@@ -1577,12 +1578,12 @@
 </p:notes>
 </file>
 
-<file path=ppt/notesSlides/notesSlide2.xml><?xml version="1.0" encoding="utf-8"?>
+<file path=ppt/notesSlides/notesSlide10.xml><?xml version="1.0" encoding="utf-8"?>
 <p:notes xmlns:a="http://schemas.openxmlformats.org/drawingml/2006/main" xmlns:r="http://schemas.openxmlformats.org/officeDocument/2006/relationships" xmlns:mc="http://schemas.openxmlformats.org/markup-compatibility/2006" xmlns:mv="urn:schemas-microsoft-com:mac:vml" xmlns:p="http://schemas.openxmlformats.org/presentationml/2006/main" xmlns:c="http://schemas.openxmlformats.org/drawingml/2006/chart" xmlns:dgm="http://schemas.openxmlformats.org/drawingml/2006/diagram" xmlns:o="urn:schemas-microsoft-com:office:office" xmlns:v="urn:schemas-microsoft-com:vml" xmlns:pvml="urn:schemas-microsoft-com:office:powerpoint" xmlns:com="http://schemas.openxmlformats.org/drawingml/2006/compatibility" xmlns:p14="http://schemas.microsoft.com/office/powerpoint/2010/main" xmlns:p15="http://schemas.microsoft.com/office/powerpoint/2012/main" xmlns:ahyp="http://schemas.microsoft.com/office/drawing/2018/hyperlinkcolor" showMasterPhAnim="0" showMasterSp="0">
   <p:cSld>
     <p:spTree>
       <p:nvGrpSpPr>
-        <p:cNvPr id="18" name="Shape 18"/>
+        <p:cNvPr id="128" name="Shape 128"/>
         <p:cNvGrpSpPr/>
         <p:nvPr/>
       </p:nvGrpSpPr>
@@ -1596,7 +1597,7 @@
       </p:grpSpPr>
       <p:sp>
         <p:nvSpPr>
-          <p:cNvPr id="19" name="Google Shape;19;g3a9a57ae9ff_0_4:notes"/>
+          <p:cNvPr id="129" name="Google Shape;129;g3a9a57ae9ff_0_21:notes"/>
           <p:cNvSpPr/>
           <p:nvPr>
             <p:ph idx="2" type="sldImg"/>
@@ -1641,7 +1642,7 @@
       </p:sp>
       <p:sp>
         <p:nvSpPr>
-          <p:cNvPr id="20" name="Google Shape;20;g3a9a57ae9ff_0_4:notes"/>
+          <p:cNvPr id="130" name="Google Shape;130;g3a9a57ae9ff_0_21:notes"/>
           <p:cNvSpPr txBox="1"/>
           <p:nvPr>
             <p:ph idx="1" type="body"/>
@@ -1684,7 +1685,7 @@
       </p:sp>
       <p:sp>
         <p:nvSpPr>
-          <p:cNvPr id="21" name="Google Shape;21;g3a9a57ae9ff_0_4:notes"/>
+          <p:cNvPr id="131" name="Google Shape;131;g3a9a57ae9ff_0_21:notes"/>
           <p:cNvSpPr txBox="1"/>
           <p:nvPr>
             <p:ph idx="12" type="sldNum"/>
@@ -1734,12 +1735,12 @@
 </p:notes>
 </file>
 
-<file path=ppt/notesSlides/notesSlide3.xml><?xml version="1.0" encoding="utf-8"?>
+<file path=ppt/notesSlides/notesSlide2.xml><?xml version="1.0" encoding="utf-8"?>
 <p:notes xmlns:a="http://schemas.openxmlformats.org/drawingml/2006/main" xmlns:r="http://schemas.openxmlformats.org/officeDocument/2006/relationships" xmlns:mc="http://schemas.openxmlformats.org/markup-compatibility/2006" xmlns:mv="urn:schemas-microsoft-com:mac:vml" xmlns:p="http://schemas.openxmlformats.org/presentationml/2006/main" xmlns:c="http://schemas.openxmlformats.org/drawingml/2006/chart" xmlns:dgm="http://schemas.openxmlformats.org/drawingml/2006/diagram" xmlns:o="urn:schemas-microsoft-com:office:office" xmlns:v="urn:schemas-microsoft-com:vml" xmlns:pvml="urn:schemas-microsoft-com:office:powerpoint" xmlns:com="http://schemas.openxmlformats.org/drawingml/2006/compatibility" xmlns:p14="http://schemas.microsoft.com/office/powerpoint/2010/main" xmlns:p15="http://schemas.microsoft.com/office/powerpoint/2012/main" xmlns:ahyp="http://schemas.microsoft.com/office/drawing/2018/hyperlinkcolor" showMasterPhAnim="0" showMasterSp="0">
   <p:cSld>
     <p:spTree>
       <p:nvGrpSpPr>
-        <p:cNvPr id="25" name="Shape 25"/>
+        <p:cNvPr id="62" name="Shape 62"/>
         <p:cNvGrpSpPr/>
         <p:nvPr/>
       </p:nvGrpSpPr>
@@ -1753,7 +1754,7 @@
       </p:grpSpPr>
       <p:sp>
         <p:nvSpPr>
-          <p:cNvPr id="26" name="Google Shape;26;p2:notes"/>
+          <p:cNvPr id="63" name="Google Shape;63;g3a9a57ae9ff_0_4:notes"/>
           <p:cNvSpPr/>
           <p:nvPr>
             <p:ph idx="2" type="sldImg"/>
@@ -1798,7 +1799,7 @@
       </p:sp>
       <p:sp>
         <p:nvSpPr>
-          <p:cNvPr id="27" name="Google Shape;27;p2:notes"/>
+          <p:cNvPr id="64" name="Google Shape;64;g3a9a57ae9ff_0_4:notes"/>
           <p:cNvSpPr txBox="1"/>
           <p:nvPr>
             <p:ph idx="1" type="body"/>
@@ -1807,7 +1808,7 @@
         <p:spPr>
           <a:xfrm>
             <a:off x="685800" y="4400550"/>
-            <a:ext cx="5486400" cy="3600450"/>
+            <a:ext cx="5486400" cy="3600600"/>
           </a:xfrm>
           <a:prstGeom prst="rect">
             <a:avLst/>
@@ -1841,7 +1842,7 @@
       </p:sp>
       <p:sp>
         <p:nvSpPr>
-          <p:cNvPr id="28" name="Google Shape;28;p2:notes"/>
+          <p:cNvPr id="65" name="Google Shape;65;g3a9a57ae9ff_0_4:notes"/>
           <p:cNvSpPr txBox="1"/>
           <p:nvPr>
             <p:ph idx="12" type="sldNum"/>
@@ -1850,7 +1851,7 @@
         <p:spPr>
           <a:xfrm>
             <a:off x="3884613" y="8685213"/>
-            <a:ext cx="2971800" cy="458787"/>
+            <a:ext cx="2971800" cy="458700"/>
           </a:xfrm>
           <a:prstGeom prst="rect">
             <a:avLst/>
@@ -1891,12 +1892,12 @@
 </p:notes>
 </file>
 
-<file path=ppt/notesSlides/notesSlide4.xml><?xml version="1.0" encoding="utf-8"?>
+<file path=ppt/notesSlides/notesSlide3.xml><?xml version="1.0" encoding="utf-8"?>
 <p:notes xmlns:a="http://schemas.openxmlformats.org/drawingml/2006/main" xmlns:r="http://schemas.openxmlformats.org/officeDocument/2006/relationships" xmlns:mc="http://schemas.openxmlformats.org/markup-compatibility/2006" xmlns:mv="urn:schemas-microsoft-com:mac:vml" xmlns:p="http://schemas.openxmlformats.org/presentationml/2006/main" xmlns:c="http://schemas.openxmlformats.org/drawingml/2006/chart" xmlns:dgm="http://schemas.openxmlformats.org/drawingml/2006/diagram" xmlns:o="urn:schemas-microsoft-com:office:office" xmlns:v="urn:schemas-microsoft-com:vml" xmlns:pvml="urn:schemas-microsoft-com:office:powerpoint" xmlns:com="http://schemas.openxmlformats.org/drawingml/2006/compatibility" xmlns:p14="http://schemas.microsoft.com/office/powerpoint/2010/main" xmlns:p15="http://schemas.microsoft.com/office/powerpoint/2012/main" xmlns:ahyp="http://schemas.microsoft.com/office/drawing/2018/hyperlinkcolor" showMasterPhAnim="0" showMasterSp="0">
   <p:cSld>
     <p:spTree>
       <p:nvGrpSpPr>
-        <p:cNvPr id="32" name="Shape 32"/>
+        <p:cNvPr id="69" name="Shape 69"/>
         <p:cNvGrpSpPr/>
         <p:nvPr/>
       </p:nvGrpSpPr>
@@ -1910,7 +1911,7 @@
       </p:grpSpPr>
       <p:sp>
         <p:nvSpPr>
-          <p:cNvPr id="33" name="Google Shape;33;p3:notes"/>
+          <p:cNvPr id="70" name="Google Shape;70;p2:notes"/>
           <p:cNvSpPr/>
           <p:nvPr>
             <p:ph idx="2" type="sldImg"/>
@@ -1955,7 +1956,7 @@
       </p:sp>
       <p:sp>
         <p:nvSpPr>
-          <p:cNvPr id="34" name="Google Shape;34;p3:notes"/>
+          <p:cNvPr id="71" name="Google Shape;71;p2:notes"/>
           <p:cNvSpPr txBox="1"/>
           <p:nvPr>
             <p:ph idx="1" type="body"/>
@@ -1998,7 +1999,7 @@
       </p:sp>
       <p:sp>
         <p:nvSpPr>
-          <p:cNvPr id="35" name="Google Shape;35;p3:notes"/>
+          <p:cNvPr id="72" name="Google Shape;72;p2:notes"/>
           <p:cNvSpPr txBox="1"/>
           <p:nvPr>
             <p:ph idx="12" type="sldNum"/>
@@ -2048,12 +2049,12 @@
 </p:notes>
 </file>
 
-<file path=ppt/notesSlides/notesSlide5.xml><?xml version="1.0" encoding="utf-8"?>
+<file path=ppt/notesSlides/notesSlide4.xml><?xml version="1.0" encoding="utf-8"?>
 <p:notes xmlns:a="http://schemas.openxmlformats.org/drawingml/2006/main" xmlns:r="http://schemas.openxmlformats.org/officeDocument/2006/relationships" xmlns:mc="http://schemas.openxmlformats.org/markup-compatibility/2006" xmlns:mv="urn:schemas-microsoft-com:mac:vml" xmlns:p="http://schemas.openxmlformats.org/presentationml/2006/main" xmlns:c="http://schemas.openxmlformats.org/drawingml/2006/chart" xmlns:dgm="http://schemas.openxmlformats.org/drawingml/2006/diagram" xmlns:o="urn:schemas-microsoft-com:office:office" xmlns:v="urn:schemas-microsoft-com:vml" xmlns:pvml="urn:schemas-microsoft-com:office:powerpoint" xmlns:com="http://schemas.openxmlformats.org/drawingml/2006/compatibility" xmlns:p14="http://schemas.microsoft.com/office/powerpoint/2010/main" xmlns:p15="http://schemas.microsoft.com/office/powerpoint/2012/main" xmlns:ahyp="http://schemas.microsoft.com/office/drawing/2018/hyperlinkcolor" showMasterPhAnim="0" showMasterSp="0">
   <p:cSld>
     <p:spTree>
       <p:nvGrpSpPr>
-        <p:cNvPr id="48" name="Shape 48"/>
+        <p:cNvPr id="76" name="Shape 76"/>
         <p:cNvGrpSpPr/>
         <p:nvPr/>
       </p:nvGrpSpPr>
@@ -2067,7 +2068,7 @@
       </p:grpSpPr>
       <p:sp>
         <p:nvSpPr>
-          <p:cNvPr id="49" name="Google Shape;49;p4:notes"/>
+          <p:cNvPr id="77" name="Google Shape;77;p3:notes"/>
           <p:cNvSpPr/>
           <p:nvPr>
             <p:ph idx="2" type="sldImg"/>
@@ -2112,7 +2113,7 @@
       </p:sp>
       <p:sp>
         <p:nvSpPr>
-          <p:cNvPr id="50" name="Google Shape;50;p4:notes"/>
+          <p:cNvPr id="78" name="Google Shape;78;p3:notes"/>
           <p:cNvSpPr txBox="1"/>
           <p:nvPr>
             <p:ph idx="1" type="body"/>
@@ -2155,7 +2156,7 @@
       </p:sp>
       <p:sp>
         <p:nvSpPr>
-          <p:cNvPr id="51" name="Google Shape;51;p4:notes"/>
+          <p:cNvPr id="79" name="Google Shape;79;p3:notes"/>
           <p:cNvSpPr txBox="1"/>
           <p:nvPr>
             <p:ph idx="12" type="sldNum"/>
@@ -2205,12 +2206,12 @@
 </p:notes>
 </file>
 
-<file path=ppt/notesSlides/notesSlide6.xml><?xml version="1.0" encoding="utf-8"?>
+<file path=ppt/notesSlides/notesSlide5.xml><?xml version="1.0" encoding="utf-8"?>
 <p:notes xmlns:a="http://schemas.openxmlformats.org/drawingml/2006/main" xmlns:r="http://schemas.openxmlformats.org/officeDocument/2006/relationships" xmlns:mc="http://schemas.openxmlformats.org/markup-compatibility/2006" xmlns:mv="urn:schemas-microsoft-com:mac:vml" xmlns:p="http://schemas.openxmlformats.org/presentationml/2006/main" xmlns:c="http://schemas.openxmlformats.org/drawingml/2006/chart" xmlns:dgm="http://schemas.openxmlformats.org/drawingml/2006/diagram" xmlns:o="urn:schemas-microsoft-com:office:office" xmlns:v="urn:schemas-microsoft-com:vml" xmlns:pvml="urn:schemas-microsoft-com:office:powerpoint" xmlns:com="http://schemas.openxmlformats.org/drawingml/2006/compatibility" xmlns:p14="http://schemas.microsoft.com/office/powerpoint/2010/main" xmlns:p15="http://schemas.microsoft.com/office/powerpoint/2012/main" xmlns:ahyp="http://schemas.microsoft.com/office/drawing/2018/hyperlinkcolor" showMasterPhAnim="0" showMasterSp="0">
   <p:cSld>
     <p:spTree>
       <p:nvGrpSpPr>
-        <p:cNvPr id="55" name="Shape 55"/>
+        <p:cNvPr id="92" name="Shape 92"/>
         <p:cNvGrpSpPr/>
         <p:nvPr/>
       </p:nvGrpSpPr>
@@ -2224,7 +2225,7 @@
       </p:grpSpPr>
       <p:sp>
         <p:nvSpPr>
-          <p:cNvPr id="56" name="Google Shape;56;p6:notes"/>
+          <p:cNvPr id="93" name="Google Shape;93;p4:notes"/>
           <p:cNvSpPr/>
           <p:nvPr>
             <p:ph idx="2" type="sldImg"/>
@@ -2269,7 +2270,7 @@
       </p:sp>
       <p:sp>
         <p:nvSpPr>
-          <p:cNvPr id="57" name="Google Shape;57;p6:notes"/>
+          <p:cNvPr id="94" name="Google Shape;94;p4:notes"/>
           <p:cNvSpPr txBox="1"/>
           <p:nvPr>
             <p:ph idx="1" type="body"/>
@@ -2312,7 +2313,7 @@
       </p:sp>
       <p:sp>
         <p:nvSpPr>
-          <p:cNvPr id="58" name="Google Shape;58;p6:notes"/>
+          <p:cNvPr id="95" name="Google Shape;95;p4:notes"/>
           <p:cNvSpPr txBox="1"/>
           <p:nvPr>
             <p:ph idx="12" type="sldNum"/>
@@ -2362,12 +2363,12 @@
 </p:notes>
 </file>
 
-<file path=ppt/notesSlides/notesSlide7.xml><?xml version="1.0" encoding="utf-8"?>
+<file path=ppt/notesSlides/notesSlide6.xml><?xml version="1.0" encoding="utf-8"?>
 <p:notes xmlns:a="http://schemas.openxmlformats.org/drawingml/2006/main" xmlns:r="http://schemas.openxmlformats.org/officeDocument/2006/relationships" xmlns:mc="http://schemas.openxmlformats.org/markup-compatibility/2006" xmlns:mv="urn:schemas-microsoft-com:mac:vml" xmlns:p="http://schemas.openxmlformats.org/presentationml/2006/main" xmlns:c="http://schemas.openxmlformats.org/drawingml/2006/chart" xmlns:dgm="http://schemas.openxmlformats.org/drawingml/2006/diagram" xmlns:o="urn:schemas-microsoft-com:office:office" xmlns:v="urn:schemas-microsoft-com:vml" xmlns:pvml="urn:schemas-microsoft-com:office:powerpoint" xmlns:com="http://schemas.openxmlformats.org/drawingml/2006/compatibility" xmlns:p14="http://schemas.microsoft.com/office/powerpoint/2010/main" xmlns:p15="http://schemas.microsoft.com/office/powerpoint/2012/main" xmlns:ahyp="http://schemas.microsoft.com/office/drawing/2018/hyperlinkcolor" showMasterPhAnim="0" showMasterSp="0">
   <p:cSld>
     <p:spTree>
       <p:nvGrpSpPr>
-        <p:cNvPr id="63" name="Shape 63"/>
+        <p:cNvPr id="99" name="Shape 99"/>
         <p:cNvGrpSpPr/>
         <p:nvPr/>
       </p:nvGrpSpPr>
@@ -2381,7 +2382,7 @@
       </p:grpSpPr>
       <p:sp>
         <p:nvSpPr>
-          <p:cNvPr id="64" name="Google Shape;64;p7:notes"/>
+          <p:cNvPr id="100" name="Google Shape;100;p6:notes"/>
           <p:cNvSpPr/>
           <p:nvPr>
             <p:ph idx="2" type="sldImg"/>
@@ -2426,7 +2427,7 @@
       </p:sp>
       <p:sp>
         <p:nvSpPr>
-          <p:cNvPr id="65" name="Google Shape;65;p7:notes"/>
+          <p:cNvPr id="101" name="Google Shape;101;p6:notes"/>
           <p:cNvSpPr txBox="1"/>
           <p:nvPr>
             <p:ph idx="1" type="body"/>
@@ -2469,7 +2470,7 @@
       </p:sp>
       <p:sp>
         <p:nvSpPr>
-          <p:cNvPr id="66" name="Google Shape;66;p7:notes"/>
+          <p:cNvPr id="102" name="Google Shape;102;p6:notes"/>
           <p:cNvSpPr txBox="1"/>
           <p:nvPr>
             <p:ph idx="12" type="sldNum"/>
@@ -2519,12 +2520,12 @@
 </p:notes>
 </file>
 
-<file path=ppt/notesSlides/notesSlide8.xml><?xml version="1.0" encoding="utf-8"?>
+<file path=ppt/notesSlides/notesSlide7.xml><?xml version="1.0" encoding="utf-8"?>
 <p:notes xmlns:a="http://schemas.openxmlformats.org/drawingml/2006/main" xmlns:r="http://schemas.openxmlformats.org/officeDocument/2006/relationships" xmlns:mc="http://schemas.openxmlformats.org/markup-compatibility/2006" xmlns:mv="urn:schemas-microsoft-com:mac:vml" xmlns:p="http://schemas.openxmlformats.org/presentationml/2006/main" xmlns:c="http://schemas.openxmlformats.org/drawingml/2006/chart" xmlns:dgm="http://schemas.openxmlformats.org/drawingml/2006/diagram" xmlns:o="urn:schemas-microsoft-com:office:office" xmlns:v="urn:schemas-microsoft-com:vml" xmlns:pvml="urn:schemas-microsoft-com:office:powerpoint" xmlns:com="http://schemas.openxmlformats.org/drawingml/2006/compatibility" xmlns:p14="http://schemas.microsoft.com/office/powerpoint/2010/main" xmlns:p15="http://schemas.microsoft.com/office/powerpoint/2012/main" xmlns:ahyp="http://schemas.microsoft.com/office/drawing/2018/hyperlinkcolor" showMasterPhAnim="0" showMasterSp="0">
   <p:cSld>
     <p:spTree>
       <p:nvGrpSpPr>
-        <p:cNvPr id="70" name="Shape 70"/>
+        <p:cNvPr id="107" name="Shape 107"/>
         <p:cNvGrpSpPr/>
         <p:nvPr/>
       </p:nvGrpSpPr>
@@ -2538,7 +2539,7 @@
       </p:grpSpPr>
       <p:sp>
         <p:nvSpPr>
-          <p:cNvPr id="71" name="Google Shape;71;p17:notes"/>
+          <p:cNvPr id="108" name="Google Shape;108;g3aa0e803714_0_4:notes"/>
           <p:cNvSpPr/>
           <p:nvPr>
             <p:ph idx="2" type="sldImg"/>
@@ -2583,7 +2584,7 @@
       </p:sp>
       <p:sp>
         <p:nvSpPr>
-          <p:cNvPr id="72" name="Google Shape;72;p17:notes"/>
+          <p:cNvPr id="109" name="Google Shape;109;g3aa0e803714_0_4:notes"/>
           <p:cNvSpPr txBox="1"/>
           <p:nvPr>
             <p:ph idx="1" type="body"/>
@@ -2592,7 +2593,7 @@
         <p:spPr>
           <a:xfrm>
             <a:off x="685800" y="4400550"/>
-            <a:ext cx="5486400" cy="3600450"/>
+            <a:ext cx="5486400" cy="3600600"/>
           </a:xfrm>
           <a:prstGeom prst="rect">
             <a:avLst/>
@@ -2626,7 +2627,7 @@
       </p:sp>
       <p:sp>
         <p:nvSpPr>
-          <p:cNvPr id="73" name="Google Shape;73;p17:notes"/>
+          <p:cNvPr id="110" name="Google Shape;110;g3aa0e803714_0_4:notes"/>
           <p:cNvSpPr txBox="1"/>
           <p:nvPr>
             <p:ph idx="12" type="sldNum"/>
@@ -2635,7 +2636,7 @@
         <p:spPr>
           <a:xfrm>
             <a:off x="3884613" y="8685213"/>
-            <a:ext cx="2971800" cy="458787"/>
+            <a:ext cx="2971800" cy="458700"/>
           </a:xfrm>
           <a:prstGeom prst="rect">
             <a:avLst/>
@@ -2676,12 +2677,12 @@
 </p:notes>
 </file>
 
-<file path=ppt/notesSlides/notesSlide9.xml><?xml version="1.0" encoding="utf-8"?>
+<file path=ppt/notesSlides/notesSlide8.xml><?xml version="1.0" encoding="utf-8"?>
 <p:notes xmlns:a="http://schemas.openxmlformats.org/drawingml/2006/main" xmlns:r="http://schemas.openxmlformats.org/officeDocument/2006/relationships" xmlns:mc="http://schemas.openxmlformats.org/markup-compatibility/2006" xmlns:mv="urn:schemas-microsoft-com:mac:vml" xmlns:p="http://schemas.openxmlformats.org/presentationml/2006/main" xmlns:c="http://schemas.openxmlformats.org/drawingml/2006/chart" xmlns:dgm="http://schemas.openxmlformats.org/drawingml/2006/diagram" xmlns:o="urn:schemas-microsoft-com:office:office" xmlns:v="urn:schemas-microsoft-com:vml" xmlns:pvml="urn:schemas-microsoft-com:office:powerpoint" xmlns:com="http://schemas.openxmlformats.org/drawingml/2006/compatibility" xmlns:p14="http://schemas.microsoft.com/office/powerpoint/2010/main" xmlns:p15="http://schemas.microsoft.com/office/powerpoint/2012/main" xmlns:ahyp="http://schemas.microsoft.com/office/drawing/2018/hyperlinkcolor" showMasterPhAnim="0" showMasterSp="0">
   <p:cSld>
     <p:spTree>
       <p:nvGrpSpPr>
-        <p:cNvPr id="77" name="Shape 77"/>
+        <p:cNvPr id="114" name="Shape 114"/>
         <p:cNvGrpSpPr/>
         <p:nvPr/>
       </p:nvGrpSpPr>
@@ -2695,7 +2696,7 @@
       </p:grpSpPr>
       <p:sp>
         <p:nvSpPr>
-          <p:cNvPr id="78" name="Google Shape;78;g3a9a57ae9ff_0_21:notes"/>
+          <p:cNvPr id="115" name="Google Shape;115;p7:notes"/>
           <p:cNvSpPr/>
           <p:nvPr>
             <p:ph idx="2" type="sldImg"/>
@@ -2740,7 +2741,7 @@
       </p:sp>
       <p:sp>
         <p:nvSpPr>
-          <p:cNvPr id="79" name="Google Shape;79;g3a9a57ae9ff_0_21:notes"/>
+          <p:cNvPr id="116" name="Google Shape;116;p7:notes"/>
           <p:cNvSpPr txBox="1"/>
           <p:nvPr>
             <p:ph idx="1" type="body"/>
@@ -2749,7 +2750,7 @@
         <p:spPr>
           <a:xfrm>
             <a:off x="685800" y="4400550"/>
-            <a:ext cx="5486400" cy="3600600"/>
+            <a:ext cx="5486400" cy="3600450"/>
           </a:xfrm>
           <a:prstGeom prst="rect">
             <a:avLst/>
@@ -2783,7 +2784,7 @@
       </p:sp>
       <p:sp>
         <p:nvSpPr>
-          <p:cNvPr id="80" name="Google Shape;80;g3a9a57ae9ff_0_21:notes"/>
+          <p:cNvPr id="117" name="Google Shape;117;p7:notes"/>
           <p:cNvSpPr txBox="1"/>
           <p:nvPr>
             <p:ph idx="12" type="sldNum"/>
@@ -2792,7 +2793,164 @@
         <p:spPr>
           <a:xfrm>
             <a:off x="3884613" y="8685213"/>
-            <a:ext cx="2971800" cy="458700"/>
+            <a:ext cx="2971800" cy="458787"/>
+          </a:xfrm>
+          <a:prstGeom prst="rect">
+            <a:avLst/>
+          </a:prstGeom>
+          <a:noFill/>
+          <a:ln>
+            <a:noFill/>
+          </a:ln>
+        </p:spPr>
+        <p:txBody>
+          <a:bodyPr anchorCtr="0" anchor="b" bIns="45700" lIns="91425" spcFirstLastPara="1" rIns="91425" wrap="square" tIns="45700">
+            <a:noAutofit/>
+          </a:bodyPr>
+          <a:lstStyle/>
+          <a:p>
+            <a:pPr indent="0" lvl="0" marL="0" rtl="0" algn="r">
+              <a:spcBef>
+                <a:spcPts val="0"/>
+              </a:spcBef>
+              <a:spcAft>
+                <a:spcPts val="0"/>
+              </a:spcAft>
+              <a:buNone/>
+            </a:pPr>
+            <a:fld id="{00000000-1234-1234-1234-123412341234}" type="slidenum">
+              <a:rPr lang="en-US"/>
+              <a:t>‹#›</a:t>
+            </a:fld>
+            <a:endParaRPr/>
+          </a:p>
+        </p:txBody>
+      </p:sp>
+    </p:spTree>
+  </p:cSld>
+  <p:clrMapOvr>
+    <a:masterClrMapping/>
+  </p:clrMapOvr>
+</p:notes>
+</file>
+
+<file path=ppt/notesSlides/notesSlide9.xml><?xml version="1.0" encoding="utf-8"?>
+<p:notes xmlns:a="http://schemas.openxmlformats.org/drawingml/2006/main" xmlns:r="http://schemas.openxmlformats.org/officeDocument/2006/relationships" xmlns:mc="http://schemas.openxmlformats.org/markup-compatibility/2006" xmlns:mv="urn:schemas-microsoft-com:mac:vml" xmlns:p="http://schemas.openxmlformats.org/presentationml/2006/main" xmlns:c="http://schemas.openxmlformats.org/drawingml/2006/chart" xmlns:dgm="http://schemas.openxmlformats.org/drawingml/2006/diagram" xmlns:o="urn:schemas-microsoft-com:office:office" xmlns:v="urn:schemas-microsoft-com:vml" xmlns:pvml="urn:schemas-microsoft-com:office:powerpoint" xmlns:com="http://schemas.openxmlformats.org/drawingml/2006/compatibility" xmlns:p14="http://schemas.microsoft.com/office/powerpoint/2010/main" xmlns:p15="http://schemas.microsoft.com/office/powerpoint/2012/main" xmlns:ahyp="http://schemas.microsoft.com/office/drawing/2018/hyperlinkcolor" showMasterPhAnim="0" showMasterSp="0">
+  <p:cSld>
+    <p:spTree>
+      <p:nvGrpSpPr>
+        <p:cNvPr id="121" name="Shape 121"/>
+        <p:cNvGrpSpPr/>
+        <p:nvPr/>
+      </p:nvGrpSpPr>
+      <p:grpSpPr>
+        <a:xfrm>
+          <a:off x="0" y="0"/>
+          <a:ext cx="0" cy="0"/>
+          <a:chOff x="0" y="0"/>
+          <a:chExt cx="0" cy="0"/>
+        </a:xfrm>
+      </p:grpSpPr>
+      <p:sp>
+        <p:nvSpPr>
+          <p:cNvPr id="122" name="Google Shape;122;p17:notes"/>
+          <p:cNvSpPr/>
+          <p:nvPr>
+            <p:ph idx="2" type="sldImg"/>
+          </p:nvPr>
+        </p:nvSpPr>
+        <p:spPr>
+          <a:xfrm>
+            <a:off x="685800" y="1143000"/>
+            <a:ext cx="5486400" cy="3086100"/>
+          </a:xfrm>
+          <a:custGeom>
+            <a:rect b="b" l="l" r="r" t="t"/>
+            <a:pathLst>
+              <a:path extrusionOk="0" h="120000" w="120000">
+                <a:moveTo>
+                  <a:pt x="0" y="0"/>
+                </a:moveTo>
+                <a:lnTo>
+                  <a:pt x="120000" y="0"/>
+                </a:lnTo>
+                <a:lnTo>
+                  <a:pt x="120000" y="120000"/>
+                </a:lnTo>
+                <a:lnTo>
+                  <a:pt x="0" y="120000"/>
+                </a:lnTo>
+                <a:close/>
+              </a:path>
+            </a:pathLst>
+          </a:custGeom>
+          <a:noFill/>
+          <a:ln cap="flat" cmpd="sng" w="12700">
+            <a:solidFill>
+              <a:srgbClr val="000000"/>
+            </a:solidFill>
+            <a:prstDash val="solid"/>
+            <a:round/>
+            <a:headEnd len="sm" w="sm" type="none"/>
+            <a:tailEnd len="sm" w="sm" type="none"/>
+          </a:ln>
+        </p:spPr>
+      </p:sp>
+      <p:sp>
+        <p:nvSpPr>
+          <p:cNvPr id="123" name="Google Shape;123;p17:notes"/>
+          <p:cNvSpPr txBox="1"/>
+          <p:nvPr>
+            <p:ph idx="1" type="body"/>
+          </p:nvPr>
+        </p:nvSpPr>
+        <p:spPr>
+          <a:xfrm>
+            <a:off x="685800" y="4400550"/>
+            <a:ext cx="5486400" cy="3600450"/>
+          </a:xfrm>
+          <a:prstGeom prst="rect">
+            <a:avLst/>
+          </a:prstGeom>
+          <a:noFill/>
+          <a:ln>
+            <a:noFill/>
+          </a:ln>
+        </p:spPr>
+        <p:txBody>
+          <a:bodyPr anchorCtr="0" anchor="t" bIns="45700" lIns="91425" spcFirstLastPara="1" rIns="91425" wrap="square" tIns="45700">
+            <a:noAutofit/>
+          </a:bodyPr>
+          <a:lstStyle/>
+          <a:p>
+            <a:pPr indent="0" lvl="0" marL="0" rtl="0" algn="l">
+              <a:spcBef>
+                <a:spcPts val="0"/>
+              </a:spcBef>
+              <a:spcAft>
+                <a:spcPts val="0"/>
+              </a:spcAft>
+              <a:buNone/>
+            </a:pPr>
+            <a:r>
+              <a:t/>
+            </a:r>
+            <a:endParaRPr/>
+          </a:p>
+        </p:txBody>
+      </p:sp>
+      <p:sp>
+        <p:nvSpPr>
+          <p:cNvPr id="124" name="Google Shape;124;p17:notes"/>
+          <p:cNvSpPr txBox="1"/>
+          <p:nvPr>
+            <p:ph idx="12" type="sldNum"/>
+          </p:nvPr>
+        </p:nvSpPr>
+        <p:spPr>
+          <a:xfrm>
+            <a:off x="3884613" y="8685213"/>
+            <a:ext cx="2971800" cy="458787"/>
           </a:xfrm>
           <a:prstGeom prst="rect">
             <a:avLst/>
@@ -2834,6 +2992,843 @@
 </file>
 
 <file path=ppt/slideLayouts/slideLayout1.xml><?xml version="1.0" encoding="utf-8"?>
+<p:sldLayout xmlns:a="http://schemas.openxmlformats.org/drawingml/2006/main" xmlns:r="http://schemas.openxmlformats.org/officeDocument/2006/relationships" xmlns:mc="http://schemas.openxmlformats.org/markup-compatibility/2006" xmlns:mv="urn:schemas-microsoft-com:mac:vml" xmlns:p="http://schemas.openxmlformats.org/presentationml/2006/main" xmlns:c="http://schemas.openxmlformats.org/drawingml/2006/chart" xmlns:dgm="http://schemas.openxmlformats.org/drawingml/2006/diagram" xmlns:o="urn:schemas-microsoft-com:office:office" xmlns:v="urn:schemas-microsoft-com:vml" xmlns:pvml="urn:schemas-microsoft-com:office:powerpoint" xmlns:com="http://schemas.openxmlformats.org/drawingml/2006/compatibility" xmlns:p14="http://schemas.microsoft.com/office/powerpoint/2010/main" xmlns:p15="http://schemas.microsoft.com/office/powerpoint/2012/main" xmlns:ahyp="http://schemas.microsoft.com/office/drawing/2018/hyperlinkcolor" matchingName="Title slide" type="title">
+  <p:cSld name="TITLE">
+    <p:spTree>
+      <p:nvGrpSpPr>
+        <p:cNvPr id="13" name="Shape 13"/>
+        <p:cNvGrpSpPr/>
+        <p:nvPr/>
+      </p:nvGrpSpPr>
+      <p:grpSpPr>
+        <a:xfrm>
+          <a:off x="0" y="0"/>
+          <a:ext cx="0" cy="0"/>
+          <a:chOff x="0" y="0"/>
+          <a:chExt cx="0" cy="0"/>
+        </a:xfrm>
+      </p:grpSpPr>
+      <p:sp>
+        <p:nvSpPr>
+          <p:cNvPr id="14" name="Google Shape;14;p2"/>
+          <p:cNvSpPr txBox="1"/>
+          <p:nvPr>
+            <p:ph type="ctrTitle"/>
+          </p:nvPr>
+        </p:nvSpPr>
+        <p:spPr>
+          <a:xfrm>
+            <a:off x="311708" y="744575"/>
+            <a:ext cx="8520600" cy="2052600"/>
+          </a:xfrm>
+          <a:prstGeom prst="rect">
+            <a:avLst/>
+          </a:prstGeom>
+        </p:spPr>
+        <p:txBody>
+          <a:bodyPr anchorCtr="0" anchor="b" bIns="91425" lIns="91425" spcFirstLastPara="1" rIns="91425" wrap="square" tIns="91425">
+            <a:normAutofit/>
+          </a:bodyPr>
+          <a:lstStyle>
+            <a:lvl1pPr lvl="0" algn="ctr">
+              <a:spcBef>
+                <a:spcPts val="0"/>
+              </a:spcBef>
+              <a:spcAft>
+                <a:spcPts val="0"/>
+              </a:spcAft>
+              <a:buSzPts val="5200"/>
+              <a:buNone/>
+              <a:defRPr sz="5200"/>
+            </a:lvl1pPr>
+            <a:lvl2pPr lvl="1" algn="ctr">
+              <a:spcBef>
+                <a:spcPts val="0"/>
+              </a:spcBef>
+              <a:spcAft>
+                <a:spcPts val="0"/>
+              </a:spcAft>
+              <a:buSzPts val="5200"/>
+              <a:buNone/>
+              <a:defRPr sz="5200"/>
+            </a:lvl2pPr>
+            <a:lvl3pPr lvl="2" algn="ctr">
+              <a:spcBef>
+                <a:spcPts val="0"/>
+              </a:spcBef>
+              <a:spcAft>
+                <a:spcPts val="0"/>
+              </a:spcAft>
+              <a:buSzPts val="5200"/>
+              <a:buNone/>
+              <a:defRPr sz="5200"/>
+            </a:lvl3pPr>
+            <a:lvl4pPr lvl="3" algn="ctr">
+              <a:spcBef>
+                <a:spcPts val="0"/>
+              </a:spcBef>
+              <a:spcAft>
+                <a:spcPts val="0"/>
+              </a:spcAft>
+              <a:buSzPts val="5200"/>
+              <a:buNone/>
+              <a:defRPr sz="5200"/>
+            </a:lvl4pPr>
+            <a:lvl5pPr lvl="4" algn="ctr">
+              <a:spcBef>
+                <a:spcPts val="0"/>
+              </a:spcBef>
+              <a:spcAft>
+                <a:spcPts val="0"/>
+              </a:spcAft>
+              <a:buSzPts val="5200"/>
+              <a:buNone/>
+              <a:defRPr sz="5200"/>
+            </a:lvl5pPr>
+            <a:lvl6pPr lvl="5" algn="ctr">
+              <a:spcBef>
+                <a:spcPts val="0"/>
+              </a:spcBef>
+              <a:spcAft>
+                <a:spcPts val="0"/>
+              </a:spcAft>
+              <a:buSzPts val="5200"/>
+              <a:buNone/>
+              <a:defRPr sz="5200"/>
+            </a:lvl6pPr>
+            <a:lvl7pPr lvl="6" algn="ctr">
+              <a:spcBef>
+                <a:spcPts val="0"/>
+              </a:spcBef>
+              <a:spcAft>
+                <a:spcPts val="0"/>
+              </a:spcAft>
+              <a:buSzPts val="5200"/>
+              <a:buNone/>
+              <a:defRPr sz="5200"/>
+            </a:lvl7pPr>
+            <a:lvl8pPr lvl="7" algn="ctr">
+              <a:spcBef>
+                <a:spcPts val="0"/>
+              </a:spcBef>
+              <a:spcAft>
+                <a:spcPts val="0"/>
+              </a:spcAft>
+              <a:buSzPts val="5200"/>
+              <a:buNone/>
+              <a:defRPr sz="5200"/>
+            </a:lvl8pPr>
+            <a:lvl9pPr lvl="8" algn="ctr">
+              <a:spcBef>
+                <a:spcPts val="0"/>
+              </a:spcBef>
+              <a:spcAft>
+                <a:spcPts val="0"/>
+              </a:spcAft>
+              <a:buSzPts val="5200"/>
+              <a:buNone/>
+              <a:defRPr sz="5200"/>
+            </a:lvl9pPr>
+          </a:lstStyle>
+          <a:p/>
+        </p:txBody>
+      </p:sp>
+      <p:sp>
+        <p:nvSpPr>
+          <p:cNvPr id="15" name="Google Shape;15;p2"/>
+          <p:cNvSpPr txBox="1"/>
+          <p:nvPr>
+            <p:ph idx="1" type="subTitle"/>
+          </p:nvPr>
+        </p:nvSpPr>
+        <p:spPr>
+          <a:xfrm>
+            <a:off x="311700" y="2834125"/>
+            <a:ext cx="8520600" cy="792600"/>
+          </a:xfrm>
+          <a:prstGeom prst="rect">
+            <a:avLst/>
+          </a:prstGeom>
+        </p:spPr>
+        <p:txBody>
+          <a:bodyPr anchorCtr="0" anchor="t" bIns="91425" lIns="91425" spcFirstLastPara="1" rIns="91425" wrap="square" tIns="91425">
+            <a:normAutofit/>
+          </a:bodyPr>
+          <a:lstStyle>
+            <a:lvl1pPr lvl="0" algn="ctr">
+              <a:lnSpc>
+                <a:spcPct val="100000"/>
+              </a:lnSpc>
+              <a:spcBef>
+                <a:spcPts val="0"/>
+              </a:spcBef>
+              <a:spcAft>
+                <a:spcPts val="0"/>
+              </a:spcAft>
+              <a:buSzPts val="2800"/>
+              <a:buNone/>
+              <a:defRPr sz="2800"/>
+            </a:lvl1pPr>
+            <a:lvl2pPr lvl="1" algn="ctr">
+              <a:lnSpc>
+                <a:spcPct val="100000"/>
+              </a:lnSpc>
+              <a:spcBef>
+                <a:spcPts val="0"/>
+              </a:spcBef>
+              <a:spcAft>
+                <a:spcPts val="0"/>
+              </a:spcAft>
+              <a:buSzPts val="2800"/>
+              <a:buNone/>
+              <a:defRPr sz="2800"/>
+            </a:lvl2pPr>
+            <a:lvl3pPr lvl="2" algn="ctr">
+              <a:lnSpc>
+                <a:spcPct val="100000"/>
+              </a:lnSpc>
+              <a:spcBef>
+                <a:spcPts val="0"/>
+              </a:spcBef>
+              <a:spcAft>
+                <a:spcPts val="0"/>
+              </a:spcAft>
+              <a:buSzPts val="2800"/>
+              <a:buNone/>
+              <a:defRPr sz="2800"/>
+            </a:lvl3pPr>
+            <a:lvl4pPr lvl="3" algn="ctr">
+              <a:lnSpc>
+                <a:spcPct val="100000"/>
+              </a:lnSpc>
+              <a:spcBef>
+                <a:spcPts val="0"/>
+              </a:spcBef>
+              <a:spcAft>
+                <a:spcPts val="0"/>
+              </a:spcAft>
+              <a:buSzPts val="2800"/>
+              <a:buNone/>
+              <a:defRPr sz="2800"/>
+            </a:lvl4pPr>
+            <a:lvl5pPr lvl="4" algn="ctr">
+              <a:lnSpc>
+                <a:spcPct val="100000"/>
+              </a:lnSpc>
+              <a:spcBef>
+                <a:spcPts val="0"/>
+              </a:spcBef>
+              <a:spcAft>
+                <a:spcPts val="0"/>
+              </a:spcAft>
+              <a:buSzPts val="2800"/>
+              <a:buNone/>
+              <a:defRPr sz="2800"/>
+            </a:lvl5pPr>
+            <a:lvl6pPr lvl="5" algn="ctr">
+              <a:lnSpc>
+                <a:spcPct val="100000"/>
+              </a:lnSpc>
+              <a:spcBef>
+                <a:spcPts val="0"/>
+              </a:spcBef>
+              <a:spcAft>
+                <a:spcPts val="0"/>
+              </a:spcAft>
+              <a:buSzPts val="2800"/>
+              <a:buNone/>
+              <a:defRPr sz="2800"/>
+            </a:lvl6pPr>
+            <a:lvl7pPr lvl="6" algn="ctr">
+              <a:lnSpc>
+                <a:spcPct val="100000"/>
+              </a:lnSpc>
+              <a:spcBef>
+                <a:spcPts val="0"/>
+              </a:spcBef>
+              <a:spcAft>
+                <a:spcPts val="0"/>
+              </a:spcAft>
+              <a:buSzPts val="2800"/>
+              <a:buNone/>
+              <a:defRPr sz="2800"/>
+            </a:lvl7pPr>
+            <a:lvl8pPr lvl="7" algn="ctr">
+              <a:lnSpc>
+                <a:spcPct val="100000"/>
+              </a:lnSpc>
+              <a:spcBef>
+                <a:spcPts val="0"/>
+              </a:spcBef>
+              <a:spcAft>
+                <a:spcPts val="0"/>
+              </a:spcAft>
+              <a:buSzPts val="2800"/>
+              <a:buNone/>
+              <a:defRPr sz="2800"/>
+            </a:lvl8pPr>
+            <a:lvl9pPr lvl="8" algn="ctr">
+              <a:lnSpc>
+                <a:spcPct val="100000"/>
+              </a:lnSpc>
+              <a:spcBef>
+                <a:spcPts val="0"/>
+              </a:spcBef>
+              <a:spcAft>
+                <a:spcPts val="0"/>
+              </a:spcAft>
+              <a:buSzPts val="2800"/>
+              <a:buNone/>
+              <a:defRPr sz="2800"/>
+            </a:lvl9pPr>
+          </a:lstStyle>
+          <a:p/>
+        </p:txBody>
+      </p:sp>
+      <p:sp>
+        <p:nvSpPr>
+          <p:cNvPr id="16" name="Google Shape;16;p2"/>
+          <p:cNvSpPr txBox="1"/>
+          <p:nvPr>
+            <p:ph idx="12" type="sldNum"/>
+          </p:nvPr>
+        </p:nvSpPr>
+        <p:spPr>
+          <a:xfrm>
+            <a:off x="8472458" y="4663217"/>
+            <a:ext cx="548700" cy="393600"/>
+          </a:xfrm>
+          <a:prstGeom prst="rect">
+            <a:avLst/>
+          </a:prstGeom>
+        </p:spPr>
+        <p:txBody>
+          <a:bodyPr anchorCtr="0" anchor="ctr" bIns="91425" lIns="91425" spcFirstLastPara="1" rIns="91425" wrap="square" tIns="91425">
+            <a:normAutofit/>
+          </a:bodyPr>
+          <a:lstStyle>
+            <a:lvl1pPr lvl="0">
+              <a:buNone/>
+              <a:defRPr/>
+            </a:lvl1pPr>
+            <a:lvl2pPr lvl="1">
+              <a:buNone/>
+              <a:defRPr/>
+            </a:lvl2pPr>
+            <a:lvl3pPr lvl="2">
+              <a:buNone/>
+              <a:defRPr/>
+            </a:lvl3pPr>
+            <a:lvl4pPr lvl="3">
+              <a:buNone/>
+              <a:defRPr/>
+            </a:lvl4pPr>
+            <a:lvl5pPr lvl="4">
+              <a:buNone/>
+              <a:defRPr/>
+            </a:lvl5pPr>
+            <a:lvl6pPr lvl="5">
+              <a:buNone/>
+              <a:defRPr/>
+            </a:lvl6pPr>
+            <a:lvl7pPr lvl="6">
+              <a:buNone/>
+              <a:defRPr/>
+            </a:lvl7pPr>
+            <a:lvl8pPr lvl="7">
+              <a:buNone/>
+              <a:defRPr/>
+            </a:lvl8pPr>
+            <a:lvl9pPr lvl="8">
+              <a:buNone/>
+              <a:defRPr/>
+            </a:lvl9pPr>
+          </a:lstStyle>
+          <a:p>
+            <a:pPr indent="0" lvl="0" marL="0" rtl="0" algn="r">
+              <a:spcBef>
+                <a:spcPts val="0"/>
+              </a:spcBef>
+              <a:spcAft>
+                <a:spcPts val="0"/>
+              </a:spcAft>
+              <a:buNone/>
+            </a:pPr>
+            <a:fld id="{00000000-1234-1234-1234-123412341234}" type="slidenum">
+              <a:rPr lang="en-US"/>
+              <a:t>‹#›</a:t>
+            </a:fld>
+            <a:endParaRPr/>
+          </a:p>
+        </p:txBody>
+      </p:sp>
+    </p:spTree>
+  </p:cSld>
+  <p:clrMapOvr>
+    <a:masterClrMapping/>
+  </p:clrMapOvr>
+</p:sldLayout>
+</file>
+
+<file path=ppt/slideLayouts/slideLayout10.xml><?xml version="1.0" encoding="utf-8"?>
+<p:sldLayout xmlns:a="http://schemas.openxmlformats.org/drawingml/2006/main" xmlns:r="http://schemas.openxmlformats.org/officeDocument/2006/relationships" xmlns:mc="http://schemas.openxmlformats.org/markup-compatibility/2006" xmlns:mv="urn:schemas-microsoft-com:mac:vml" xmlns:p="http://schemas.openxmlformats.org/presentationml/2006/main" xmlns:c="http://schemas.openxmlformats.org/drawingml/2006/chart" xmlns:dgm="http://schemas.openxmlformats.org/drawingml/2006/diagram" xmlns:o="urn:schemas-microsoft-com:office:office" xmlns:v="urn:schemas-microsoft-com:vml" xmlns:pvml="urn:schemas-microsoft-com:office:powerpoint" xmlns:com="http://schemas.openxmlformats.org/drawingml/2006/compatibility" xmlns:p14="http://schemas.microsoft.com/office/powerpoint/2010/main" xmlns:p15="http://schemas.microsoft.com/office/powerpoint/2012/main" xmlns:ahyp="http://schemas.microsoft.com/office/drawing/2018/hyperlinkcolor" matchingName="Big number">
+  <p:cSld name="BIG_NUMBER">
+    <p:spTree>
+      <p:nvGrpSpPr>
+        <p:cNvPr id="48" name="Shape 48"/>
+        <p:cNvGrpSpPr/>
+        <p:nvPr/>
+      </p:nvGrpSpPr>
+      <p:grpSpPr>
+        <a:xfrm>
+          <a:off x="0" y="0"/>
+          <a:ext cx="0" cy="0"/>
+          <a:chOff x="0" y="0"/>
+          <a:chExt cx="0" cy="0"/>
+        </a:xfrm>
+      </p:grpSpPr>
+      <p:sp>
+        <p:nvSpPr>
+          <p:cNvPr id="49" name="Google Shape;49;p11"/>
+          <p:cNvSpPr txBox="1"/>
+          <p:nvPr>
+            <p:ph hasCustomPrompt="1" type="title"/>
+          </p:nvPr>
+        </p:nvSpPr>
+        <p:spPr>
+          <a:xfrm>
+            <a:off x="311700" y="1106125"/>
+            <a:ext cx="8520600" cy="1963500"/>
+          </a:xfrm>
+          <a:prstGeom prst="rect">
+            <a:avLst/>
+          </a:prstGeom>
+        </p:spPr>
+        <p:txBody>
+          <a:bodyPr anchorCtr="0" anchor="b" bIns="91425" lIns="91425" spcFirstLastPara="1" rIns="91425" wrap="square" tIns="91425">
+            <a:normAutofit/>
+          </a:bodyPr>
+          <a:lstStyle>
+            <a:lvl1pPr lvl="0" algn="ctr">
+              <a:spcBef>
+                <a:spcPts val="0"/>
+              </a:spcBef>
+              <a:spcAft>
+                <a:spcPts val="0"/>
+              </a:spcAft>
+              <a:buSzPts val="12000"/>
+              <a:buNone/>
+              <a:defRPr sz="12000"/>
+            </a:lvl1pPr>
+            <a:lvl2pPr lvl="1" algn="ctr">
+              <a:spcBef>
+                <a:spcPts val="0"/>
+              </a:spcBef>
+              <a:spcAft>
+                <a:spcPts val="0"/>
+              </a:spcAft>
+              <a:buSzPts val="12000"/>
+              <a:buNone/>
+              <a:defRPr sz="12000"/>
+            </a:lvl2pPr>
+            <a:lvl3pPr lvl="2" algn="ctr">
+              <a:spcBef>
+                <a:spcPts val="0"/>
+              </a:spcBef>
+              <a:spcAft>
+                <a:spcPts val="0"/>
+              </a:spcAft>
+              <a:buSzPts val="12000"/>
+              <a:buNone/>
+              <a:defRPr sz="12000"/>
+            </a:lvl3pPr>
+            <a:lvl4pPr lvl="3" algn="ctr">
+              <a:spcBef>
+                <a:spcPts val="0"/>
+              </a:spcBef>
+              <a:spcAft>
+                <a:spcPts val="0"/>
+              </a:spcAft>
+              <a:buSzPts val="12000"/>
+              <a:buNone/>
+              <a:defRPr sz="12000"/>
+            </a:lvl4pPr>
+            <a:lvl5pPr lvl="4" algn="ctr">
+              <a:spcBef>
+                <a:spcPts val="0"/>
+              </a:spcBef>
+              <a:spcAft>
+                <a:spcPts val="0"/>
+              </a:spcAft>
+              <a:buSzPts val="12000"/>
+              <a:buNone/>
+              <a:defRPr sz="12000"/>
+            </a:lvl5pPr>
+            <a:lvl6pPr lvl="5" algn="ctr">
+              <a:spcBef>
+                <a:spcPts val="0"/>
+              </a:spcBef>
+              <a:spcAft>
+                <a:spcPts val="0"/>
+              </a:spcAft>
+              <a:buSzPts val="12000"/>
+              <a:buNone/>
+              <a:defRPr sz="12000"/>
+            </a:lvl6pPr>
+            <a:lvl7pPr lvl="6" algn="ctr">
+              <a:spcBef>
+                <a:spcPts val="0"/>
+              </a:spcBef>
+              <a:spcAft>
+                <a:spcPts val="0"/>
+              </a:spcAft>
+              <a:buSzPts val="12000"/>
+              <a:buNone/>
+              <a:defRPr sz="12000"/>
+            </a:lvl7pPr>
+            <a:lvl8pPr lvl="7" algn="ctr">
+              <a:spcBef>
+                <a:spcPts val="0"/>
+              </a:spcBef>
+              <a:spcAft>
+                <a:spcPts val="0"/>
+              </a:spcAft>
+              <a:buSzPts val="12000"/>
+              <a:buNone/>
+              <a:defRPr sz="12000"/>
+            </a:lvl8pPr>
+            <a:lvl9pPr lvl="8" algn="ctr">
+              <a:spcBef>
+                <a:spcPts val="0"/>
+              </a:spcBef>
+              <a:spcAft>
+                <a:spcPts val="0"/>
+              </a:spcAft>
+              <a:buSzPts val="12000"/>
+              <a:buNone/>
+              <a:defRPr sz="12000"/>
+            </a:lvl9pPr>
+          </a:lstStyle>
+          <a:p>
+            <a:r>
+              <a:t>xx%</a:t>
+            </a:r>
+          </a:p>
+        </p:txBody>
+      </p:sp>
+      <p:sp>
+        <p:nvSpPr>
+          <p:cNvPr id="50" name="Google Shape;50;p11"/>
+          <p:cNvSpPr txBox="1"/>
+          <p:nvPr>
+            <p:ph idx="1" type="body"/>
+          </p:nvPr>
+        </p:nvSpPr>
+        <p:spPr>
+          <a:xfrm>
+            <a:off x="311700" y="3152225"/>
+            <a:ext cx="8520600" cy="1300800"/>
+          </a:xfrm>
+          <a:prstGeom prst="rect">
+            <a:avLst/>
+          </a:prstGeom>
+        </p:spPr>
+        <p:txBody>
+          <a:bodyPr anchorCtr="0" anchor="t" bIns="91425" lIns="91425" spcFirstLastPara="1" rIns="91425" wrap="square" tIns="91425">
+            <a:normAutofit/>
+          </a:bodyPr>
+          <a:lstStyle>
+            <a:lvl1pPr indent="-342900" lvl="0" marL="457200" algn="ctr">
+              <a:spcBef>
+                <a:spcPts val="0"/>
+              </a:spcBef>
+              <a:spcAft>
+                <a:spcPts val="0"/>
+              </a:spcAft>
+              <a:buSzPts val="1800"/>
+              <a:buChar char="●"/>
+              <a:defRPr/>
+            </a:lvl1pPr>
+            <a:lvl2pPr indent="-317500" lvl="1" marL="914400" algn="ctr">
+              <a:spcBef>
+                <a:spcPts val="0"/>
+              </a:spcBef>
+              <a:spcAft>
+                <a:spcPts val="0"/>
+              </a:spcAft>
+              <a:buSzPts val="1400"/>
+              <a:buChar char="○"/>
+              <a:defRPr/>
+            </a:lvl2pPr>
+            <a:lvl3pPr indent="-317500" lvl="2" marL="1371600" algn="ctr">
+              <a:spcBef>
+                <a:spcPts val="0"/>
+              </a:spcBef>
+              <a:spcAft>
+                <a:spcPts val="0"/>
+              </a:spcAft>
+              <a:buSzPts val="1400"/>
+              <a:buChar char="■"/>
+              <a:defRPr/>
+            </a:lvl3pPr>
+            <a:lvl4pPr indent="-317500" lvl="3" marL="1828800" algn="ctr">
+              <a:spcBef>
+                <a:spcPts val="0"/>
+              </a:spcBef>
+              <a:spcAft>
+                <a:spcPts val="0"/>
+              </a:spcAft>
+              <a:buSzPts val="1400"/>
+              <a:buChar char="●"/>
+              <a:defRPr/>
+            </a:lvl4pPr>
+            <a:lvl5pPr indent="-317500" lvl="4" marL="2286000" algn="ctr">
+              <a:spcBef>
+                <a:spcPts val="0"/>
+              </a:spcBef>
+              <a:spcAft>
+                <a:spcPts val="0"/>
+              </a:spcAft>
+              <a:buSzPts val="1400"/>
+              <a:buChar char="○"/>
+              <a:defRPr/>
+            </a:lvl5pPr>
+            <a:lvl6pPr indent="-317500" lvl="5" marL="2743200" algn="ctr">
+              <a:spcBef>
+                <a:spcPts val="0"/>
+              </a:spcBef>
+              <a:spcAft>
+                <a:spcPts val="0"/>
+              </a:spcAft>
+              <a:buSzPts val="1400"/>
+              <a:buChar char="■"/>
+              <a:defRPr/>
+            </a:lvl6pPr>
+            <a:lvl7pPr indent="-317500" lvl="6" marL="3200400" algn="ctr">
+              <a:spcBef>
+                <a:spcPts val="0"/>
+              </a:spcBef>
+              <a:spcAft>
+                <a:spcPts val="0"/>
+              </a:spcAft>
+              <a:buSzPts val="1400"/>
+              <a:buChar char="●"/>
+              <a:defRPr/>
+            </a:lvl7pPr>
+            <a:lvl8pPr indent="-317500" lvl="7" marL="3657600" algn="ctr">
+              <a:spcBef>
+                <a:spcPts val="0"/>
+              </a:spcBef>
+              <a:spcAft>
+                <a:spcPts val="0"/>
+              </a:spcAft>
+              <a:buSzPts val="1400"/>
+              <a:buChar char="○"/>
+              <a:defRPr/>
+            </a:lvl8pPr>
+            <a:lvl9pPr indent="-317500" lvl="8" marL="4114800" algn="ctr">
+              <a:spcBef>
+                <a:spcPts val="0"/>
+              </a:spcBef>
+              <a:spcAft>
+                <a:spcPts val="0"/>
+              </a:spcAft>
+              <a:buSzPts val="1400"/>
+              <a:buChar char="■"/>
+              <a:defRPr/>
+            </a:lvl9pPr>
+          </a:lstStyle>
+          <a:p/>
+        </p:txBody>
+      </p:sp>
+      <p:sp>
+        <p:nvSpPr>
+          <p:cNvPr id="51" name="Google Shape;51;p11"/>
+          <p:cNvSpPr txBox="1"/>
+          <p:nvPr>
+            <p:ph idx="12" type="sldNum"/>
+          </p:nvPr>
+        </p:nvSpPr>
+        <p:spPr>
+          <a:xfrm>
+            <a:off x="8472458" y="4663217"/>
+            <a:ext cx="548700" cy="393600"/>
+          </a:xfrm>
+          <a:prstGeom prst="rect">
+            <a:avLst/>
+          </a:prstGeom>
+        </p:spPr>
+        <p:txBody>
+          <a:bodyPr anchorCtr="0" anchor="ctr" bIns="91425" lIns="91425" spcFirstLastPara="1" rIns="91425" wrap="square" tIns="91425">
+            <a:normAutofit/>
+          </a:bodyPr>
+          <a:lstStyle>
+            <a:lvl1pPr lvl="0">
+              <a:buNone/>
+              <a:defRPr/>
+            </a:lvl1pPr>
+            <a:lvl2pPr lvl="1">
+              <a:buNone/>
+              <a:defRPr/>
+            </a:lvl2pPr>
+            <a:lvl3pPr lvl="2">
+              <a:buNone/>
+              <a:defRPr/>
+            </a:lvl3pPr>
+            <a:lvl4pPr lvl="3">
+              <a:buNone/>
+              <a:defRPr/>
+            </a:lvl4pPr>
+            <a:lvl5pPr lvl="4">
+              <a:buNone/>
+              <a:defRPr/>
+            </a:lvl5pPr>
+            <a:lvl6pPr lvl="5">
+              <a:buNone/>
+              <a:defRPr/>
+            </a:lvl6pPr>
+            <a:lvl7pPr lvl="6">
+              <a:buNone/>
+              <a:defRPr/>
+            </a:lvl7pPr>
+            <a:lvl8pPr lvl="7">
+              <a:buNone/>
+              <a:defRPr/>
+            </a:lvl8pPr>
+            <a:lvl9pPr lvl="8">
+              <a:buNone/>
+              <a:defRPr/>
+            </a:lvl9pPr>
+          </a:lstStyle>
+          <a:p>
+            <a:pPr indent="0" lvl="0" marL="0" rtl="0" algn="r">
+              <a:spcBef>
+                <a:spcPts val="0"/>
+              </a:spcBef>
+              <a:spcAft>
+                <a:spcPts val="0"/>
+              </a:spcAft>
+              <a:buNone/>
+            </a:pPr>
+            <a:fld id="{00000000-1234-1234-1234-123412341234}" type="slidenum">
+              <a:rPr lang="en-US"/>
+              <a:t>‹#›</a:t>
+            </a:fld>
+            <a:endParaRPr/>
+          </a:p>
+        </p:txBody>
+      </p:sp>
+    </p:spTree>
+  </p:cSld>
+  <p:clrMapOvr>
+    <a:masterClrMapping/>
+  </p:clrMapOvr>
+</p:sldLayout>
+</file>
+
+<file path=ppt/slideLayouts/slideLayout11.xml><?xml version="1.0" encoding="utf-8"?>
+<p:sldLayout xmlns:a="http://schemas.openxmlformats.org/drawingml/2006/main" xmlns:r="http://schemas.openxmlformats.org/officeDocument/2006/relationships" xmlns:mc="http://schemas.openxmlformats.org/markup-compatibility/2006" xmlns:mv="urn:schemas-microsoft-com:mac:vml" xmlns:p="http://schemas.openxmlformats.org/presentationml/2006/main" xmlns:c="http://schemas.openxmlformats.org/drawingml/2006/chart" xmlns:dgm="http://schemas.openxmlformats.org/drawingml/2006/diagram" xmlns:o="urn:schemas-microsoft-com:office:office" xmlns:v="urn:schemas-microsoft-com:vml" xmlns:pvml="urn:schemas-microsoft-com:office:powerpoint" xmlns:com="http://schemas.openxmlformats.org/drawingml/2006/compatibility" xmlns:p14="http://schemas.microsoft.com/office/powerpoint/2010/main" xmlns:p15="http://schemas.microsoft.com/office/powerpoint/2012/main" xmlns:ahyp="http://schemas.microsoft.com/office/drawing/2018/hyperlinkcolor" matchingName="Blank" type="blank">
+  <p:cSld name="BLANK">
+    <p:spTree>
+      <p:nvGrpSpPr>
+        <p:cNvPr id="52" name="Shape 52"/>
+        <p:cNvGrpSpPr/>
+        <p:nvPr/>
+      </p:nvGrpSpPr>
+      <p:grpSpPr>
+        <a:xfrm>
+          <a:off x="0" y="0"/>
+          <a:ext cx="0" cy="0"/>
+          <a:chOff x="0" y="0"/>
+          <a:chExt cx="0" cy="0"/>
+        </a:xfrm>
+      </p:grpSpPr>
+      <p:sp>
+        <p:nvSpPr>
+          <p:cNvPr id="53" name="Google Shape;53;p12"/>
+          <p:cNvSpPr txBox="1"/>
+          <p:nvPr>
+            <p:ph idx="12" type="sldNum"/>
+          </p:nvPr>
+        </p:nvSpPr>
+        <p:spPr>
+          <a:xfrm>
+            <a:off x="8472458" y="4663217"/>
+            <a:ext cx="548700" cy="393600"/>
+          </a:xfrm>
+          <a:prstGeom prst="rect">
+            <a:avLst/>
+          </a:prstGeom>
+        </p:spPr>
+        <p:txBody>
+          <a:bodyPr anchorCtr="0" anchor="ctr" bIns="91425" lIns="91425" spcFirstLastPara="1" rIns="91425" wrap="square" tIns="91425">
+            <a:normAutofit/>
+          </a:bodyPr>
+          <a:lstStyle>
+            <a:lvl1pPr lvl="0">
+              <a:buNone/>
+              <a:defRPr/>
+            </a:lvl1pPr>
+            <a:lvl2pPr lvl="1">
+              <a:buNone/>
+              <a:defRPr/>
+            </a:lvl2pPr>
+            <a:lvl3pPr lvl="2">
+              <a:buNone/>
+              <a:defRPr/>
+            </a:lvl3pPr>
+            <a:lvl4pPr lvl="3">
+              <a:buNone/>
+              <a:defRPr/>
+            </a:lvl4pPr>
+            <a:lvl5pPr lvl="4">
+              <a:buNone/>
+              <a:defRPr/>
+            </a:lvl5pPr>
+            <a:lvl6pPr lvl="5">
+              <a:buNone/>
+              <a:defRPr/>
+            </a:lvl6pPr>
+            <a:lvl7pPr lvl="6">
+              <a:buNone/>
+              <a:defRPr/>
+            </a:lvl7pPr>
+            <a:lvl8pPr lvl="7">
+              <a:buNone/>
+              <a:defRPr/>
+            </a:lvl8pPr>
+            <a:lvl9pPr lvl="8">
+              <a:buNone/>
+              <a:defRPr/>
+            </a:lvl9pPr>
+          </a:lstStyle>
+          <a:p>
+            <a:pPr indent="0" lvl="0" marL="0" rtl="0" algn="r">
+              <a:spcBef>
+                <a:spcPts val="0"/>
+              </a:spcBef>
+              <a:spcAft>
+                <a:spcPts val="0"/>
+              </a:spcAft>
+              <a:buNone/>
+            </a:pPr>
+            <a:fld id="{00000000-1234-1234-1234-123412341234}" type="slidenum">
+              <a:rPr lang="en-US"/>
+              <a:t>‹#›</a:t>
+            </a:fld>
+            <a:endParaRPr/>
+          </a:p>
+        </p:txBody>
+      </p:sp>
+    </p:spTree>
+  </p:cSld>
+  <p:clrMapOvr>
+    <a:masterClrMapping/>
+  </p:clrMapOvr>
+</p:sldLayout>
+</file>
+
+<file path=ppt/slideLayouts/slideLayout12.xml><?xml version="1.0" encoding="utf-8"?>
 <p:sldLayout xmlns:a="http://schemas.openxmlformats.org/drawingml/2006/main" xmlns:r="http://schemas.openxmlformats.org/officeDocument/2006/relationships" xmlns:mc="http://schemas.openxmlformats.org/markup-compatibility/2006" xmlns:mv="urn:schemas-microsoft-com:mac:vml" xmlns:p="http://schemas.openxmlformats.org/presentationml/2006/main" xmlns:c="http://schemas.openxmlformats.org/drawingml/2006/chart" xmlns:dgm="http://schemas.openxmlformats.org/drawingml/2006/diagram" xmlns:o="urn:schemas-microsoft-com:office:office" xmlns:v="urn:schemas-microsoft-com:vml" xmlns:pvml="urn:schemas-microsoft-com:office:powerpoint" xmlns:com="http://schemas.openxmlformats.org/drawingml/2006/compatibility" xmlns:p14="http://schemas.microsoft.com/office/powerpoint/2010/main" xmlns:p15="http://schemas.microsoft.com/office/powerpoint/2012/main" xmlns:ahyp="http://schemas.microsoft.com/office/drawing/2018/hyperlinkcolor" matchingName="DEFAULT">
   <p:cSld name="DEFAULT">
     <p:bg>
@@ -2845,7 +3840,7 @@
     </p:bg>
     <p:spTree>
       <p:nvGrpSpPr>
-        <p:cNvPr id="10" name="Shape 10"/>
+        <p:cNvPr id="54" name="Shape 54"/>
         <p:cNvGrpSpPr/>
         <p:nvPr/>
       </p:nvGrpSpPr>
@@ -2865,9 +3860,2567 @@
 </p:sldLayout>
 </file>
 
+<file path=ppt/slideLayouts/slideLayout2.xml><?xml version="1.0" encoding="utf-8"?>
+<p:sldLayout xmlns:a="http://schemas.openxmlformats.org/drawingml/2006/main" xmlns:r="http://schemas.openxmlformats.org/officeDocument/2006/relationships" xmlns:mc="http://schemas.openxmlformats.org/markup-compatibility/2006" xmlns:mv="urn:schemas-microsoft-com:mac:vml" xmlns:p="http://schemas.openxmlformats.org/presentationml/2006/main" xmlns:c="http://schemas.openxmlformats.org/drawingml/2006/chart" xmlns:dgm="http://schemas.openxmlformats.org/drawingml/2006/diagram" xmlns:o="urn:schemas-microsoft-com:office:office" xmlns:v="urn:schemas-microsoft-com:vml" xmlns:pvml="urn:schemas-microsoft-com:office:powerpoint" xmlns:com="http://schemas.openxmlformats.org/drawingml/2006/compatibility" xmlns:p14="http://schemas.microsoft.com/office/powerpoint/2010/main" xmlns:p15="http://schemas.microsoft.com/office/powerpoint/2012/main" xmlns:ahyp="http://schemas.microsoft.com/office/drawing/2018/hyperlinkcolor" matchingName="Section header" type="secHead">
+  <p:cSld name="SECTION_HEADER">
+    <p:spTree>
+      <p:nvGrpSpPr>
+        <p:cNvPr id="17" name="Shape 17"/>
+        <p:cNvGrpSpPr/>
+        <p:nvPr/>
+      </p:nvGrpSpPr>
+      <p:grpSpPr>
+        <a:xfrm>
+          <a:off x="0" y="0"/>
+          <a:ext cx="0" cy="0"/>
+          <a:chOff x="0" y="0"/>
+          <a:chExt cx="0" cy="0"/>
+        </a:xfrm>
+      </p:grpSpPr>
+      <p:sp>
+        <p:nvSpPr>
+          <p:cNvPr id="18" name="Google Shape;18;p3"/>
+          <p:cNvSpPr txBox="1"/>
+          <p:nvPr>
+            <p:ph type="title"/>
+          </p:nvPr>
+        </p:nvSpPr>
+        <p:spPr>
+          <a:xfrm>
+            <a:off x="311700" y="2150850"/>
+            <a:ext cx="8520600" cy="841800"/>
+          </a:xfrm>
+          <a:prstGeom prst="rect">
+            <a:avLst/>
+          </a:prstGeom>
+        </p:spPr>
+        <p:txBody>
+          <a:bodyPr anchorCtr="0" anchor="ctr" bIns="91425" lIns="91425" spcFirstLastPara="1" rIns="91425" wrap="square" tIns="91425">
+            <a:normAutofit/>
+          </a:bodyPr>
+          <a:lstStyle>
+            <a:lvl1pPr lvl="0" algn="ctr">
+              <a:spcBef>
+                <a:spcPts val="0"/>
+              </a:spcBef>
+              <a:spcAft>
+                <a:spcPts val="0"/>
+              </a:spcAft>
+              <a:buSzPts val="3600"/>
+              <a:buNone/>
+              <a:defRPr sz="3600"/>
+            </a:lvl1pPr>
+            <a:lvl2pPr lvl="1" algn="ctr">
+              <a:spcBef>
+                <a:spcPts val="0"/>
+              </a:spcBef>
+              <a:spcAft>
+                <a:spcPts val="0"/>
+              </a:spcAft>
+              <a:buSzPts val="3600"/>
+              <a:buNone/>
+              <a:defRPr sz="3600"/>
+            </a:lvl2pPr>
+            <a:lvl3pPr lvl="2" algn="ctr">
+              <a:spcBef>
+                <a:spcPts val="0"/>
+              </a:spcBef>
+              <a:spcAft>
+                <a:spcPts val="0"/>
+              </a:spcAft>
+              <a:buSzPts val="3600"/>
+              <a:buNone/>
+              <a:defRPr sz="3600"/>
+            </a:lvl3pPr>
+            <a:lvl4pPr lvl="3" algn="ctr">
+              <a:spcBef>
+                <a:spcPts val="0"/>
+              </a:spcBef>
+              <a:spcAft>
+                <a:spcPts val="0"/>
+              </a:spcAft>
+              <a:buSzPts val="3600"/>
+              <a:buNone/>
+              <a:defRPr sz="3600"/>
+            </a:lvl4pPr>
+            <a:lvl5pPr lvl="4" algn="ctr">
+              <a:spcBef>
+                <a:spcPts val="0"/>
+              </a:spcBef>
+              <a:spcAft>
+                <a:spcPts val="0"/>
+              </a:spcAft>
+              <a:buSzPts val="3600"/>
+              <a:buNone/>
+              <a:defRPr sz="3600"/>
+            </a:lvl5pPr>
+            <a:lvl6pPr lvl="5" algn="ctr">
+              <a:spcBef>
+                <a:spcPts val="0"/>
+              </a:spcBef>
+              <a:spcAft>
+                <a:spcPts val="0"/>
+              </a:spcAft>
+              <a:buSzPts val="3600"/>
+              <a:buNone/>
+              <a:defRPr sz="3600"/>
+            </a:lvl6pPr>
+            <a:lvl7pPr lvl="6" algn="ctr">
+              <a:spcBef>
+                <a:spcPts val="0"/>
+              </a:spcBef>
+              <a:spcAft>
+                <a:spcPts val="0"/>
+              </a:spcAft>
+              <a:buSzPts val="3600"/>
+              <a:buNone/>
+              <a:defRPr sz="3600"/>
+            </a:lvl7pPr>
+            <a:lvl8pPr lvl="7" algn="ctr">
+              <a:spcBef>
+                <a:spcPts val="0"/>
+              </a:spcBef>
+              <a:spcAft>
+                <a:spcPts val="0"/>
+              </a:spcAft>
+              <a:buSzPts val="3600"/>
+              <a:buNone/>
+              <a:defRPr sz="3600"/>
+            </a:lvl8pPr>
+            <a:lvl9pPr lvl="8" algn="ctr">
+              <a:spcBef>
+                <a:spcPts val="0"/>
+              </a:spcBef>
+              <a:spcAft>
+                <a:spcPts val="0"/>
+              </a:spcAft>
+              <a:buSzPts val="3600"/>
+              <a:buNone/>
+              <a:defRPr sz="3600"/>
+            </a:lvl9pPr>
+          </a:lstStyle>
+          <a:p/>
+        </p:txBody>
+      </p:sp>
+      <p:sp>
+        <p:nvSpPr>
+          <p:cNvPr id="19" name="Google Shape;19;p3"/>
+          <p:cNvSpPr txBox="1"/>
+          <p:nvPr>
+            <p:ph idx="12" type="sldNum"/>
+          </p:nvPr>
+        </p:nvSpPr>
+        <p:spPr>
+          <a:xfrm>
+            <a:off x="8472458" y="4663217"/>
+            <a:ext cx="548700" cy="393600"/>
+          </a:xfrm>
+          <a:prstGeom prst="rect">
+            <a:avLst/>
+          </a:prstGeom>
+        </p:spPr>
+        <p:txBody>
+          <a:bodyPr anchorCtr="0" anchor="ctr" bIns="91425" lIns="91425" spcFirstLastPara="1" rIns="91425" wrap="square" tIns="91425">
+            <a:normAutofit/>
+          </a:bodyPr>
+          <a:lstStyle>
+            <a:lvl1pPr lvl="0">
+              <a:buNone/>
+              <a:defRPr/>
+            </a:lvl1pPr>
+            <a:lvl2pPr lvl="1">
+              <a:buNone/>
+              <a:defRPr/>
+            </a:lvl2pPr>
+            <a:lvl3pPr lvl="2">
+              <a:buNone/>
+              <a:defRPr/>
+            </a:lvl3pPr>
+            <a:lvl4pPr lvl="3">
+              <a:buNone/>
+              <a:defRPr/>
+            </a:lvl4pPr>
+            <a:lvl5pPr lvl="4">
+              <a:buNone/>
+              <a:defRPr/>
+            </a:lvl5pPr>
+            <a:lvl6pPr lvl="5">
+              <a:buNone/>
+              <a:defRPr/>
+            </a:lvl6pPr>
+            <a:lvl7pPr lvl="6">
+              <a:buNone/>
+              <a:defRPr/>
+            </a:lvl7pPr>
+            <a:lvl8pPr lvl="7">
+              <a:buNone/>
+              <a:defRPr/>
+            </a:lvl8pPr>
+            <a:lvl9pPr lvl="8">
+              <a:buNone/>
+              <a:defRPr/>
+            </a:lvl9pPr>
+          </a:lstStyle>
+          <a:p>
+            <a:pPr indent="0" lvl="0" marL="0" rtl="0" algn="r">
+              <a:spcBef>
+                <a:spcPts val="0"/>
+              </a:spcBef>
+              <a:spcAft>
+                <a:spcPts val="0"/>
+              </a:spcAft>
+              <a:buNone/>
+            </a:pPr>
+            <a:fld id="{00000000-1234-1234-1234-123412341234}" type="slidenum">
+              <a:rPr lang="en-US"/>
+              <a:t>‹#›</a:t>
+            </a:fld>
+            <a:endParaRPr/>
+          </a:p>
+        </p:txBody>
+      </p:sp>
+    </p:spTree>
+  </p:cSld>
+  <p:clrMapOvr>
+    <a:masterClrMapping/>
+  </p:clrMapOvr>
+</p:sldLayout>
+</file>
+
+<file path=ppt/slideLayouts/slideLayout3.xml><?xml version="1.0" encoding="utf-8"?>
+<p:sldLayout xmlns:a="http://schemas.openxmlformats.org/drawingml/2006/main" xmlns:r="http://schemas.openxmlformats.org/officeDocument/2006/relationships" xmlns:mc="http://schemas.openxmlformats.org/markup-compatibility/2006" xmlns:mv="urn:schemas-microsoft-com:mac:vml" xmlns:p="http://schemas.openxmlformats.org/presentationml/2006/main" xmlns:c="http://schemas.openxmlformats.org/drawingml/2006/chart" xmlns:dgm="http://schemas.openxmlformats.org/drawingml/2006/diagram" xmlns:o="urn:schemas-microsoft-com:office:office" xmlns:v="urn:schemas-microsoft-com:vml" xmlns:pvml="urn:schemas-microsoft-com:office:powerpoint" xmlns:com="http://schemas.openxmlformats.org/drawingml/2006/compatibility" xmlns:p14="http://schemas.microsoft.com/office/powerpoint/2010/main" xmlns:p15="http://schemas.microsoft.com/office/powerpoint/2012/main" xmlns:ahyp="http://schemas.microsoft.com/office/drawing/2018/hyperlinkcolor" matchingName="Title and body" type="tx">
+  <p:cSld name="TITLE_AND_BODY">
+    <p:spTree>
+      <p:nvGrpSpPr>
+        <p:cNvPr id="20" name="Shape 20"/>
+        <p:cNvGrpSpPr/>
+        <p:nvPr/>
+      </p:nvGrpSpPr>
+      <p:grpSpPr>
+        <a:xfrm>
+          <a:off x="0" y="0"/>
+          <a:ext cx="0" cy="0"/>
+          <a:chOff x="0" y="0"/>
+          <a:chExt cx="0" cy="0"/>
+        </a:xfrm>
+      </p:grpSpPr>
+      <p:sp>
+        <p:nvSpPr>
+          <p:cNvPr id="21" name="Google Shape;21;p4"/>
+          <p:cNvSpPr txBox="1"/>
+          <p:nvPr>
+            <p:ph type="title"/>
+          </p:nvPr>
+        </p:nvSpPr>
+        <p:spPr>
+          <a:xfrm>
+            <a:off x="311700" y="445025"/>
+            <a:ext cx="8520600" cy="572700"/>
+          </a:xfrm>
+          <a:prstGeom prst="rect">
+            <a:avLst/>
+          </a:prstGeom>
+        </p:spPr>
+        <p:txBody>
+          <a:bodyPr anchorCtr="0" anchor="t" bIns="91425" lIns="91425" spcFirstLastPara="1" rIns="91425" wrap="square" tIns="91425">
+            <a:normAutofit/>
+          </a:bodyPr>
+          <a:lstStyle>
+            <a:lvl1pPr lvl="0">
+              <a:spcBef>
+                <a:spcPts val="0"/>
+              </a:spcBef>
+              <a:spcAft>
+                <a:spcPts val="0"/>
+              </a:spcAft>
+              <a:buSzPts val="2800"/>
+              <a:buNone/>
+              <a:defRPr/>
+            </a:lvl1pPr>
+            <a:lvl2pPr lvl="1">
+              <a:spcBef>
+                <a:spcPts val="0"/>
+              </a:spcBef>
+              <a:spcAft>
+                <a:spcPts val="0"/>
+              </a:spcAft>
+              <a:buSzPts val="2800"/>
+              <a:buNone/>
+              <a:defRPr/>
+            </a:lvl2pPr>
+            <a:lvl3pPr lvl="2">
+              <a:spcBef>
+                <a:spcPts val="0"/>
+              </a:spcBef>
+              <a:spcAft>
+                <a:spcPts val="0"/>
+              </a:spcAft>
+              <a:buSzPts val="2800"/>
+              <a:buNone/>
+              <a:defRPr/>
+            </a:lvl3pPr>
+            <a:lvl4pPr lvl="3">
+              <a:spcBef>
+                <a:spcPts val="0"/>
+              </a:spcBef>
+              <a:spcAft>
+                <a:spcPts val="0"/>
+              </a:spcAft>
+              <a:buSzPts val="2800"/>
+              <a:buNone/>
+              <a:defRPr/>
+            </a:lvl4pPr>
+            <a:lvl5pPr lvl="4">
+              <a:spcBef>
+                <a:spcPts val="0"/>
+              </a:spcBef>
+              <a:spcAft>
+                <a:spcPts val="0"/>
+              </a:spcAft>
+              <a:buSzPts val="2800"/>
+              <a:buNone/>
+              <a:defRPr/>
+            </a:lvl5pPr>
+            <a:lvl6pPr lvl="5">
+              <a:spcBef>
+                <a:spcPts val="0"/>
+              </a:spcBef>
+              <a:spcAft>
+                <a:spcPts val="0"/>
+              </a:spcAft>
+              <a:buSzPts val="2800"/>
+              <a:buNone/>
+              <a:defRPr/>
+            </a:lvl6pPr>
+            <a:lvl7pPr lvl="6">
+              <a:spcBef>
+                <a:spcPts val="0"/>
+              </a:spcBef>
+              <a:spcAft>
+                <a:spcPts val="0"/>
+              </a:spcAft>
+              <a:buSzPts val="2800"/>
+              <a:buNone/>
+              <a:defRPr/>
+            </a:lvl7pPr>
+            <a:lvl8pPr lvl="7">
+              <a:spcBef>
+                <a:spcPts val="0"/>
+              </a:spcBef>
+              <a:spcAft>
+                <a:spcPts val="0"/>
+              </a:spcAft>
+              <a:buSzPts val="2800"/>
+              <a:buNone/>
+              <a:defRPr/>
+            </a:lvl8pPr>
+            <a:lvl9pPr lvl="8">
+              <a:spcBef>
+                <a:spcPts val="0"/>
+              </a:spcBef>
+              <a:spcAft>
+                <a:spcPts val="0"/>
+              </a:spcAft>
+              <a:buSzPts val="2800"/>
+              <a:buNone/>
+              <a:defRPr/>
+            </a:lvl9pPr>
+          </a:lstStyle>
+          <a:p/>
+        </p:txBody>
+      </p:sp>
+      <p:sp>
+        <p:nvSpPr>
+          <p:cNvPr id="22" name="Google Shape;22;p4"/>
+          <p:cNvSpPr txBox="1"/>
+          <p:nvPr>
+            <p:ph idx="1" type="body"/>
+          </p:nvPr>
+        </p:nvSpPr>
+        <p:spPr>
+          <a:xfrm>
+            <a:off x="311700" y="1152475"/>
+            <a:ext cx="8520600" cy="3416400"/>
+          </a:xfrm>
+          <a:prstGeom prst="rect">
+            <a:avLst/>
+          </a:prstGeom>
+        </p:spPr>
+        <p:txBody>
+          <a:bodyPr anchorCtr="0" anchor="t" bIns="91425" lIns="91425" spcFirstLastPara="1" rIns="91425" wrap="square" tIns="91425">
+            <a:normAutofit/>
+          </a:bodyPr>
+          <a:lstStyle>
+            <a:lvl1pPr indent="-342900" lvl="0" marL="457200">
+              <a:spcBef>
+                <a:spcPts val="0"/>
+              </a:spcBef>
+              <a:spcAft>
+                <a:spcPts val="0"/>
+              </a:spcAft>
+              <a:buSzPts val="1800"/>
+              <a:buChar char="●"/>
+              <a:defRPr/>
+            </a:lvl1pPr>
+            <a:lvl2pPr indent="-317500" lvl="1" marL="914400">
+              <a:spcBef>
+                <a:spcPts val="0"/>
+              </a:spcBef>
+              <a:spcAft>
+                <a:spcPts val="0"/>
+              </a:spcAft>
+              <a:buSzPts val="1400"/>
+              <a:buChar char="○"/>
+              <a:defRPr/>
+            </a:lvl2pPr>
+            <a:lvl3pPr indent="-317500" lvl="2" marL="1371600">
+              <a:spcBef>
+                <a:spcPts val="0"/>
+              </a:spcBef>
+              <a:spcAft>
+                <a:spcPts val="0"/>
+              </a:spcAft>
+              <a:buSzPts val="1400"/>
+              <a:buChar char="■"/>
+              <a:defRPr/>
+            </a:lvl3pPr>
+            <a:lvl4pPr indent="-317500" lvl="3" marL="1828800">
+              <a:spcBef>
+                <a:spcPts val="0"/>
+              </a:spcBef>
+              <a:spcAft>
+                <a:spcPts val="0"/>
+              </a:spcAft>
+              <a:buSzPts val="1400"/>
+              <a:buChar char="●"/>
+              <a:defRPr/>
+            </a:lvl4pPr>
+            <a:lvl5pPr indent="-317500" lvl="4" marL="2286000">
+              <a:spcBef>
+                <a:spcPts val="0"/>
+              </a:spcBef>
+              <a:spcAft>
+                <a:spcPts val="0"/>
+              </a:spcAft>
+              <a:buSzPts val="1400"/>
+              <a:buChar char="○"/>
+              <a:defRPr/>
+            </a:lvl5pPr>
+            <a:lvl6pPr indent="-317500" lvl="5" marL="2743200">
+              <a:spcBef>
+                <a:spcPts val="0"/>
+              </a:spcBef>
+              <a:spcAft>
+                <a:spcPts val="0"/>
+              </a:spcAft>
+              <a:buSzPts val="1400"/>
+              <a:buChar char="■"/>
+              <a:defRPr/>
+            </a:lvl6pPr>
+            <a:lvl7pPr indent="-317500" lvl="6" marL="3200400">
+              <a:spcBef>
+                <a:spcPts val="0"/>
+              </a:spcBef>
+              <a:spcAft>
+                <a:spcPts val="0"/>
+              </a:spcAft>
+              <a:buSzPts val="1400"/>
+              <a:buChar char="●"/>
+              <a:defRPr/>
+            </a:lvl7pPr>
+            <a:lvl8pPr indent="-317500" lvl="7" marL="3657600">
+              <a:spcBef>
+                <a:spcPts val="0"/>
+              </a:spcBef>
+              <a:spcAft>
+                <a:spcPts val="0"/>
+              </a:spcAft>
+              <a:buSzPts val="1400"/>
+              <a:buChar char="○"/>
+              <a:defRPr/>
+            </a:lvl8pPr>
+            <a:lvl9pPr indent="-317500" lvl="8" marL="4114800">
+              <a:spcBef>
+                <a:spcPts val="0"/>
+              </a:spcBef>
+              <a:spcAft>
+                <a:spcPts val="0"/>
+              </a:spcAft>
+              <a:buSzPts val="1400"/>
+              <a:buChar char="■"/>
+              <a:defRPr/>
+            </a:lvl9pPr>
+          </a:lstStyle>
+          <a:p/>
+        </p:txBody>
+      </p:sp>
+      <p:sp>
+        <p:nvSpPr>
+          <p:cNvPr id="23" name="Google Shape;23;p4"/>
+          <p:cNvSpPr txBox="1"/>
+          <p:nvPr>
+            <p:ph idx="12" type="sldNum"/>
+          </p:nvPr>
+        </p:nvSpPr>
+        <p:spPr>
+          <a:xfrm>
+            <a:off x="8472458" y="4663217"/>
+            <a:ext cx="548700" cy="393600"/>
+          </a:xfrm>
+          <a:prstGeom prst="rect">
+            <a:avLst/>
+          </a:prstGeom>
+        </p:spPr>
+        <p:txBody>
+          <a:bodyPr anchorCtr="0" anchor="ctr" bIns="91425" lIns="91425" spcFirstLastPara="1" rIns="91425" wrap="square" tIns="91425">
+            <a:normAutofit/>
+          </a:bodyPr>
+          <a:lstStyle>
+            <a:lvl1pPr lvl="0">
+              <a:buNone/>
+              <a:defRPr/>
+            </a:lvl1pPr>
+            <a:lvl2pPr lvl="1">
+              <a:buNone/>
+              <a:defRPr/>
+            </a:lvl2pPr>
+            <a:lvl3pPr lvl="2">
+              <a:buNone/>
+              <a:defRPr/>
+            </a:lvl3pPr>
+            <a:lvl4pPr lvl="3">
+              <a:buNone/>
+              <a:defRPr/>
+            </a:lvl4pPr>
+            <a:lvl5pPr lvl="4">
+              <a:buNone/>
+              <a:defRPr/>
+            </a:lvl5pPr>
+            <a:lvl6pPr lvl="5">
+              <a:buNone/>
+              <a:defRPr/>
+            </a:lvl6pPr>
+            <a:lvl7pPr lvl="6">
+              <a:buNone/>
+              <a:defRPr/>
+            </a:lvl7pPr>
+            <a:lvl8pPr lvl="7">
+              <a:buNone/>
+              <a:defRPr/>
+            </a:lvl8pPr>
+            <a:lvl9pPr lvl="8">
+              <a:buNone/>
+              <a:defRPr/>
+            </a:lvl9pPr>
+          </a:lstStyle>
+          <a:p>
+            <a:pPr indent="0" lvl="0" marL="0" rtl="0" algn="r">
+              <a:spcBef>
+                <a:spcPts val="0"/>
+              </a:spcBef>
+              <a:spcAft>
+                <a:spcPts val="0"/>
+              </a:spcAft>
+              <a:buNone/>
+            </a:pPr>
+            <a:fld id="{00000000-1234-1234-1234-123412341234}" type="slidenum">
+              <a:rPr lang="en-US"/>
+              <a:t>‹#›</a:t>
+            </a:fld>
+            <a:endParaRPr/>
+          </a:p>
+        </p:txBody>
+      </p:sp>
+    </p:spTree>
+  </p:cSld>
+  <p:clrMapOvr>
+    <a:masterClrMapping/>
+  </p:clrMapOvr>
+</p:sldLayout>
+</file>
+
+<file path=ppt/slideLayouts/slideLayout4.xml><?xml version="1.0" encoding="utf-8"?>
+<p:sldLayout xmlns:a="http://schemas.openxmlformats.org/drawingml/2006/main" xmlns:r="http://schemas.openxmlformats.org/officeDocument/2006/relationships" xmlns:mc="http://schemas.openxmlformats.org/markup-compatibility/2006" xmlns:mv="urn:schemas-microsoft-com:mac:vml" xmlns:p="http://schemas.openxmlformats.org/presentationml/2006/main" xmlns:c="http://schemas.openxmlformats.org/drawingml/2006/chart" xmlns:dgm="http://schemas.openxmlformats.org/drawingml/2006/diagram" xmlns:o="urn:schemas-microsoft-com:office:office" xmlns:v="urn:schemas-microsoft-com:vml" xmlns:pvml="urn:schemas-microsoft-com:office:powerpoint" xmlns:com="http://schemas.openxmlformats.org/drawingml/2006/compatibility" xmlns:p14="http://schemas.microsoft.com/office/powerpoint/2010/main" xmlns:p15="http://schemas.microsoft.com/office/powerpoint/2012/main" xmlns:ahyp="http://schemas.microsoft.com/office/drawing/2018/hyperlinkcolor" matchingName="Title and two columns" type="twoColTx">
+  <p:cSld name="TITLE_AND_TWO_COLUMNS">
+    <p:spTree>
+      <p:nvGrpSpPr>
+        <p:cNvPr id="24" name="Shape 24"/>
+        <p:cNvGrpSpPr/>
+        <p:nvPr/>
+      </p:nvGrpSpPr>
+      <p:grpSpPr>
+        <a:xfrm>
+          <a:off x="0" y="0"/>
+          <a:ext cx="0" cy="0"/>
+          <a:chOff x="0" y="0"/>
+          <a:chExt cx="0" cy="0"/>
+        </a:xfrm>
+      </p:grpSpPr>
+      <p:sp>
+        <p:nvSpPr>
+          <p:cNvPr id="25" name="Google Shape;25;p5"/>
+          <p:cNvSpPr txBox="1"/>
+          <p:nvPr>
+            <p:ph type="title"/>
+          </p:nvPr>
+        </p:nvSpPr>
+        <p:spPr>
+          <a:xfrm>
+            <a:off x="311700" y="445025"/>
+            <a:ext cx="8520600" cy="572700"/>
+          </a:xfrm>
+          <a:prstGeom prst="rect">
+            <a:avLst/>
+          </a:prstGeom>
+        </p:spPr>
+        <p:txBody>
+          <a:bodyPr anchorCtr="0" anchor="t" bIns="91425" lIns="91425" spcFirstLastPara="1" rIns="91425" wrap="square" tIns="91425">
+            <a:normAutofit/>
+          </a:bodyPr>
+          <a:lstStyle>
+            <a:lvl1pPr lvl="0">
+              <a:spcBef>
+                <a:spcPts val="0"/>
+              </a:spcBef>
+              <a:spcAft>
+                <a:spcPts val="0"/>
+              </a:spcAft>
+              <a:buSzPts val="2800"/>
+              <a:buNone/>
+              <a:defRPr/>
+            </a:lvl1pPr>
+            <a:lvl2pPr lvl="1">
+              <a:spcBef>
+                <a:spcPts val="0"/>
+              </a:spcBef>
+              <a:spcAft>
+                <a:spcPts val="0"/>
+              </a:spcAft>
+              <a:buSzPts val="2800"/>
+              <a:buNone/>
+              <a:defRPr/>
+            </a:lvl2pPr>
+            <a:lvl3pPr lvl="2">
+              <a:spcBef>
+                <a:spcPts val="0"/>
+              </a:spcBef>
+              <a:spcAft>
+                <a:spcPts val="0"/>
+              </a:spcAft>
+              <a:buSzPts val="2800"/>
+              <a:buNone/>
+              <a:defRPr/>
+            </a:lvl3pPr>
+            <a:lvl4pPr lvl="3">
+              <a:spcBef>
+                <a:spcPts val="0"/>
+              </a:spcBef>
+              <a:spcAft>
+                <a:spcPts val="0"/>
+              </a:spcAft>
+              <a:buSzPts val="2800"/>
+              <a:buNone/>
+              <a:defRPr/>
+            </a:lvl4pPr>
+            <a:lvl5pPr lvl="4">
+              <a:spcBef>
+                <a:spcPts val="0"/>
+              </a:spcBef>
+              <a:spcAft>
+                <a:spcPts val="0"/>
+              </a:spcAft>
+              <a:buSzPts val="2800"/>
+              <a:buNone/>
+              <a:defRPr/>
+            </a:lvl5pPr>
+            <a:lvl6pPr lvl="5">
+              <a:spcBef>
+                <a:spcPts val="0"/>
+              </a:spcBef>
+              <a:spcAft>
+                <a:spcPts val="0"/>
+              </a:spcAft>
+              <a:buSzPts val="2800"/>
+              <a:buNone/>
+              <a:defRPr/>
+            </a:lvl6pPr>
+            <a:lvl7pPr lvl="6">
+              <a:spcBef>
+                <a:spcPts val="0"/>
+              </a:spcBef>
+              <a:spcAft>
+                <a:spcPts val="0"/>
+              </a:spcAft>
+              <a:buSzPts val="2800"/>
+              <a:buNone/>
+              <a:defRPr/>
+            </a:lvl7pPr>
+            <a:lvl8pPr lvl="7">
+              <a:spcBef>
+                <a:spcPts val="0"/>
+              </a:spcBef>
+              <a:spcAft>
+                <a:spcPts val="0"/>
+              </a:spcAft>
+              <a:buSzPts val="2800"/>
+              <a:buNone/>
+              <a:defRPr/>
+            </a:lvl8pPr>
+            <a:lvl9pPr lvl="8">
+              <a:spcBef>
+                <a:spcPts val="0"/>
+              </a:spcBef>
+              <a:spcAft>
+                <a:spcPts val="0"/>
+              </a:spcAft>
+              <a:buSzPts val="2800"/>
+              <a:buNone/>
+              <a:defRPr/>
+            </a:lvl9pPr>
+          </a:lstStyle>
+          <a:p/>
+        </p:txBody>
+      </p:sp>
+      <p:sp>
+        <p:nvSpPr>
+          <p:cNvPr id="26" name="Google Shape;26;p5"/>
+          <p:cNvSpPr txBox="1"/>
+          <p:nvPr>
+            <p:ph idx="1" type="body"/>
+          </p:nvPr>
+        </p:nvSpPr>
+        <p:spPr>
+          <a:xfrm>
+            <a:off x="311700" y="1152475"/>
+            <a:ext cx="3999900" cy="3416400"/>
+          </a:xfrm>
+          <a:prstGeom prst="rect">
+            <a:avLst/>
+          </a:prstGeom>
+        </p:spPr>
+        <p:txBody>
+          <a:bodyPr anchorCtr="0" anchor="t" bIns="91425" lIns="91425" spcFirstLastPara="1" rIns="91425" wrap="square" tIns="91425">
+            <a:normAutofit/>
+          </a:bodyPr>
+          <a:lstStyle>
+            <a:lvl1pPr indent="-317500" lvl="0" marL="457200">
+              <a:spcBef>
+                <a:spcPts val="0"/>
+              </a:spcBef>
+              <a:spcAft>
+                <a:spcPts val="0"/>
+              </a:spcAft>
+              <a:buSzPts val="1400"/>
+              <a:buChar char="●"/>
+              <a:defRPr sz="1400"/>
+            </a:lvl1pPr>
+            <a:lvl2pPr indent="-304800" lvl="1" marL="914400">
+              <a:spcBef>
+                <a:spcPts val="0"/>
+              </a:spcBef>
+              <a:spcAft>
+                <a:spcPts val="0"/>
+              </a:spcAft>
+              <a:buSzPts val="1200"/>
+              <a:buChar char="○"/>
+              <a:defRPr sz="1200"/>
+            </a:lvl2pPr>
+            <a:lvl3pPr indent="-304800" lvl="2" marL="1371600">
+              <a:spcBef>
+                <a:spcPts val="0"/>
+              </a:spcBef>
+              <a:spcAft>
+                <a:spcPts val="0"/>
+              </a:spcAft>
+              <a:buSzPts val="1200"/>
+              <a:buChar char="■"/>
+              <a:defRPr sz="1200"/>
+            </a:lvl3pPr>
+            <a:lvl4pPr indent="-304800" lvl="3" marL="1828800">
+              <a:spcBef>
+                <a:spcPts val="0"/>
+              </a:spcBef>
+              <a:spcAft>
+                <a:spcPts val="0"/>
+              </a:spcAft>
+              <a:buSzPts val="1200"/>
+              <a:buChar char="●"/>
+              <a:defRPr sz="1200"/>
+            </a:lvl4pPr>
+            <a:lvl5pPr indent="-304800" lvl="4" marL="2286000">
+              <a:spcBef>
+                <a:spcPts val="0"/>
+              </a:spcBef>
+              <a:spcAft>
+                <a:spcPts val="0"/>
+              </a:spcAft>
+              <a:buSzPts val="1200"/>
+              <a:buChar char="○"/>
+              <a:defRPr sz="1200"/>
+            </a:lvl5pPr>
+            <a:lvl6pPr indent="-304800" lvl="5" marL="2743200">
+              <a:spcBef>
+                <a:spcPts val="0"/>
+              </a:spcBef>
+              <a:spcAft>
+                <a:spcPts val="0"/>
+              </a:spcAft>
+              <a:buSzPts val="1200"/>
+              <a:buChar char="■"/>
+              <a:defRPr sz="1200"/>
+            </a:lvl6pPr>
+            <a:lvl7pPr indent="-304800" lvl="6" marL="3200400">
+              <a:spcBef>
+                <a:spcPts val="0"/>
+              </a:spcBef>
+              <a:spcAft>
+                <a:spcPts val="0"/>
+              </a:spcAft>
+              <a:buSzPts val="1200"/>
+              <a:buChar char="●"/>
+              <a:defRPr sz="1200"/>
+            </a:lvl7pPr>
+            <a:lvl8pPr indent="-304800" lvl="7" marL="3657600">
+              <a:spcBef>
+                <a:spcPts val="0"/>
+              </a:spcBef>
+              <a:spcAft>
+                <a:spcPts val="0"/>
+              </a:spcAft>
+              <a:buSzPts val="1200"/>
+              <a:buChar char="○"/>
+              <a:defRPr sz="1200"/>
+            </a:lvl8pPr>
+            <a:lvl9pPr indent="-304800" lvl="8" marL="4114800">
+              <a:spcBef>
+                <a:spcPts val="0"/>
+              </a:spcBef>
+              <a:spcAft>
+                <a:spcPts val="0"/>
+              </a:spcAft>
+              <a:buSzPts val="1200"/>
+              <a:buChar char="■"/>
+              <a:defRPr sz="1200"/>
+            </a:lvl9pPr>
+          </a:lstStyle>
+          <a:p/>
+        </p:txBody>
+      </p:sp>
+      <p:sp>
+        <p:nvSpPr>
+          <p:cNvPr id="27" name="Google Shape;27;p5"/>
+          <p:cNvSpPr txBox="1"/>
+          <p:nvPr>
+            <p:ph idx="2" type="body"/>
+          </p:nvPr>
+        </p:nvSpPr>
+        <p:spPr>
+          <a:xfrm>
+            <a:off x="4832400" y="1152475"/>
+            <a:ext cx="3999900" cy="3416400"/>
+          </a:xfrm>
+          <a:prstGeom prst="rect">
+            <a:avLst/>
+          </a:prstGeom>
+        </p:spPr>
+        <p:txBody>
+          <a:bodyPr anchorCtr="0" anchor="t" bIns="91425" lIns="91425" spcFirstLastPara="1" rIns="91425" wrap="square" tIns="91425">
+            <a:normAutofit/>
+          </a:bodyPr>
+          <a:lstStyle>
+            <a:lvl1pPr indent="-317500" lvl="0" marL="457200">
+              <a:spcBef>
+                <a:spcPts val="0"/>
+              </a:spcBef>
+              <a:spcAft>
+                <a:spcPts val="0"/>
+              </a:spcAft>
+              <a:buSzPts val="1400"/>
+              <a:buChar char="●"/>
+              <a:defRPr sz="1400"/>
+            </a:lvl1pPr>
+            <a:lvl2pPr indent="-304800" lvl="1" marL="914400">
+              <a:spcBef>
+                <a:spcPts val="0"/>
+              </a:spcBef>
+              <a:spcAft>
+                <a:spcPts val="0"/>
+              </a:spcAft>
+              <a:buSzPts val="1200"/>
+              <a:buChar char="○"/>
+              <a:defRPr sz="1200"/>
+            </a:lvl2pPr>
+            <a:lvl3pPr indent="-304800" lvl="2" marL="1371600">
+              <a:spcBef>
+                <a:spcPts val="0"/>
+              </a:spcBef>
+              <a:spcAft>
+                <a:spcPts val="0"/>
+              </a:spcAft>
+              <a:buSzPts val="1200"/>
+              <a:buChar char="■"/>
+              <a:defRPr sz="1200"/>
+            </a:lvl3pPr>
+            <a:lvl4pPr indent="-304800" lvl="3" marL="1828800">
+              <a:spcBef>
+                <a:spcPts val="0"/>
+              </a:spcBef>
+              <a:spcAft>
+                <a:spcPts val="0"/>
+              </a:spcAft>
+              <a:buSzPts val="1200"/>
+              <a:buChar char="●"/>
+              <a:defRPr sz="1200"/>
+            </a:lvl4pPr>
+            <a:lvl5pPr indent="-304800" lvl="4" marL="2286000">
+              <a:spcBef>
+                <a:spcPts val="0"/>
+              </a:spcBef>
+              <a:spcAft>
+                <a:spcPts val="0"/>
+              </a:spcAft>
+              <a:buSzPts val="1200"/>
+              <a:buChar char="○"/>
+              <a:defRPr sz="1200"/>
+            </a:lvl5pPr>
+            <a:lvl6pPr indent="-304800" lvl="5" marL="2743200">
+              <a:spcBef>
+                <a:spcPts val="0"/>
+              </a:spcBef>
+              <a:spcAft>
+                <a:spcPts val="0"/>
+              </a:spcAft>
+              <a:buSzPts val="1200"/>
+              <a:buChar char="■"/>
+              <a:defRPr sz="1200"/>
+            </a:lvl6pPr>
+            <a:lvl7pPr indent="-304800" lvl="6" marL="3200400">
+              <a:spcBef>
+                <a:spcPts val="0"/>
+              </a:spcBef>
+              <a:spcAft>
+                <a:spcPts val="0"/>
+              </a:spcAft>
+              <a:buSzPts val="1200"/>
+              <a:buChar char="●"/>
+              <a:defRPr sz="1200"/>
+            </a:lvl7pPr>
+            <a:lvl8pPr indent="-304800" lvl="7" marL="3657600">
+              <a:spcBef>
+                <a:spcPts val="0"/>
+              </a:spcBef>
+              <a:spcAft>
+                <a:spcPts val="0"/>
+              </a:spcAft>
+              <a:buSzPts val="1200"/>
+              <a:buChar char="○"/>
+              <a:defRPr sz="1200"/>
+            </a:lvl8pPr>
+            <a:lvl9pPr indent="-304800" lvl="8" marL="4114800">
+              <a:spcBef>
+                <a:spcPts val="0"/>
+              </a:spcBef>
+              <a:spcAft>
+                <a:spcPts val="0"/>
+              </a:spcAft>
+              <a:buSzPts val="1200"/>
+              <a:buChar char="■"/>
+              <a:defRPr sz="1200"/>
+            </a:lvl9pPr>
+          </a:lstStyle>
+          <a:p/>
+        </p:txBody>
+      </p:sp>
+      <p:sp>
+        <p:nvSpPr>
+          <p:cNvPr id="28" name="Google Shape;28;p5"/>
+          <p:cNvSpPr txBox="1"/>
+          <p:nvPr>
+            <p:ph idx="12" type="sldNum"/>
+          </p:nvPr>
+        </p:nvSpPr>
+        <p:spPr>
+          <a:xfrm>
+            <a:off x="8472458" y="4663217"/>
+            <a:ext cx="548700" cy="393600"/>
+          </a:xfrm>
+          <a:prstGeom prst="rect">
+            <a:avLst/>
+          </a:prstGeom>
+        </p:spPr>
+        <p:txBody>
+          <a:bodyPr anchorCtr="0" anchor="ctr" bIns="91425" lIns="91425" spcFirstLastPara="1" rIns="91425" wrap="square" tIns="91425">
+            <a:normAutofit/>
+          </a:bodyPr>
+          <a:lstStyle>
+            <a:lvl1pPr lvl="0">
+              <a:buNone/>
+              <a:defRPr/>
+            </a:lvl1pPr>
+            <a:lvl2pPr lvl="1">
+              <a:buNone/>
+              <a:defRPr/>
+            </a:lvl2pPr>
+            <a:lvl3pPr lvl="2">
+              <a:buNone/>
+              <a:defRPr/>
+            </a:lvl3pPr>
+            <a:lvl4pPr lvl="3">
+              <a:buNone/>
+              <a:defRPr/>
+            </a:lvl4pPr>
+            <a:lvl5pPr lvl="4">
+              <a:buNone/>
+              <a:defRPr/>
+            </a:lvl5pPr>
+            <a:lvl6pPr lvl="5">
+              <a:buNone/>
+              <a:defRPr/>
+            </a:lvl6pPr>
+            <a:lvl7pPr lvl="6">
+              <a:buNone/>
+              <a:defRPr/>
+            </a:lvl7pPr>
+            <a:lvl8pPr lvl="7">
+              <a:buNone/>
+              <a:defRPr/>
+            </a:lvl8pPr>
+            <a:lvl9pPr lvl="8">
+              <a:buNone/>
+              <a:defRPr/>
+            </a:lvl9pPr>
+          </a:lstStyle>
+          <a:p>
+            <a:pPr indent="0" lvl="0" marL="0" rtl="0" algn="r">
+              <a:spcBef>
+                <a:spcPts val="0"/>
+              </a:spcBef>
+              <a:spcAft>
+                <a:spcPts val="0"/>
+              </a:spcAft>
+              <a:buNone/>
+            </a:pPr>
+            <a:fld id="{00000000-1234-1234-1234-123412341234}" type="slidenum">
+              <a:rPr lang="en-US"/>
+              <a:t>‹#›</a:t>
+            </a:fld>
+            <a:endParaRPr/>
+          </a:p>
+        </p:txBody>
+      </p:sp>
+    </p:spTree>
+  </p:cSld>
+  <p:clrMapOvr>
+    <a:masterClrMapping/>
+  </p:clrMapOvr>
+</p:sldLayout>
+</file>
+
+<file path=ppt/slideLayouts/slideLayout5.xml><?xml version="1.0" encoding="utf-8"?>
+<p:sldLayout xmlns:a="http://schemas.openxmlformats.org/drawingml/2006/main" xmlns:r="http://schemas.openxmlformats.org/officeDocument/2006/relationships" xmlns:mc="http://schemas.openxmlformats.org/markup-compatibility/2006" xmlns:mv="urn:schemas-microsoft-com:mac:vml" xmlns:p="http://schemas.openxmlformats.org/presentationml/2006/main" xmlns:c="http://schemas.openxmlformats.org/drawingml/2006/chart" xmlns:dgm="http://schemas.openxmlformats.org/drawingml/2006/diagram" xmlns:o="urn:schemas-microsoft-com:office:office" xmlns:v="urn:schemas-microsoft-com:vml" xmlns:pvml="urn:schemas-microsoft-com:office:powerpoint" xmlns:com="http://schemas.openxmlformats.org/drawingml/2006/compatibility" xmlns:p14="http://schemas.microsoft.com/office/powerpoint/2010/main" xmlns:p15="http://schemas.microsoft.com/office/powerpoint/2012/main" xmlns:ahyp="http://schemas.microsoft.com/office/drawing/2018/hyperlinkcolor" matchingName="Title only" type="titleOnly">
+  <p:cSld name="TITLE_ONLY">
+    <p:spTree>
+      <p:nvGrpSpPr>
+        <p:cNvPr id="29" name="Shape 29"/>
+        <p:cNvGrpSpPr/>
+        <p:nvPr/>
+      </p:nvGrpSpPr>
+      <p:grpSpPr>
+        <a:xfrm>
+          <a:off x="0" y="0"/>
+          <a:ext cx="0" cy="0"/>
+          <a:chOff x="0" y="0"/>
+          <a:chExt cx="0" cy="0"/>
+        </a:xfrm>
+      </p:grpSpPr>
+      <p:sp>
+        <p:nvSpPr>
+          <p:cNvPr id="30" name="Google Shape;30;p6"/>
+          <p:cNvSpPr txBox="1"/>
+          <p:nvPr>
+            <p:ph type="title"/>
+          </p:nvPr>
+        </p:nvSpPr>
+        <p:spPr>
+          <a:xfrm>
+            <a:off x="311700" y="445025"/>
+            <a:ext cx="8520600" cy="572700"/>
+          </a:xfrm>
+          <a:prstGeom prst="rect">
+            <a:avLst/>
+          </a:prstGeom>
+        </p:spPr>
+        <p:txBody>
+          <a:bodyPr anchorCtr="0" anchor="t" bIns="91425" lIns="91425" spcFirstLastPara="1" rIns="91425" wrap="square" tIns="91425">
+            <a:normAutofit/>
+          </a:bodyPr>
+          <a:lstStyle>
+            <a:lvl1pPr lvl="0">
+              <a:spcBef>
+                <a:spcPts val="0"/>
+              </a:spcBef>
+              <a:spcAft>
+                <a:spcPts val="0"/>
+              </a:spcAft>
+              <a:buSzPts val="2800"/>
+              <a:buNone/>
+              <a:defRPr/>
+            </a:lvl1pPr>
+            <a:lvl2pPr lvl="1">
+              <a:spcBef>
+                <a:spcPts val="0"/>
+              </a:spcBef>
+              <a:spcAft>
+                <a:spcPts val="0"/>
+              </a:spcAft>
+              <a:buSzPts val="2800"/>
+              <a:buNone/>
+              <a:defRPr/>
+            </a:lvl2pPr>
+            <a:lvl3pPr lvl="2">
+              <a:spcBef>
+                <a:spcPts val="0"/>
+              </a:spcBef>
+              <a:spcAft>
+                <a:spcPts val="0"/>
+              </a:spcAft>
+              <a:buSzPts val="2800"/>
+              <a:buNone/>
+              <a:defRPr/>
+            </a:lvl3pPr>
+            <a:lvl4pPr lvl="3">
+              <a:spcBef>
+                <a:spcPts val="0"/>
+              </a:spcBef>
+              <a:spcAft>
+                <a:spcPts val="0"/>
+              </a:spcAft>
+              <a:buSzPts val="2800"/>
+              <a:buNone/>
+              <a:defRPr/>
+            </a:lvl4pPr>
+            <a:lvl5pPr lvl="4">
+              <a:spcBef>
+                <a:spcPts val="0"/>
+              </a:spcBef>
+              <a:spcAft>
+                <a:spcPts val="0"/>
+              </a:spcAft>
+              <a:buSzPts val="2800"/>
+              <a:buNone/>
+              <a:defRPr/>
+            </a:lvl5pPr>
+            <a:lvl6pPr lvl="5">
+              <a:spcBef>
+                <a:spcPts val="0"/>
+              </a:spcBef>
+              <a:spcAft>
+                <a:spcPts val="0"/>
+              </a:spcAft>
+              <a:buSzPts val="2800"/>
+              <a:buNone/>
+              <a:defRPr/>
+            </a:lvl6pPr>
+            <a:lvl7pPr lvl="6">
+              <a:spcBef>
+                <a:spcPts val="0"/>
+              </a:spcBef>
+              <a:spcAft>
+                <a:spcPts val="0"/>
+              </a:spcAft>
+              <a:buSzPts val="2800"/>
+              <a:buNone/>
+              <a:defRPr/>
+            </a:lvl7pPr>
+            <a:lvl8pPr lvl="7">
+              <a:spcBef>
+                <a:spcPts val="0"/>
+              </a:spcBef>
+              <a:spcAft>
+                <a:spcPts val="0"/>
+              </a:spcAft>
+              <a:buSzPts val="2800"/>
+              <a:buNone/>
+              <a:defRPr/>
+            </a:lvl8pPr>
+            <a:lvl9pPr lvl="8">
+              <a:spcBef>
+                <a:spcPts val="0"/>
+              </a:spcBef>
+              <a:spcAft>
+                <a:spcPts val="0"/>
+              </a:spcAft>
+              <a:buSzPts val="2800"/>
+              <a:buNone/>
+              <a:defRPr/>
+            </a:lvl9pPr>
+          </a:lstStyle>
+          <a:p/>
+        </p:txBody>
+      </p:sp>
+      <p:sp>
+        <p:nvSpPr>
+          <p:cNvPr id="31" name="Google Shape;31;p6"/>
+          <p:cNvSpPr txBox="1"/>
+          <p:nvPr>
+            <p:ph idx="12" type="sldNum"/>
+          </p:nvPr>
+        </p:nvSpPr>
+        <p:spPr>
+          <a:xfrm>
+            <a:off x="8472458" y="4663217"/>
+            <a:ext cx="548700" cy="393600"/>
+          </a:xfrm>
+          <a:prstGeom prst="rect">
+            <a:avLst/>
+          </a:prstGeom>
+        </p:spPr>
+        <p:txBody>
+          <a:bodyPr anchorCtr="0" anchor="ctr" bIns="91425" lIns="91425" spcFirstLastPara="1" rIns="91425" wrap="square" tIns="91425">
+            <a:normAutofit/>
+          </a:bodyPr>
+          <a:lstStyle>
+            <a:lvl1pPr lvl="0">
+              <a:buNone/>
+              <a:defRPr/>
+            </a:lvl1pPr>
+            <a:lvl2pPr lvl="1">
+              <a:buNone/>
+              <a:defRPr/>
+            </a:lvl2pPr>
+            <a:lvl3pPr lvl="2">
+              <a:buNone/>
+              <a:defRPr/>
+            </a:lvl3pPr>
+            <a:lvl4pPr lvl="3">
+              <a:buNone/>
+              <a:defRPr/>
+            </a:lvl4pPr>
+            <a:lvl5pPr lvl="4">
+              <a:buNone/>
+              <a:defRPr/>
+            </a:lvl5pPr>
+            <a:lvl6pPr lvl="5">
+              <a:buNone/>
+              <a:defRPr/>
+            </a:lvl6pPr>
+            <a:lvl7pPr lvl="6">
+              <a:buNone/>
+              <a:defRPr/>
+            </a:lvl7pPr>
+            <a:lvl8pPr lvl="7">
+              <a:buNone/>
+              <a:defRPr/>
+            </a:lvl8pPr>
+            <a:lvl9pPr lvl="8">
+              <a:buNone/>
+              <a:defRPr/>
+            </a:lvl9pPr>
+          </a:lstStyle>
+          <a:p>
+            <a:pPr indent="0" lvl="0" marL="0" rtl="0" algn="r">
+              <a:spcBef>
+                <a:spcPts val="0"/>
+              </a:spcBef>
+              <a:spcAft>
+                <a:spcPts val="0"/>
+              </a:spcAft>
+              <a:buNone/>
+            </a:pPr>
+            <a:fld id="{00000000-1234-1234-1234-123412341234}" type="slidenum">
+              <a:rPr lang="en-US"/>
+              <a:t>‹#›</a:t>
+            </a:fld>
+            <a:endParaRPr/>
+          </a:p>
+        </p:txBody>
+      </p:sp>
+    </p:spTree>
+  </p:cSld>
+  <p:clrMapOvr>
+    <a:masterClrMapping/>
+  </p:clrMapOvr>
+</p:sldLayout>
+</file>
+
+<file path=ppt/slideLayouts/slideLayout6.xml><?xml version="1.0" encoding="utf-8"?>
+<p:sldLayout xmlns:a="http://schemas.openxmlformats.org/drawingml/2006/main" xmlns:r="http://schemas.openxmlformats.org/officeDocument/2006/relationships" xmlns:mc="http://schemas.openxmlformats.org/markup-compatibility/2006" xmlns:mv="urn:schemas-microsoft-com:mac:vml" xmlns:p="http://schemas.openxmlformats.org/presentationml/2006/main" xmlns:c="http://schemas.openxmlformats.org/drawingml/2006/chart" xmlns:dgm="http://schemas.openxmlformats.org/drawingml/2006/diagram" xmlns:o="urn:schemas-microsoft-com:office:office" xmlns:v="urn:schemas-microsoft-com:vml" xmlns:pvml="urn:schemas-microsoft-com:office:powerpoint" xmlns:com="http://schemas.openxmlformats.org/drawingml/2006/compatibility" xmlns:p14="http://schemas.microsoft.com/office/powerpoint/2010/main" xmlns:p15="http://schemas.microsoft.com/office/powerpoint/2012/main" xmlns:ahyp="http://schemas.microsoft.com/office/drawing/2018/hyperlinkcolor" matchingName="One column text">
+  <p:cSld name="ONE_COLUMN_TEXT">
+    <p:spTree>
+      <p:nvGrpSpPr>
+        <p:cNvPr id="32" name="Shape 32"/>
+        <p:cNvGrpSpPr/>
+        <p:nvPr/>
+      </p:nvGrpSpPr>
+      <p:grpSpPr>
+        <a:xfrm>
+          <a:off x="0" y="0"/>
+          <a:ext cx="0" cy="0"/>
+          <a:chOff x="0" y="0"/>
+          <a:chExt cx="0" cy="0"/>
+        </a:xfrm>
+      </p:grpSpPr>
+      <p:sp>
+        <p:nvSpPr>
+          <p:cNvPr id="33" name="Google Shape;33;p7"/>
+          <p:cNvSpPr txBox="1"/>
+          <p:nvPr>
+            <p:ph type="title"/>
+          </p:nvPr>
+        </p:nvSpPr>
+        <p:spPr>
+          <a:xfrm>
+            <a:off x="311700" y="555600"/>
+            <a:ext cx="2808000" cy="755700"/>
+          </a:xfrm>
+          <a:prstGeom prst="rect">
+            <a:avLst/>
+          </a:prstGeom>
+        </p:spPr>
+        <p:txBody>
+          <a:bodyPr anchorCtr="0" anchor="b" bIns="91425" lIns="91425" spcFirstLastPara="1" rIns="91425" wrap="square" tIns="91425">
+            <a:normAutofit/>
+          </a:bodyPr>
+          <a:lstStyle>
+            <a:lvl1pPr lvl="0">
+              <a:spcBef>
+                <a:spcPts val="0"/>
+              </a:spcBef>
+              <a:spcAft>
+                <a:spcPts val="0"/>
+              </a:spcAft>
+              <a:buSzPts val="2400"/>
+              <a:buNone/>
+              <a:defRPr sz="2400"/>
+            </a:lvl1pPr>
+            <a:lvl2pPr lvl="1">
+              <a:spcBef>
+                <a:spcPts val="0"/>
+              </a:spcBef>
+              <a:spcAft>
+                <a:spcPts val="0"/>
+              </a:spcAft>
+              <a:buSzPts val="2400"/>
+              <a:buNone/>
+              <a:defRPr sz="2400"/>
+            </a:lvl2pPr>
+            <a:lvl3pPr lvl="2">
+              <a:spcBef>
+                <a:spcPts val="0"/>
+              </a:spcBef>
+              <a:spcAft>
+                <a:spcPts val="0"/>
+              </a:spcAft>
+              <a:buSzPts val="2400"/>
+              <a:buNone/>
+              <a:defRPr sz="2400"/>
+            </a:lvl3pPr>
+            <a:lvl4pPr lvl="3">
+              <a:spcBef>
+                <a:spcPts val="0"/>
+              </a:spcBef>
+              <a:spcAft>
+                <a:spcPts val="0"/>
+              </a:spcAft>
+              <a:buSzPts val="2400"/>
+              <a:buNone/>
+              <a:defRPr sz="2400"/>
+            </a:lvl4pPr>
+            <a:lvl5pPr lvl="4">
+              <a:spcBef>
+                <a:spcPts val="0"/>
+              </a:spcBef>
+              <a:spcAft>
+                <a:spcPts val="0"/>
+              </a:spcAft>
+              <a:buSzPts val="2400"/>
+              <a:buNone/>
+              <a:defRPr sz="2400"/>
+            </a:lvl5pPr>
+            <a:lvl6pPr lvl="5">
+              <a:spcBef>
+                <a:spcPts val="0"/>
+              </a:spcBef>
+              <a:spcAft>
+                <a:spcPts val="0"/>
+              </a:spcAft>
+              <a:buSzPts val="2400"/>
+              <a:buNone/>
+              <a:defRPr sz="2400"/>
+            </a:lvl6pPr>
+            <a:lvl7pPr lvl="6">
+              <a:spcBef>
+                <a:spcPts val="0"/>
+              </a:spcBef>
+              <a:spcAft>
+                <a:spcPts val="0"/>
+              </a:spcAft>
+              <a:buSzPts val="2400"/>
+              <a:buNone/>
+              <a:defRPr sz="2400"/>
+            </a:lvl7pPr>
+            <a:lvl8pPr lvl="7">
+              <a:spcBef>
+                <a:spcPts val="0"/>
+              </a:spcBef>
+              <a:spcAft>
+                <a:spcPts val="0"/>
+              </a:spcAft>
+              <a:buSzPts val="2400"/>
+              <a:buNone/>
+              <a:defRPr sz="2400"/>
+            </a:lvl8pPr>
+            <a:lvl9pPr lvl="8">
+              <a:spcBef>
+                <a:spcPts val="0"/>
+              </a:spcBef>
+              <a:spcAft>
+                <a:spcPts val="0"/>
+              </a:spcAft>
+              <a:buSzPts val="2400"/>
+              <a:buNone/>
+              <a:defRPr sz="2400"/>
+            </a:lvl9pPr>
+          </a:lstStyle>
+          <a:p/>
+        </p:txBody>
+      </p:sp>
+      <p:sp>
+        <p:nvSpPr>
+          <p:cNvPr id="34" name="Google Shape;34;p7"/>
+          <p:cNvSpPr txBox="1"/>
+          <p:nvPr>
+            <p:ph idx="1" type="body"/>
+          </p:nvPr>
+        </p:nvSpPr>
+        <p:spPr>
+          <a:xfrm>
+            <a:off x="311700" y="1389600"/>
+            <a:ext cx="2808000" cy="3179400"/>
+          </a:xfrm>
+          <a:prstGeom prst="rect">
+            <a:avLst/>
+          </a:prstGeom>
+        </p:spPr>
+        <p:txBody>
+          <a:bodyPr anchorCtr="0" anchor="t" bIns="91425" lIns="91425" spcFirstLastPara="1" rIns="91425" wrap="square" tIns="91425">
+            <a:normAutofit/>
+          </a:bodyPr>
+          <a:lstStyle>
+            <a:lvl1pPr indent="-304800" lvl="0" marL="457200">
+              <a:spcBef>
+                <a:spcPts val="0"/>
+              </a:spcBef>
+              <a:spcAft>
+                <a:spcPts val="0"/>
+              </a:spcAft>
+              <a:buSzPts val="1200"/>
+              <a:buChar char="●"/>
+              <a:defRPr sz="1200"/>
+            </a:lvl1pPr>
+            <a:lvl2pPr indent="-304800" lvl="1" marL="914400">
+              <a:spcBef>
+                <a:spcPts val="0"/>
+              </a:spcBef>
+              <a:spcAft>
+                <a:spcPts val="0"/>
+              </a:spcAft>
+              <a:buSzPts val="1200"/>
+              <a:buChar char="○"/>
+              <a:defRPr sz="1200"/>
+            </a:lvl2pPr>
+            <a:lvl3pPr indent="-304800" lvl="2" marL="1371600">
+              <a:spcBef>
+                <a:spcPts val="0"/>
+              </a:spcBef>
+              <a:spcAft>
+                <a:spcPts val="0"/>
+              </a:spcAft>
+              <a:buSzPts val="1200"/>
+              <a:buChar char="■"/>
+              <a:defRPr sz="1200"/>
+            </a:lvl3pPr>
+            <a:lvl4pPr indent="-304800" lvl="3" marL="1828800">
+              <a:spcBef>
+                <a:spcPts val="0"/>
+              </a:spcBef>
+              <a:spcAft>
+                <a:spcPts val="0"/>
+              </a:spcAft>
+              <a:buSzPts val="1200"/>
+              <a:buChar char="●"/>
+              <a:defRPr sz="1200"/>
+            </a:lvl4pPr>
+            <a:lvl5pPr indent="-304800" lvl="4" marL="2286000">
+              <a:spcBef>
+                <a:spcPts val="0"/>
+              </a:spcBef>
+              <a:spcAft>
+                <a:spcPts val="0"/>
+              </a:spcAft>
+              <a:buSzPts val="1200"/>
+              <a:buChar char="○"/>
+              <a:defRPr sz="1200"/>
+            </a:lvl5pPr>
+            <a:lvl6pPr indent="-304800" lvl="5" marL="2743200">
+              <a:spcBef>
+                <a:spcPts val="0"/>
+              </a:spcBef>
+              <a:spcAft>
+                <a:spcPts val="0"/>
+              </a:spcAft>
+              <a:buSzPts val="1200"/>
+              <a:buChar char="■"/>
+              <a:defRPr sz="1200"/>
+            </a:lvl6pPr>
+            <a:lvl7pPr indent="-304800" lvl="6" marL="3200400">
+              <a:spcBef>
+                <a:spcPts val="0"/>
+              </a:spcBef>
+              <a:spcAft>
+                <a:spcPts val="0"/>
+              </a:spcAft>
+              <a:buSzPts val="1200"/>
+              <a:buChar char="●"/>
+              <a:defRPr sz="1200"/>
+            </a:lvl7pPr>
+            <a:lvl8pPr indent="-304800" lvl="7" marL="3657600">
+              <a:spcBef>
+                <a:spcPts val="0"/>
+              </a:spcBef>
+              <a:spcAft>
+                <a:spcPts val="0"/>
+              </a:spcAft>
+              <a:buSzPts val="1200"/>
+              <a:buChar char="○"/>
+              <a:defRPr sz="1200"/>
+            </a:lvl8pPr>
+            <a:lvl9pPr indent="-304800" lvl="8" marL="4114800">
+              <a:spcBef>
+                <a:spcPts val="0"/>
+              </a:spcBef>
+              <a:spcAft>
+                <a:spcPts val="0"/>
+              </a:spcAft>
+              <a:buSzPts val="1200"/>
+              <a:buChar char="■"/>
+              <a:defRPr sz="1200"/>
+            </a:lvl9pPr>
+          </a:lstStyle>
+          <a:p/>
+        </p:txBody>
+      </p:sp>
+      <p:sp>
+        <p:nvSpPr>
+          <p:cNvPr id="35" name="Google Shape;35;p7"/>
+          <p:cNvSpPr txBox="1"/>
+          <p:nvPr>
+            <p:ph idx="12" type="sldNum"/>
+          </p:nvPr>
+        </p:nvSpPr>
+        <p:spPr>
+          <a:xfrm>
+            <a:off x="8472458" y="4663217"/>
+            <a:ext cx="548700" cy="393600"/>
+          </a:xfrm>
+          <a:prstGeom prst="rect">
+            <a:avLst/>
+          </a:prstGeom>
+        </p:spPr>
+        <p:txBody>
+          <a:bodyPr anchorCtr="0" anchor="ctr" bIns="91425" lIns="91425" spcFirstLastPara="1" rIns="91425" wrap="square" tIns="91425">
+            <a:normAutofit/>
+          </a:bodyPr>
+          <a:lstStyle>
+            <a:lvl1pPr lvl="0">
+              <a:buNone/>
+              <a:defRPr/>
+            </a:lvl1pPr>
+            <a:lvl2pPr lvl="1">
+              <a:buNone/>
+              <a:defRPr/>
+            </a:lvl2pPr>
+            <a:lvl3pPr lvl="2">
+              <a:buNone/>
+              <a:defRPr/>
+            </a:lvl3pPr>
+            <a:lvl4pPr lvl="3">
+              <a:buNone/>
+              <a:defRPr/>
+            </a:lvl4pPr>
+            <a:lvl5pPr lvl="4">
+              <a:buNone/>
+              <a:defRPr/>
+            </a:lvl5pPr>
+            <a:lvl6pPr lvl="5">
+              <a:buNone/>
+              <a:defRPr/>
+            </a:lvl6pPr>
+            <a:lvl7pPr lvl="6">
+              <a:buNone/>
+              <a:defRPr/>
+            </a:lvl7pPr>
+            <a:lvl8pPr lvl="7">
+              <a:buNone/>
+              <a:defRPr/>
+            </a:lvl8pPr>
+            <a:lvl9pPr lvl="8">
+              <a:buNone/>
+              <a:defRPr/>
+            </a:lvl9pPr>
+          </a:lstStyle>
+          <a:p>
+            <a:pPr indent="0" lvl="0" marL="0" rtl="0" algn="r">
+              <a:spcBef>
+                <a:spcPts val="0"/>
+              </a:spcBef>
+              <a:spcAft>
+                <a:spcPts val="0"/>
+              </a:spcAft>
+              <a:buNone/>
+            </a:pPr>
+            <a:fld id="{00000000-1234-1234-1234-123412341234}" type="slidenum">
+              <a:rPr lang="en-US"/>
+              <a:t>‹#›</a:t>
+            </a:fld>
+            <a:endParaRPr/>
+          </a:p>
+        </p:txBody>
+      </p:sp>
+    </p:spTree>
+  </p:cSld>
+  <p:clrMapOvr>
+    <a:masterClrMapping/>
+  </p:clrMapOvr>
+</p:sldLayout>
+</file>
+
+<file path=ppt/slideLayouts/slideLayout7.xml><?xml version="1.0" encoding="utf-8"?>
+<p:sldLayout xmlns:a="http://schemas.openxmlformats.org/drawingml/2006/main" xmlns:r="http://schemas.openxmlformats.org/officeDocument/2006/relationships" xmlns:mc="http://schemas.openxmlformats.org/markup-compatibility/2006" xmlns:mv="urn:schemas-microsoft-com:mac:vml" xmlns:p="http://schemas.openxmlformats.org/presentationml/2006/main" xmlns:c="http://schemas.openxmlformats.org/drawingml/2006/chart" xmlns:dgm="http://schemas.openxmlformats.org/drawingml/2006/diagram" xmlns:o="urn:schemas-microsoft-com:office:office" xmlns:v="urn:schemas-microsoft-com:vml" xmlns:pvml="urn:schemas-microsoft-com:office:powerpoint" xmlns:com="http://schemas.openxmlformats.org/drawingml/2006/compatibility" xmlns:p14="http://schemas.microsoft.com/office/powerpoint/2010/main" xmlns:p15="http://schemas.microsoft.com/office/powerpoint/2012/main" xmlns:ahyp="http://schemas.microsoft.com/office/drawing/2018/hyperlinkcolor" matchingName="Main point">
+  <p:cSld name="MAIN_POINT">
+    <p:spTree>
+      <p:nvGrpSpPr>
+        <p:cNvPr id="36" name="Shape 36"/>
+        <p:cNvGrpSpPr/>
+        <p:nvPr/>
+      </p:nvGrpSpPr>
+      <p:grpSpPr>
+        <a:xfrm>
+          <a:off x="0" y="0"/>
+          <a:ext cx="0" cy="0"/>
+          <a:chOff x="0" y="0"/>
+          <a:chExt cx="0" cy="0"/>
+        </a:xfrm>
+      </p:grpSpPr>
+      <p:sp>
+        <p:nvSpPr>
+          <p:cNvPr id="37" name="Google Shape;37;p8"/>
+          <p:cNvSpPr txBox="1"/>
+          <p:nvPr>
+            <p:ph type="title"/>
+          </p:nvPr>
+        </p:nvSpPr>
+        <p:spPr>
+          <a:xfrm>
+            <a:off x="490250" y="450150"/>
+            <a:ext cx="6367800" cy="4090800"/>
+          </a:xfrm>
+          <a:prstGeom prst="rect">
+            <a:avLst/>
+          </a:prstGeom>
+        </p:spPr>
+        <p:txBody>
+          <a:bodyPr anchorCtr="0" anchor="ctr" bIns="91425" lIns="91425" spcFirstLastPara="1" rIns="91425" wrap="square" tIns="91425">
+            <a:normAutofit/>
+          </a:bodyPr>
+          <a:lstStyle>
+            <a:lvl1pPr lvl="0">
+              <a:spcBef>
+                <a:spcPts val="0"/>
+              </a:spcBef>
+              <a:spcAft>
+                <a:spcPts val="0"/>
+              </a:spcAft>
+              <a:buSzPts val="4800"/>
+              <a:buNone/>
+              <a:defRPr sz="4800"/>
+            </a:lvl1pPr>
+            <a:lvl2pPr lvl="1">
+              <a:spcBef>
+                <a:spcPts val="0"/>
+              </a:spcBef>
+              <a:spcAft>
+                <a:spcPts val="0"/>
+              </a:spcAft>
+              <a:buSzPts val="4800"/>
+              <a:buNone/>
+              <a:defRPr sz="4800"/>
+            </a:lvl2pPr>
+            <a:lvl3pPr lvl="2">
+              <a:spcBef>
+                <a:spcPts val="0"/>
+              </a:spcBef>
+              <a:spcAft>
+                <a:spcPts val="0"/>
+              </a:spcAft>
+              <a:buSzPts val="4800"/>
+              <a:buNone/>
+              <a:defRPr sz="4800"/>
+            </a:lvl3pPr>
+            <a:lvl4pPr lvl="3">
+              <a:spcBef>
+                <a:spcPts val="0"/>
+              </a:spcBef>
+              <a:spcAft>
+                <a:spcPts val="0"/>
+              </a:spcAft>
+              <a:buSzPts val="4800"/>
+              <a:buNone/>
+              <a:defRPr sz="4800"/>
+            </a:lvl4pPr>
+            <a:lvl5pPr lvl="4">
+              <a:spcBef>
+                <a:spcPts val="0"/>
+              </a:spcBef>
+              <a:spcAft>
+                <a:spcPts val="0"/>
+              </a:spcAft>
+              <a:buSzPts val="4800"/>
+              <a:buNone/>
+              <a:defRPr sz="4800"/>
+            </a:lvl5pPr>
+            <a:lvl6pPr lvl="5">
+              <a:spcBef>
+                <a:spcPts val="0"/>
+              </a:spcBef>
+              <a:spcAft>
+                <a:spcPts val="0"/>
+              </a:spcAft>
+              <a:buSzPts val="4800"/>
+              <a:buNone/>
+              <a:defRPr sz="4800"/>
+            </a:lvl6pPr>
+            <a:lvl7pPr lvl="6">
+              <a:spcBef>
+                <a:spcPts val="0"/>
+              </a:spcBef>
+              <a:spcAft>
+                <a:spcPts val="0"/>
+              </a:spcAft>
+              <a:buSzPts val="4800"/>
+              <a:buNone/>
+              <a:defRPr sz="4800"/>
+            </a:lvl7pPr>
+            <a:lvl8pPr lvl="7">
+              <a:spcBef>
+                <a:spcPts val="0"/>
+              </a:spcBef>
+              <a:spcAft>
+                <a:spcPts val="0"/>
+              </a:spcAft>
+              <a:buSzPts val="4800"/>
+              <a:buNone/>
+              <a:defRPr sz="4800"/>
+            </a:lvl8pPr>
+            <a:lvl9pPr lvl="8">
+              <a:spcBef>
+                <a:spcPts val="0"/>
+              </a:spcBef>
+              <a:spcAft>
+                <a:spcPts val="0"/>
+              </a:spcAft>
+              <a:buSzPts val="4800"/>
+              <a:buNone/>
+              <a:defRPr sz="4800"/>
+            </a:lvl9pPr>
+          </a:lstStyle>
+          <a:p/>
+        </p:txBody>
+      </p:sp>
+      <p:sp>
+        <p:nvSpPr>
+          <p:cNvPr id="38" name="Google Shape;38;p8"/>
+          <p:cNvSpPr txBox="1"/>
+          <p:nvPr>
+            <p:ph idx="12" type="sldNum"/>
+          </p:nvPr>
+        </p:nvSpPr>
+        <p:spPr>
+          <a:xfrm>
+            <a:off x="8472458" y="4663217"/>
+            <a:ext cx="548700" cy="393600"/>
+          </a:xfrm>
+          <a:prstGeom prst="rect">
+            <a:avLst/>
+          </a:prstGeom>
+        </p:spPr>
+        <p:txBody>
+          <a:bodyPr anchorCtr="0" anchor="ctr" bIns="91425" lIns="91425" spcFirstLastPara="1" rIns="91425" wrap="square" tIns="91425">
+            <a:normAutofit/>
+          </a:bodyPr>
+          <a:lstStyle>
+            <a:lvl1pPr lvl="0">
+              <a:buNone/>
+              <a:defRPr/>
+            </a:lvl1pPr>
+            <a:lvl2pPr lvl="1">
+              <a:buNone/>
+              <a:defRPr/>
+            </a:lvl2pPr>
+            <a:lvl3pPr lvl="2">
+              <a:buNone/>
+              <a:defRPr/>
+            </a:lvl3pPr>
+            <a:lvl4pPr lvl="3">
+              <a:buNone/>
+              <a:defRPr/>
+            </a:lvl4pPr>
+            <a:lvl5pPr lvl="4">
+              <a:buNone/>
+              <a:defRPr/>
+            </a:lvl5pPr>
+            <a:lvl6pPr lvl="5">
+              <a:buNone/>
+              <a:defRPr/>
+            </a:lvl6pPr>
+            <a:lvl7pPr lvl="6">
+              <a:buNone/>
+              <a:defRPr/>
+            </a:lvl7pPr>
+            <a:lvl8pPr lvl="7">
+              <a:buNone/>
+              <a:defRPr/>
+            </a:lvl8pPr>
+            <a:lvl9pPr lvl="8">
+              <a:buNone/>
+              <a:defRPr/>
+            </a:lvl9pPr>
+          </a:lstStyle>
+          <a:p>
+            <a:pPr indent="0" lvl="0" marL="0" rtl="0" algn="r">
+              <a:spcBef>
+                <a:spcPts val="0"/>
+              </a:spcBef>
+              <a:spcAft>
+                <a:spcPts val="0"/>
+              </a:spcAft>
+              <a:buNone/>
+            </a:pPr>
+            <a:fld id="{00000000-1234-1234-1234-123412341234}" type="slidenum">
+              <a:rPr lang="en-US"/>
+              <a:t>‹#›</a:t>
+            </a:fld>
+            <a:endParaRPr/>
+          </a:p>
+        </p:txBody>
+      </p:sp>
+    </p:spTree>
+  </p:cSld>
+  <p:clrMapOvr>
+    <a:masterClrMapping/>
+  </p:clrMapOvr>
+</p:sldLayout>
+</file>
+
+<file path=ppt/slideLayouts/slideLayout8.xml><?xml version="1.0" encoding="utf-8"?>
+<p:sldLayout xmlns:a="http://schemas.openxmlformats.org/drawingml/2006/main" xmlns:r="http://schemas.openxmlformats.org/officeDocument/2006/relationships" xmlns:mc="http://schemas.openxmlformats.org/markup-compatibility/2006" xmlns:mv="urn:schemas-microsoft-com:mac:vml" xmlns:p="http://schemas.openxmlformats.org/presentationml/2006/main" xmlns:c="http://schemas.openxmlformats.org/drawingml/2006/chart" xmlns:dgm="http://schemas.openxmlformats.org/drawingml/2006/diagram" xmlns:o="urn:schemas-microsoft-com:office:office" xmlns:v="urn:schemas-microsoft-com:vml" xmlns:pvml="urn:schemas-microsoft-com:office:powerpoint" xmlns:com="http://schemas.openxmlformats.org/drawingml/2006/compatibility" xmlns:p14="http://schemas.microsoft.com/office/powerpoint/2010/main" xmlns:p15="http://schemas.microsoft.com/office/powerpoint/2012/main" xmlns:ahyp="http://schemas.microsoft.com/office/drawing/2018/hyperlinkcolor" matchingName="Section title and description">
+  <p:cSld name="SECTION_TITLE_AND_DESCRIPTION">
+    <p:spTree>
+      <p:nvGrpSpPr>
+        <p:cNvPr id="39" name="Shape 39"/>
+        <p:cNvGrpSpPr/>
+        <p:nvPr/>
+      </p:nvGrpSpPr>
+      <p:grpSpPr>
+        <a:xfrm>
+          <a:off x="0" y="0"/>
+          <a:ext cx="0" cy="0"/>
+          <a:chOff x="0" y="0"/>
+          <a:chExt cx="0" cy="0"/>
+        </a:xfrm>
+      </p:grpSpPr>
+      <p:sp>
+        <p:nvSpPr>
+          <p:cNvPr id="40" name="Google Shape;40;p9"/>
+          <p:cNvSpPr/>
+          <p:nvPr/>
+        </p:nvSpPr>
+        <p:spPr>
+          <a:xfrm>
+            <a:off x="4572000" y="-125"/>
+            <a:ext cx="4572000" cy="5143500"/>
+          </a:xfrm>
+          <a:prstGeom prst="rect">
+            <a:avLst/>
+          </a:prstGeom>
+          <a:solidFill>
+            <a:schemeClr val="lt2"/>
+          </a:solidFill>
+          <a:ln>
+            <a:noFill/>
+          </a:ln>
+        </p:spPr>
+        <p:txBody>
+          <a:bodyPr anchorCtr="0" anchor="ctr" bIns="91425" lIns="91425" spcFirstLastPara="1" rIns="91425" wrap="square" tIns="91425">
+            <a:noAutofit/>
+          </a:bodyPr>
+          <a:lstStyle/>
+          <a:p>
+            <a:pPr indent="0" lvl="0" marL="0" rtl="0" algn="l">
+              <a:spcBef>
+                <a:spcPts val="0"/>
+              </a:spcBef>
+              <a:spcAft>
+                <a:spcPts val="0"/>
+              </a:spcAft>
+              <a:buNone/>
+            </a:pPr>
+            <a:r>
+              <a:t/>
+            </a:r>
+            <a:endParaRPr/>
+          </a:p>
+        </p:txBody>
+      </p:sp>
+      <p:sp>
+        <p:nvSpPr>
+          <p:cNvPr id="41" name="Google Shape;41;p9"/>
+          <p:cNvSpPr txBox="1"/>
+          <p:nvPr>
+            <p:ph type="title"/>
+          </p:nvPr>
+        </p:nvSpPr>
+        <p:spPr>
+          <a:xfrm>
+            <a:off x="265500" y="1233175"/>
+            <a:ext cx="4045200" cy="1482300"/>
+          </a:xfrm>
+          <a:prstGeom prst="rect">
+            <a:avLst/>
+          </a:prstGeom>
+        </p:spPr>
+        <p:txBody>
+          <a:bodyPr anchorCtr="0" anchor="b" bIns="91425" lIns="91425" spcFirstLastPara="1" rIns="91425" wrap="square" tIns="91425">
+            <a:normAutofit/>
+          </a:bodyPr>
+          <a:lstStyle>
+            <a:lvl1pPr lvl="0" algn="ctr">
+              <a:spcBef>
+                <a:spcPts val="0"/>
+              </a:spcBef>
+              <a:spcAft>
+                <a:spcPts val="0"/>
+              </a:spcAft>
+              <a:buSzPts val="4200"/>
+              <a:buNone/>
+              <a:defRPr sz="4200"/>
+            </a:lvl1pPr>
+            <a:lvl2pPr lvl="1" algn="ctr">
+              <a:spcBef>
+                <a:spcPts val="0"/>
+              </a:spcBef>
+              <a:spcAft>
+                <a:spcPts val="0"/>
+              </a:spcAft>
+              <a:buSzPts val="4200"/>
+              <a:buNone/>
+              <a:defRPr sz="4200"/>
+            </a:lvl2pPr>
+            <a:lvl3pPr lvl="2" algn="ctr">
+              <a:spcBef>
+                <a:spcPts val="0"/>
+              </a:spcBef>
+              <a:spcAft>
+                <a:spcPts val="0"/>
+              </a:spcAft>
+              <a:buSzPts val="4200"/>
+              <a:buNone/>
+              <a:defRPr sz="4200"/>
+            </a:lvl3pPr>
+            <a:lvl4pPr lvl="3" algn="ctr">
+              <a:spcBef>
+                <a:spcPts val="0"/>
+              </a:spcBef>
+              <a:spcAft>
+                <a:spcPts val="0"/>
+              </a:spcAft>
+              <a:buSzPts val="4200"/>
+              <a:buNone/>
+              <a:defRPr sz="4200"/>
+            </a:lvl4pPr>
+            <a:lvl5pPr lvl="4" algn="ctr">
+              <a:spcBef>
+                <a:spcPts val="0"/>
+              </a:spcBef>
+              <a:spcAft>
+                <a:spcPts val="0"/>
+              </a:spcAft>
+              <a:buSzPts val="4200"/>
+              <a:buNone/>
+              <a:defRPr sz="4200"/>
+            </a:lvl5pPr>
+            <a:lvl6pPr lvl="5" algn="ctr">
+              <a:spcBef>
+                <a:spcPts val="0"/>
+              </a:spcBef>
+              <a:spcAft>
+                <a:spcPts val="0"/>
+              </a:spcAft>
+              <a:buSzPts val="4200"/>
+              <a:buNone/>
+              <a:defRPr sz="4200"/>
+            </a:lvl6pPr>
+            <a:lvl7pPr lvl="6" algn="ctr">
+              <a:spcBef>
+                <a:spcPts val="0"/>
+              </a:spcBef>
+              <a:spcAft>
+                <a:spcPts val="0"/>
+              </a:spcAft>
+              <a:buSzPts val="4200"/>
+              <a:buNone/>
+              <a:defRPr sz="4200"/>
+            </a:lvl7pPr>
+            <a:lvl8pPr lvl="7" algn="ctr">
+              <a:spcBef>
+                <a:spcPts val="0"/>
+              </a:spcBef>
+              <a:spcAft>
+                <a:spcPts val="0"/>
+              </a:spcAft>
+              <a:buSzPts val="4200"/>
+              <a:buNone/>
+              <a:defRPr sz="4200"/>
+            </a:lvl8pPr>
+            <a:lvl9pPr lvl="8" algn="ctr">
+              <a:spcBef>
+                <a:spcPts val="0"/>
+              </a:spcBef>
+              <a:spcAft>
+                <a:spcPts val="0"/>
+              </a:spcAft>
+              <a:buSzPts val="4200"/>
+              <a:buNone/>
+              <a:defRPr sz="4200"/>
+            </a:lvl9pPr>
+          </a:lstStyle>
+          <a:p/>
+        </p:txBody>
+      </p:sp>
+      <p:sp>
+        <p:nvSpPr>
+          <p:cNvPr id="42" name="Google Shape;42;p9"/>
+          <p:cNvSpPr txBox="1"/>
+          <p:nvPr>
+            <p:ph idx="1" type="subTitle"/>
+          </p:nvPr>
+        </p:nvSpPr>
+        <p:spPr>
+          <a:xfrm>
+            <a:off x="265500" y="2803075"/>
+            <a:ext cx="4045200" cy="1235100"/>
+          </a:xfrm>
+          <a:prstGeom prst="rect">
+            <a:avLst/>
+          </a:prstGeom>
+        </p:spPr>
+        <p:txBody>
+          <a:bodyPr anchorCtr="0" anchor="t" bIns="91425" lIns="91425" spcFirstLastPara="1" rIns="91425" wrap="square" tIns="91425">
+            <a:normAutofit/>
+          </a:bodyPr>
+          <a:lstStyle>
+            <a:lvl1pPr lvl="0" algn="ctr">
+              <a:lnSpc>
+                <a:spcPct val="100000"/>
+              </a:lnSpc>
+              <a:spcBef>
+                <a:spcPts val="0"/>
+              </a:spcBef>
+              <a:spcAft>
+                <a:spcPts val="0"/>
+              </a:spcAft>
+              <a:buSzPts val="2100"/>
+              <a:buNone/>
+              <a:defRPr sz="2100"/>
+            </a:lvl1pPr>
+            <a:lvl2pPr lvl="1" algn="ctr">
+              <a:lnSpc>
+                <a:spcPct val="100000"/>
+              </a:lnSpc>
+              <a:spcBef>
+                <a:spcPts val="0"/>
+              </a:spcBef>
+              <a:spcAft>
+                <a:spcPts val="0"/>
+              </a:spcAft>
+              <a:buSzPts val="2100"/>
+              <a:buNone/>
+              <a:defRPr sz="2100"/>
+            </a:lvl2pPr>
+            <a:lvl3pPr lvl="2" algn="ctr">
+              <a:lnSpc>
+                <a:spcPct val="100000"/>
+              </a:lnSpc>
+              <a:spcBef>
+                <a:spcPts val="0"/>
+              </a:spcBef>
+              <a:spcAft>
+                <a:spcPts val="0"/>
+              </a:spcAft>
+              <a:buSzPts val="2100"/>
+              <a:buNone/>
+              <a:defRPr sz="2100"/>
+            </a:lvl3pPr>
+            <a:lvl4pPr lvl="3" algn="ctr">
+              <a:lnSpc>
+                <a:spcPct val="100000"/>
+              </a:lnSpc>
+              <a:spcBef>
+                <a:spcPts val="0"/>
+              </a:spcBef>
+              <a:spcAft>
+                <a:spcPts val="0"/>
+              </a:spcAft>
+              <a:buSzPts val="2100"/>
+              <a:buNone/>
+              <a:defRPr sz="2100"/>
+            </a:lvl4pPr>
+            <a:lvl5pPr lvl="4" algn="ctr">
+              <a:lnSpc>
+                <a:spcPct val="100000"/>
+              </a:lnSpc>
+              <a:spcBef>
+                <a:spcPts val="0"/>
+              </a:spcBef>
+              <a:spcAft>
+                <a:spcPts val="0"/>
+              </a:spcAft>
+              <a:buSzPts val="2100"/>
+              <a:buNone/>
+              <a:defRPr sz="2100"/>
+            </a:lvl5pPr>
+            <a:lvl6pPr lvl="5" algn="ctr">
+              <a:lnSpc>
+                <a:spcPct val="100000"/>
+              </a:lnSpc>
+              <a:spcBef>
+                <a:spcPts val="0"/>
+              </a:spcBef>
+              <a:spcAft>
+                <a:spcPts val="0"/>
+              </a:spcAft>
+              <a:buSzPts val="2100"/>
+              <a:buNone/>
+              <a:defRPr sz="2100"/>
+            </a:lvl6pPr>
+            <a:lvl7pPr lvl="6" algn="ctr">
+              <a:lnSpc>
+                <a:spcPct val="100000"/>
+              </a:lnSpc>
+              <a:spcBef>
+                <a:spcPts val="0"/>
+              </a:spcBef>
+              <a:spcAft>
+                <a:spcPts val="0"/>
+              </a:spcAft>
+              <a:buSzPts val="2100"/>
+              <a:buNone/>
+              <a:defRPr sz="2100"/>
+            </a:lvl7pPr>
+            <a:lvl8pPr lvl="7" algn="ctr">
+              <a:lnSpc>
+                <a:spcPct val="100000"/>
+              </a:lnSpc>
+              <a:spcBef>
+                <a:spcPts val="0"/>
+              </a:spcBef>
+              <a:spcAft>
+                <a:spcPts val="0"/>
+              </a:spcAft>
+              <a:buSzPts val="2100"/>
+              <a:buNone/>
+              <a:defRPr sz="2100"/>
+            </a:lvl8pPr>
+            <a:lvl9pPr lvl="8" algn="ctr">
+              <a:lnSpc>
+                <a:spcPct val="100000"/>
+              </a:lnSpc>
+              <a:spcBef>
+                <a:spcPts val="0"/>
+              </a:spcBef>
+              <a:spcAft>
+                <a:spcPts val="0"/>
+              </a:spcAft>
+              <a:buSzPts val="2100"/>
+              <a:buNone/>
+              <a:defRPr sz="2100"/>
+            </a:lvl9pPr>
+          </a:lstStyle>
+          <a:p/>
+        </p:txBody>
+      </p:sp>
+      <p:sp>
+        <p:nvSpPr>
+          <p:cNvPr id="43" name="Google Shape;43;p9"/>
+          <p:cNvSpPr txBox="1"/>
+          <p:nvPr>
+            <p:ph idx="2" type="body"/>
+          </p:nvPr>
+        </p:nvSpPr>
+        <p:spPr>
+          <a:xfrm>
+            <a:off x="4939500" y="724075"/>
+            <a:ext cx="3837000" cy="3695100"/>
+          </a:xfrm>
+          <a:prstGeom prst="rect">
+            <a:avLst/>
+          </a:prstGeom>
+        </p:spPr>
+        <p:txBody>
+          <a:bodyPr anchorCtr="0" anchor="ctr" bIns="91425" lIns="91425" spcFirstLastPara="1" rIns="91425" wrap="square" tIns="91425">
+            <a:normAutofit/>
+          </a:bodyPr>
+          <a:lstStyle>
+            <a:lvl1pPr indent="-342900" lvl="0" marL="457200">
+              <a:spcBef>
+                <a:spcPts val="0"/>
+              </a:spcBef>
+              <a:spcAft>
+                <a:spcPts val="0"/>
+              </a:spcAft>
+              <a:buSzPts val="1800"/>
+              <a:buChar char="●"/>
+              <a:defRPr/>
+            </a:lvl1pPr>
+            <a:lvl2pPr indent="-317500" lvl="1" marL="914400">
+              <a:spcBef>
+                <a:spcPts val="0"/>
+              </a:spcBef>
+              <a:spcAft>
+                <a:spcPts val="0"/>
+              </a:spcAft>
+              <a:buSzPts val="1400"/>
+              <a:buChar char="○"/>
+              <a:defRPr/>
+            </a:lvl2pPr>
+            <a:lvl3pPr indent="-317500" lvl="2" marL="1371600">
+              <a:spcBef>
+                <a:spcPts val="0"/>
+              </a:spcBef>
+              <a:spcAft>
+                <a:spcPts val="0"/>
+              </a:spcAft>
+              <a:buSzPts val="1400"/>
+              <a:buChar char="■"/>
+              <a:defRPr/>
+            </a:lvl3pPr>
+            <a:lvl4pPr indent="-317500" lvl="3" marL="1828800">
+              <a:spcBef>
+                <a:spcPts val="0"/>
+              </a:spcBef>
+              <a:spcAft>
+                <a:spcPts val="0"/>
+              </a:spcAft>
+              <a:buSzPts val="1400"/>
+              <a:buChar char="●"/>
+              <a:defRPr/>
+            </a:lvl4pPr>
+            <a:lvl5pPr indent="-317500" lvl="4" marL="2286000">
+              <a:spcBef>
+                <a:spcPts val="0"/>
+              </a:spcBef>
+              <a:spcAft>
+                <a:spcPts val="0"/>
+              </a:spcAft>
+              <a:buSzPts val="1400"/>
+              <a:buChar char="○"/>
+              <a:defRPr/>
+            </a:lvl5pPr>
+            <a:lvl6pPr indent="-317500" lvl="5" marL="2743200">
+              <a:spcBef>
+                <a:spcPts val="0"/>
+              </a:spcBef>
+              <a:spcAft>
+                <a:spcPts val="0"/>
+              </a:spcAft>
+              <a:buSzPts val="1400"/>
+              <a:buChar char="■"/>
+              <a:defRPr/>
+            </a:lvl6pPr>
+            <a:lvl7pPr indent="-317500" lvl="6" marL="3200400">
+              <a:spcBef>
+                <a:spcPts val="0"/>
+              </a:spcBef>
+              <a:spcAft>
+                <a:spcPts val="0"/>
+              </a:spcAft>
+              <a:buSzPts val="1400"/>
+              <a:buChar char="●"/>
+              <a:defRPr/>
+            </a:lvl7pPr>
+            <a:lvl8pPr indent="-317500" lvl="7" marL="3657600">
+              <a:spcBef>
+                <a:spcPts val="0"/>
+              </a:spcBef>
+              <a:spcAft>
+                <a:spcPts val="0"/>
+              </a:spcAft>
+              <a:buSzPts val="1400"/>
+              <a:buChar char="○"/>
+              <a:defRPr/>
+            </a:lvl8pPr>
+            <a:lvl9pPr indent="-317500" lvl="8" marL="4114800">
+              <a:spcBef>
+                <a:spcPts val="0"/>
+              </a:spcBef>
+              <a:spcAft>
+                <a:spcPts val="0"/>
+              </a:spcAft>
+              <a:buSzPts val="1400"/>
+              <a:buChar char="■"/>
+              <a:defRPr/>
+            </a:lvl9pPr>
+          </a:lstStyle>
+          <a:p/>
+        </p:txBody>
+      </p:sp>
+      <p:sp>
+        <p:nvSpPr>
+          <p:cNvPr id="44" name="Google Shape;44;p9"/>
+          <p:cNvSpPr txBox="1"/>
+          <p:nvPr>
+            <p:ph idx="12" type="sldNum"/>
+          </p:nvPr>
+        </p:nvSpPr>
+        <p:spPr>
+          <a:xfrm>
+            <a:off x="8472458" y="4663217"/>
+            <a:ext cx="548700" cy="393600"/>
+          </a:xfrm>
+          <a:prstGeom prst="rect">
+            <a:avLst/>
+          </a:prstGeom>
+        </p:spPr>
+        <p:txBody>
+          <a:bodyPr anchorCtr="0" anchor="ctr" bIns="91425" lIns="91425" spcFirstLastPara="1" rIns="91425" wrap="square" tIns="91425">
+            <a:normAutofit/>
+          </a:bodyPr>
+          <a:lstStyle>
+            <a:lvl1pPr lvl="0">
+              <a:buNone/>
+              <a:defRPr/>
+            </a:lvl1pPr>
+            <a:lvl2pPr lvl="1">
+              <a:buNone/>
+              <a:defRPr/>
+            </a:lvl2pPr>
+            <a:lvl3pPr lvl="2">
+              <a:buNone/>
+              <a:defRPr/>
+            </a:lvl3pPr>
+            <a:lvl4pPr lvl="3">
+              <a:buNone/>
+              <a:defRPr/>
+            </a:lvl4pPr>
+            <a:lvl5pPr lvl="4">
+              <a:buNone/>
+              <a:defRPr/>
+            </a:lvl5pPr>
+            <a:lvl6pPr lvl="5">
+              <a:buNone/>
+              <a:defRPr/>
+            </a:lvl6pPr>
+            <a:lvl7pPr lvl="6">
+              <a:buNone/>
+              <a:defRPr/>
+            </a:lvl7pPr>
+            <a:lvl8pPr lvl="7">
+              <a:buNone/>
+              <a:defRPr/>
+            </a:lvl8pPr>
+            <a:lvl9pPr lvl="8">
+              <a:buNone/>
+              <a:defRPr/>
+            </a:lvl9pPr>
+          </a:lstStyle>
+          <a:p>
+            <a:pPr indent="0" lvl="0" marL="0" rtl="0" algn="r">
+              <a:spcBef>
+                <a:spcPts val="0"/>
+              </a:spcBef>
+              <a:spcAft>
+                <a:spcPts val="0"/>
+              </a:spcAft>
+              <a:buNone/>
+            </a:pPr>
+            <a:fld id="{00000000-1234-1234-1234-123412341234}" type="slidenum">
+              <a:rPr lang="en-US"/>
+              <a:t>‹#›</a:t>
+            </a:fld>
+            <a:endParaRPr/>
+          </a:p>
+        </p:txBody>
+      </p:sp>
+    </p:spTree>
+  </p:cSld>
+  <p:clrMapOvr>
+    <a:masterClrMapping/>
+  </p:clrMapOvr>
+</p:sldLayout>
+</file>
+
+<file path=ppt/slideLayouts/slideLayout9.xml><?xml version="1.0" encoding="utf-8"?>
+<p:sldLayout xmlns:a="http://schemas.openxmlformats.org/drawingml/2006/main" xmlns:r="http://schemas.openxmlformats.org/officeDocument/2006/relationships" xmlns:mc="http://schemas.openxmlformats.org/markup-compatibility/2006" xmlns:mv="urn:schemas-microsoft-com:mac:vml" xmlns:p="http://schemas.openxmlformats.org/presentationml/2006/main" xmlns:c="http://schemas.openxmlformats.org/drawingml/2006/chart" xmlns:dgm="http://schemas.openxmlformats.org/drawingml/2006/diagram" xmlns:o="urn:schemas-microsoft-com:office:office" xmlns:v="urn:schemas-microsoft-com:vml" xmlns:pvml="urn:schemas-microsoft-com:office:powerpoint" xmlns:com="http://schemas.openxmlformats.org/drawingml/2006/compatibility" xmlns:p14="http://schemas.microsoft.com/office/powerpoint/2010/main" xmlns:p15="http://schemas.microsoft.com/office/powerpoint/2012/main" xmlns:ahyp="http://schemas.microsoft.com/office/drawing/2018/hyperlinkcolor" matchingName="Caption">
+  <p:cSld name="CAPTION_ONLY">
+    <p:spTree>
+      <p:nvGrpSpPr>
+        <p:cNvPr id="45" name="Shape 45"/>
+        <p:cNvGrpSpPr/>
+        <p:nvPr/>
+      </p:nvGrpSpPr>
+      <p:grpSpPr>
+        <a:xfrm>
+          <a:off x="0" y="0"/>
+          <a:ext cx="0" cy="0"/>
+          <a:chOff x="0" y="0"/>
+          <a:chExt cx="0" cy="0"/>
+        </a:xfrm>
+      </p:grpSpPr>
+      <p:sp>
+        <p:nvSpPr>
+          <p:cNvPr id="46" name="Google Shape;46;p10"/>
+          <p:cNvSpPr txBox="1"/>
+          <p:nvPr>
+            <p:ph idx="1" type="body"/>
+          </p:nvPr>
+        </p:nvSpPr>
+        <p:spPr>
+          <a:xfrm>
+            <a:off x="311700" y="4230575"/>
+            <a:ext cx="5998800" cy="605100"/>
+          </a:xfrm>
+          <a:prstGeom prst="rect">
+            <a:avLst/>
+          </a:prstGeom>
+        </p:spPr>
+        <p:txBody>
+          <a:bodyPr anchorCtr="0" anchor="ctr" bIns="91425" lIns="91425" spcFirstLastPara="1" rIns="91425" wrap="square" tIns="91425">
+            <a:normAutofit/>
+          </a:bodyPr>
+          <a:lstStyle>
+            <a:lvl1pPr indent="-228600" lvl="0" marL="457200">
+              <a:lnSpc>
+                <a:spcPct val="100000"/>
+              </a:lnSpc>
+              <a:spcBef>
+                <a:spcPts val="0"/>
+              </a:spcBef>
+              <a:spcAft>
+                <a:spcPts val="0"/>
+              </a:spcAft>
+              <a:buSzPts val="1800"/>
+              <a:buNone/>
+              <a:defRPr/>
+            </a:lvl1pPr>
+          </a:lstStyle>
+          <a:p/>
+        </p:txBody>
+      </p:sp>
+      <p:sp>
+        <p:nvSpPr>
+          <p:cNvPr id="47" name="Google Shape;47;p10"/>
+          <p:cNvSpPr txBox="1"/>
+          <p:nvPr>
+            <p:ph idx="12" type="sldNum"/>
+          </p:nvPr>
+        </p:nvSpPr>
+        <p:spPr>
+          <a:xfrm>
+            <a:off x="8472458" y="4663217"/>
+            <a:ext cx="548700" cy="393600"/>
+          </a:xfrm>
+          <a:prstGeom prst="rect">
+            <a:avLst/>
+          </a:prstGeom>
+        </p:spPr>
+        <p:txBody>
+          <a:bodyPr anchorCtr="0" anchor="ctr" bIns="91425" lIns="91425" spcFirstLastPara="1" rIns="91425" wrap="square" tIns="91425">
+            <a:normAutofit/>
+          </a:bodyPr>
+          <a:lstStyle>
+            <a:lvl1pPr lvl="0">
+              <a:buNone/>
+              <a:defRPr/>
+            </a:lvl1pPr>
+            <a:lvl2pPr lvl="1">
+              <a:buNone/>
+              <a:defRPr/>
+            </a:lvl2pPr>
+            <a:lvl3pPr lvl="2">
+              <a:buNone/>
+              <a:defRPr/>
+            </a:lvl3pPr>
+            <a:lvl4pPr lvl="3">
+              <a:buNone/>
+              <a:defRPr/>
+            </a:lvl4pPr>
+            <a:lvl5pPr lvl="4">
+              <a:buNone/>
+              <a:defRPr/>
+            </a:lvl5pPr>
+            <a:lvl6pPr lvl="5">
+              <a:buNone/>
+              <a:defRPr/>
+            </a:lvl6pPr>
+            <a:lvl7pPr lvl="6">
+              <a:buNone/>
+              <a:defRPr/>
+            </a:lvl7pPr>
+            <a:lvl8pPr lvl="7">
+              <a:buNone/>
+              <a:defRPr/>
+            </a:lvl8pPr>
+            <a:lvl9pPr lvl="8">
+              <a:buNone/>
+              <a:defRPr/>
+            </a:lvl9pPr>
+          </a:lstStyle>
+          <a:p>
+            <a:pPr indent="0" lvl="0" marL="0" rtl="0" algn="r">
+              <a:spcBef>
+                <a:spcPts val="0"/>
+              </a:spcBef>
+              <a:spcAft>
+                <a:spcPts val="0"/>
+              </a:spcAft>
+              <a:buNone/>
+            </a:pPr>
+            <a:fld id="{00000000-1234-1234-1234-123412341234}" type="slidenum">
+              <a:rPr lang="en-US"/>
+              <a:t>‹#›</a:t>
+            </a:fld>
+            <a:endParaRPr/>
+          </a:p>
+        </p:txBody>
+      </p:sp>
+    </p:spTree>
+  </p:cSld>
+  <p:clrMapOvr>
+    <a:masterClrMapping/>
+  </p:clrMapOvr>
+</p:sldLayout>
+</file>
+
 <file path=ppt/slideMasters/slideMaster1.xml><?xml version="1.0" encoding="utf-8"?>
 <p:sldMaster xmlns:a="http://schemas.openxmlformats.org/drawingml/2006/main" xmlns:r="http://schemas.openxmlformats.org/officeDocument/2006/relationships" xmlns:mc="http://schemas.openxmlformats.org/markup-compatibility/2006" xmlns:mv="urn:schemas-microsoft-com:mac:vml" xmlns:p="http://schemas.openxmlformats.org/presentationml/2006/main" xmlns:c="http://schemas.openxmlformats.org/drawingml/2006/chart" xmlns:dgm="http://schemas.openxmlformats.org/drawingml/2006/diagram" xmlns:o="urn:schemas-microsoft-com:office:office" xmlns:v="urn:schemas-microsoft-com:vml" xmlns:pvml="urn:schemas-microsoft-com:office:powerpoint" xmlns:com="http://schemas.openxmlformats.org/drawingml/2006/compatibility" xmlns:p14="http://schemas.microsoft.com/office/powerpoint/2010/main" xmlns:p15="http://schemas.microsoft.com/office/powerpoint/2012/main" xmlns:ahyp="http://schemas.microsoft.com/office/drawing/2018/hyperlinkcolor">
-  <p:cSld>
+  <p:cSld name="simple-light-2">
+    <p:bg>
+      <p:bgPr>
+        <a:solidFill>
+          <a:schemeClr val="lt1"/>
+        </a:solidFill>
+      </p:bgPr>
+    </p:bg>
     <p:spTree>
       <p:nvGrpSpPr>
         <p:cNvPr id="9" name="Shape 9"/>
@@ -2882,11 +6435,550 @@
           <a:chExt cx="0" cy="0"/>
         </a:xfrm>
       </p:grpSpPr>
+      <p:sp>
+        <p:nvSpPr>
+          <p:cNvPr id="10" name="Google Shape;10;p1"/>
+          <p:cNvSpPr txBox="1"/>
+          <p:nvPr>
+            <p:ph type="title"/>
+          </p:nvPr>
+        </p:nvSpPr>
+        <p:spPr>
+          <a:xfrm>
+            <a:off x="311700" y="445025"/>
+            <a:ext cx="8520600" cy="572700"/>
+          </a:xfrm>
+          <a:prstGeom prst="rect">
+            <a:avLst/>
+          </a:prstGeom>
+          <a:noFill/>
+          <a:ln>
+            <a:noFill/>
+          </a:ln>
+        </p:spPr>
+        <p:txBody>
+          <a:bodyPr anchorCtr="0" anchor="t" bIns="91425" lIns="91425" spcFirstLastPara="1" rIns="91425" wrap="square" tIns="91425">
+            <a:normAutofit/>
+          </a:bodyPr>
+          <a:lstStyle>
+            <a:lvl1pPr lvl="0">
+              <a:spcBef>
+                <a:spcPts val="0"/>
+              </a:spcBef>
+              <a:spcAft>
+                <a:spcPts val="0"/>
+              </a:spcAft>
+              <a:buClr>
+                <a:schemeClr val="dk1"/>
+              </a:buClr>
+              <a:buSzPts val="2800"/>
+              <a:buNone/>
+              <a:defRPr sz="2800">
+                <a:solidFill>
+                  <a:schemeClr val="dk1"/>
+                </a:solidFill>
+              </a:defRPr>
+            </a:lvl1pPr>
+            <a:lvl2pPr lvl="1">
+              <a:spcBef>
+                <a:spcPts val="0"/>
+              </a:spcBef>
+              <a:spcAft>
+                <a:spcPts val="0"/>
+              </a:spcAft>
+              <a:buClr>
+                <a:schemeClr val="dk1"/>
+              </a:buClr>
+              <a:buSzPts val="2800"/>
+              <a:buNone/>
+              <a:defRPr sz="2800">
+                <a:solidFill>
+                  <a:schemeClr val="dk1"/>
+                </a:solidFill>
+              </a:defRPr>
+            </a:lvl2pPr>
+            <a:lvl3pPr lvl="2">
+              <a:spcBef>
+                <a:spcPts val="0"/>
+              </a:spcBef>
+              <a:spcAft>
+                <a:spcPts val="0"/>
+              </a:spcAft>
+              <a:buClr>
+                <a:schemeClr val="dk1"/>
+              </a:buClr>
+              <a:buSzPts val="2800"/>
+              <a:buNone/>
+              <a:defRPr sz="2800">
+                <a:solidFill>
+                  <a:schemeClr val="dk1"/>
+                </a:solidFill>
+              </a:defRPr>
+            </a:lvl3pPr>
+            <a:lvl4pPr lvl="3">
+              <a:spcBef>
+                <a:spcPts val="0"/>
+              </a:spcBef>
+              <a:spcAft>
+                <a:spcPts val="0"/>
+              </a:spcAft>
+              <a:buClr>
+                <a:schemeClr val="dk1"/>
+              </a:buClr>
+              <a:buSzPts val="2800"/>
+              <a:buNone/>
+              <a:defRPr sz="2800">
+                <a:solidFill>
+                  <a:schemeClr val="dk1"/>
+                </a:solidFill>
+              </a:defRPr>
+            </a:lvl4pPr>
+            <a:lvl5pPr lvl="4">
+              <a:spcBef>
+                <a:spcPts val="0"/>
+              </a:spcBef>
+              <a:spcAft>
+                <a:spcPts val="0"/>
+              </a:spcAft>
+              <a:buClr>
+                <a:schemeClr val="dk1"/>
+              </a:buClr>
+              <a:buSzPts val="2800"/>
+              <a:buNone/>
+              <a:defRPr sz="2800">
+                <a:solidFill>
+                  <a:schemeClr val="dk1"/>
+                </a:solidFill>
+              </a:defRPr>
+            </a:lvl5pPr>
+            <a:lvl6pPr lvl="5">
+              <a:spcBef>
+                <a:spcPts val="0"/>
+              </a:spcBef>
+              <a:spcAft>
+                <a:spcPts val="0"/>
+              </a:spcAft>
+              <a:buClr>
+                <a:schemeClr val="dk1"/>
+              </a:buClr>
+              <a:buSzPts val="2800"/>
+              <a:buNone/>
+              <a:defRPr sz="2800">
+                <a:solidFill>
+                  <a:schemeClr val="dk1"/>
+                </a:solidFill>
+              </a:defRPr>
+            </a:lvl6pPr>
+            <a:lvl7pPr lvl="6">
+              <a:spcBef>
+                <a:spcPts val="0"/>
+              </a:spcBef>
+              <a:spcAft>
+                <a:spcPts val="0"/>
+              </a:spcAft>
+              <a:buClr>
+                <a:schemeClr val="dk1"/>
+              </a:buClr>
+              <a:buSzPts val="2800"/>
+              <a:buNone/>
+              <a:defRPr sz="2800">
+                <a:solidFill>
+                  <a:schemeClr val="dk1"/>
+                </a:solidFill>
+              </a:defRPr>
+            </a:lvl7pPr>
+            <a:lvl8pPr lvl="7">
+              <a:spcBef>
+                <a:spcPts val="0"/>
+              </a:spcBef>
+              <a:spcAft>
+                <a:spcPts val="0"/>
+              </a:spcAft>
+              <a:buClr>
+                <a:schemeClr val="dk1"/>
+              </a:buClr>
+              <a:buSzPts val="2800"/>
+              <a:buNone/>
+              <a:defRPr sz="2800">
+                <a:solidFill>
+                  <a:schemeClr val="dk1"/>
+                </a:solidFill>
+              </a:defRPr>
+            </a:lvl8pPr>
+            <a:lvl9pPr lvl="8">
+              <a:spcBef>
+                <a:spcPts val="0"/>
+              </a:spcBef>
+              <a:spcAft>
+                <a:spcPts val="0"/>
+              </a:spcAft>
+              <a:buClr>
+                <a:schemeClr val="dk1"/>
+              </a:buClr>
+              <a:buSzPts val="2800"/>
+              <a:buNone/>
+              <a:defRPr sz="2800">
+                <a:solidFill>
+                  <a:schemeClr val="dk1"/>
+                </a:solidFill>
+              </a:defRPr>
+            </a:lvl9pPr>
+          </a:lstStyle>
+          <a:p/>
+        </p:txBody>
+      </p:sp>
+      <p:sp>
+        <p:nvSpPr>
+          <p:cNvPr id="11" name="Google Shape;11;p1"/>
+          <p:cNvSpPr txBox="1"/>
+          <p:nvPr>
+            <p:ph idx="1" type="body"/>
+          </p:nvPr>
+        </p:nvSpPr>
+        <p:spPr>
+          <a:xfrm>
+            <a:off x="311700" y="1152475"/>
+            <a:ext cx="8520600" cy="3416400"/>
+          </a:xfrm>
+          <a:prstGeom prst="rect">
+            <a:avLst/>
+          </a:prstGeom>
+          <a:noFill/>
+          <a:ln>
+            <a:noFill/>
+          </a:ln>
+        </p:spPr>
+        <p:txBody>
+          <a:bodyPr anchorCtr="0" anchor="t" bIns="91425" lIns="91425" spcFirstLastPara="1" rIns="91425" wrap="square" tIns="91425">
+            <a:normAutofit/>
+          </a:bodyPr>
+          <a:lstStyle>
+            <a:lvl1pPr indent="-342900" lvl="0" marL="457200">
+              <a:lnSpc>
+                <a:spcPct val="115000"/>
+              </a:lnSpc>
+              <a:spcBef>
+                <a:spcPts val="0"/>
+              </a:spcBef>
+              <a:spcAft>
+                <a:spcPts val="0"/>
+              </a:spcAft>
+              <a:buClr>
+                <a:schemeClr val="dk2"/>
+              </a:buClr>
+              <a:buSzPts val="1800"/>
+              <a:buChar char="●"/>
+              <a:defRPr sz="1800">
+                <a:solidFill>
+                  <a:schemeClr val="dk2"/>
+                </a:solidFill>
+              </a:defRPr>
+            </a:lvl1pPr>
+            <a:lvl2pPr indent="-317500" lvl="1" marL="914400">
+              <a:lnSpc>
+                <a:spcPct val="115000"/>
+              </a:lnSpc>
+              <a:spcBef>
+                <a:spcPts val="0"/>
+              </a:spcBef>
+              <a:spcAft>
+                <a:spcPts val="0"/>
+              </a:spcAft>
+              <a:buClr>
+                <a:schemeClr val="dk2"/>
+              </a:buClr>
+              <a:buSzPts val="1400"/>
+              <a:buChar char="○"/>
+              <a:defRPr>
+                <a:solidFill>
+                  <a:schemeClr val="dk2"/>
+                </a:solidFill>
+              </a:defRPr>
+            </a:lvl2pPr>
+            <a:lvl3pPr indent="-317500" lvl="2" marL="1371600">
+              <a:lnSpc>
+                <a:spcPct val="115000"/>
+              </a:lnSpc>
+              <a:spcBef>
+                <a:spcPts val="0"/>
+              </a:spcBef>
+              <a:spcAft>
+                <a:spcPts val="0"/>
+              </a:spcAft>
+              <a:buClr>
+                <a:schemeClr val="dk2"/>
+              </a:buClr>
+              <a:buSzPts val="1400"/>
+              <a:buChar char="■"/>
+              <a:defRPr>
+                <a:solidFill>
+                  <a:schemeClr val="dk2"/>
+                </a:solidFill>
+              </a:defRPr>
+            </a:lvl3pPr>
+            <a:lvl4pPr indent="-317500" lvl="3" marL="1828800">
+              <a:lnSpc>
+                <a:spcPct val="115000"/>
+              </a:lnSpc>
+              <a:spcBef>
+                <a:spcPts val="0"/>
+              </a:spcBef>
+              <a:spcAft>
+                <a:spcPts val="0"/>
+              </a:spcAft>
+              <a:buClr>
+                <a:schemeClr val="dk2"/>
+              </a:buClr>
+              <a:buSzPts val="1400"/>
+              <a:buChar char="●"/>
+              <a:defRPr>
+                <a:solidFill>
+                  <a:schemeClr val="dk2"/>
+                </a:solidFill>
+              </a:defRPr>
+            </a:lvl4pPr>
+            <a:lvl5pPr indent="-317500" lvl="4" marL="2286000">
+              <a:lnSpc>
+                <a:spcPct val="115000"/>
+              </a:lnSpc>
+              <a:spcBef>
+                <a:spcPts val="0"/>
+              </a:spcBef>
+              <a:spcAft>
+                <a:spcPts val="0"/>
+              </a:spcAft>
+              <a:buClr>
+                <a:schemeClr val="dk2"/>
+              </a:buClr>
+              <a:buSzPts val="1400"/>
+              <a:buChar char="○"/>
+              <a:defRPr>
+                <a:solidFill>
+                  <a:schemeClr val="dk2"/>
+                </a:solidFill>
+              </a:defRPr>
+            </a:lvl5pPr>
+            <a:lvl6pPr indent="-317500" lvl="5" marL="2743200">
+              <a:lnSpc>
+                <a:spcPct val="115000"/>
+              </a:lnSpc>
+              <a:spcBef>
+                <a:spcPts val="0"/>
+              </a:spcBef>
+              <a:spcAft>
+                <a:spcPts val="0"/>
+              </a:spcAft>
+              <a:buClr>
+                <a:schemeClr val="dk2"/>
+              </a:buClr>
+              <a:buSzPts val="1400"/>
+              <a:buChar char="■"/>
+              <a:defRPr>
+                <a:solidFill>
+                  <a:schemeClr val="dk2"/>
+                </a:solidFill>
+              </a:defRPr>
+            </a:lvl6pPr>
+            <a:lvl7pPr indent="-317500" lvl="6" marL="3200400">
+              <a:lnSpc>
+                <a:spcPct val="115000"/>
+              </a:lnSpc>
+              <a:spcBef>
+                <a:spcPts val="0"/>
+              </a:spcBef>
+              <a:spcAft>
+                <a:spcPts val="0"/>
+              </a:spcAft>
+              <a:buClr>
+                <a:schemeClr val="dk2"/>
+              </a:buClr>
+              <a:buSzPts val="1400"/>
+              <a:buChar char="●"/>
+              <a:defRPr>
+                <a:solidFill>
+                  <a:schemeClr val="dk2"/>
+                </a:solidFill>
+              </a:defRPr>
+            </a:lvl7pPr>
+            <a:lvl8pPr indent="-317500" lvl="7" marL="3657600">
+              <a:lnSpc>
+                <a:spcPct val="115000"/>
+              </a:lnSpc>
+              <a:spcBef>
+                <a:spcPts val="0"/>
+              </a:spcBef>
+              <a:spcAft>
+                <a:spcPts val="0"/>
+              </a:spcAft>
+              <a:buClr>
+                <a:schemeClr val="dk2"/>
+              </a:buClr>
+              <a:buSzPts val="1400"/>
+              <a:buChar char="○"/>
+              <a:defRPr>
+                <a:solidFill>
+                  <a:schemeClr val="dk2"/>
+                </a:solidFill>
+              </a:defRPr>
+            </a:lvl8pPr>
+            <a:lvl9pPr indent="-317500" lvl="8" marL="4114800">
+              <a:lnSpc>
+                <a:spcPct val="115000"/>
+              </a:lnSpc>
+              <a:spcBef>
+                <a:spcPts val="0"/>
+              </a:spcBef>
+              <a:spcAft>
+                <a:spcPts val="0"/>
+              </a:spcAft>
+              <a:buClr>
+                <a:schemeClr val="dk2"/>
+              </a:buClr>
+              <a:buSzPts val="1400"/>
+              <a:buChar char="■"/>
+              <a:defRPr>
+                <a:solidFill>
+                  <a:schemeClr val="dk2"/>
+                </a:solidFill>
+              </a:defRPr>
+            </a:lvl9pPr>
+          </a:lstStyle>
+          <a:p/>
+        </p:txBody>
+      </p:sp>
+      <p:sp>
+        <p:nvSpPr>
+          <p:cNvPr id="12" name="Google Shape;12;p1"/>
+          <p:cNvSpPr txBox="1"/>
+          <p:nvPr>
+            <p:ph idx="12" type="sldNum"/>
+          </p:nvPr>
+        </p:nvSpPr>
+        <p:spPr>
+          <a:xfrm>
+            <a:off x="8472458" y="4663217"/>
+            <a:ext cx="548700" cy="393600"/>
+          </a:xfrm>
+          <a:prstGeom prst="rect">
+            <a:avLst/>
+          </a:prstGeom>
+          <a:noFill/>
+          <a:ln>
+            <a:noFill/>
+          </a:ln>
+        </p:spPr>
+        <p:txBody>
+          <a:bodyPr anchorCtr="0" anchor="ctr" bIns="91425" lIns="91425" spcFirstLastPara="1" rIns="91425" wrap="square" tIns="91425">
+            <a:normAutofit/>
+          </a:bodyPr>
+          <a:lstStyle>
+            <a:lvl1pPr lvl="0" algn="r">
+              <a:buNone/>
+              <a:defRPr sz="1000">
+                <a:solidFill>
+                  <a:schemeClr val="dk2"/>
+                </a:solidFill>
+              </a:defRPr>
+            </a:lvl1pPr>
+            <a:lvl2pPr lvl="1" algn="r">
+              <a:buNone/>
+              <a:defRPr sz="1000">
+                <a:solidFill>
+                  <a:schemeClr val="dk2"/>
+                </a:solidFill>
+              </a:defRPr>
+            </a:lvl2pPr>
+            <a:lvl3pPr lvl="2" algn="r">
+              <a:buNone/>
+              <a:defRPr sz="1000">
+                <a:solidFill>
+                  <a:schemeClr val="dk2"/>
+                </a:solidFill>
+              </a:defRPr>
+            </a:lvl3pPr>
+            <a:lvl4pPr lvl="3" algn="r">
+              <a:buNone/>
+              <a:defRPr sz="1000">
+                <a:solidFill>
+                  <a:schemeClr val="dk2"/>
+                </a:solidFill>
+              </a:defRPr>
+            </a:lvl4pPr>
+            <a:lvl5pPr lvl="4" algn="r">
+              <a:buNone/>
+              <a:defRPr sz="1000">
+                <a:solidFill>
+                  <a:schemeClr val="dk2"/>
+                </a:solidFill>
+              </a:defRPr>
+            </a:lvl5pPr>
+            <a:lvl6pPr lvl="5" algn="r">
+              <a:buNone/>
+              <a:defRPr sz="1000">
+                <a:solidFill>
+                  <a:schemeClr val="dk2"/>
+                </a:solidFill>
+              </a:defRPr>
+            </a:lvl6pPr>
+            <a:lvl7pPr lvl="6" algn="r">
+              <a:buNone/>
+              <a:defRPr sz="1000">
+                <a:solidFill>
+                  <a:schemeClr val="dk2"/>
+                </a:solidFill>
+              </a:defRPr>
+            </a:lvl7pPr>
+            <a:lvl8pPr lvl="7" algn="r">
+              <a:buNone/>
+              <a:defRPr sz="1000">
+                <a:solidFill>
+                  <a:schemeClr val="dk2"/>
+                </a:solidFill>
+              </a:defRPr>
+            </a:lvl8pPr>
+            <a:lvl9pPr lvl="8" algn="r">
+              <a:buNone/>
+              <a:defRPr sz="1000">
+                <a:solidFill>
+                  <a:schemeClr val="dk2"/>
+                </a:solidFill>
+              </a:defRPr>
+            </a:lvl9pPr>
+          </a:lstStyle>
+          <a:p>
+            <a:pPr indent="0" lvl="0" marL="0" rtl="0" algn="r">
+              <a:spcBef>
+                <a:spcPts val="0"/>
+              </a:spcBef>
+              <a:spcAft>
+                <a:spcPts val="0"/>
+              </a:spcAft>
+              <a:buNone/>
+            </a:pPr>
+            <a:fld id="{00000000-1234-1234-1234-123412341234}" type="slidenum">
+              <a:rPr lang="en-US"/>
+              <a:t>‹#›</a:t>
+            </a:fld>
+            <a:endParaRPr/>
+          </a:p>
+        </p:txBody>
+      </p:sp>
     </p:spTree>
   </p:cSld>
   <p:clrMap accent1="accent1" accent2="accent2" accent3="accent3" accent4="accent4" accent5="accent5" accent6="accent6" bg1="lt1" bg2="dk2" tx1="dk1" tx2="lt2" folHlink="folHlink" hlink="hlink"/>
   <p:sldLayoutIdLst>
     <p:sldLayoutId id="2147483648" r:id="rId1"/>
+    <p:sldLayoutId id="2147483649" r:id="rId2"/>
+    <p:sldLayoutId id="2147483650" r:id="rId3"/>
+    <p:sldLayoutId id="2147483651" r:id="rId4"/>
+    <p:sldLayoutId id="2147483652" r:id="rId5"/>
+    <p:sldLayoutId id="2147483653" r:id="rId6"/>
+    <p:sldLayoutId id="2147483654" r:id="rId7"/>
+    <p:sldLayoutId id="2147483655" r:id="rId8"/>
+    <p:sldLayoutId id="2147483656" r:id="rId9"/>
+    <p:sldLayoutId id="2147483657" r:id="rId10"/>
+    <p:sldLayoutId id="2147483658" r:id="rId11"/>
+    <p:sldLayoutId id="2147483659" r:id="rId12"/>
   </p:sldLayoutIdLst>
   <p:hf dt="0" ftr="0" hdr="0" sldNum="0"/>
   <p:txStyles>
@@ -3584,16 +7676,9 @@
 <file path=ppt/slides/slide1.xml><?xml version="1.0" encoding="utf-8"?>
 <p:sld xmlns:a="http://schemas.openxmlformats.org/drawingml/2006/main" xmlns:r="http://schemas.openxmlformats.org/officeDocument/2006/relationships" xmlns:mc="http://schemas.openxmlformats.org/markup-compatibility/2006" xmlns:mv="urn:schemas-microsoft-com:mac:vml" xmlns:p="http://schemas.openxmlformats.org/presentationml/2006/main" xmlns:c="http://schemas.openxmlformats.org/drawingml/2006/chart" xmlns:dgm="http://schemas.openxmlformats.org/drawingml/2006/diagram" xmlns:o="urn:schemas-microsoft-com:office:office" xmlns:v="urn:schemas-microsoft-com:vml" xmlns:pvml="urn:schemas-microsoft-com:office:powerpoint" xmlns:com="http://schemas.openxmlformats.org/drawingml/2006/compatibility" xmlns:p14="http://schemas.microsoft.com/office/powerpoint/2010/main" xmlns:p15="http://schemas.microsoft.com/office/powerpoint/2012/main" xmlns:ahyp="http://schemas.microsoft.com/office/drawing/2018/hyperlinkcolor">
   <p:cSld>
-    <p:bg>
-      <p:bgPr>
-        <a:solidFill>
-          <a:srgbClr val="020617"/>
-        </a:solidFill>
-      </p:bgPr>
-    </p:bg>
     <p:spTree>
       <p:nvGrpSpPr>
-        <p:cNvPr id="15" name="Shape 15"/>
+        <p:cNvPr id="59" name="Shape 59"/>
         <p:cNvGrpSpPr/>
         <p:nvPr/>
       </p:nvGrpSpPr>
@@ -3607,7 +7692,7 @@
       </p:grpSpPr>
       <p:sp>
         <p:nvSpPr>
-          <p:cNvPr id="16" name="Google Shape;16;p3"/>
+          <p:cNvPr id="60" name="Google Shape;60;p14"/>
           <p:cNvSpPr/>
           <p:nvPr/>
         </p:nvSpPr>
@@ -3673,14 +7758,14 @@
       </p:sp>
       <p:sp>
         <p:nvSpPr>
-          <p:cNvPr id="17" name="Google Shape;17;p3"/>
+          <p:cNvPr id="61" name="Google Shape;61;p14"/>
           <p:cNvSpPr/>
           <p:nvPr/>
         </p:nvSpPr>
         <p:spPr>
           <a:xfrm>
-            <a:off x="2500323" y="2590800"/>
-            <a:ext cx="4143205" cy="314325"/>
+            <a:off x="53923" y="4734625"/>
+            <a:ext cx="4143300" cy="314400"/>
           </a:xfrm>
           <a:prstGeom prst="rect">
             <a:avLst/>
@@ -3714,16 +7799,12 @@
               <a:buNone/>
             </a:pPr>
             <a:r>
-              <a:rPr b="0" i="0" lang="en-US" sz="1800" u="none" cap="none" strike="noStrike">
+              <a:rPr lang="en-US" sz="1800">
                 <a:solidFill>
-                  <a:srgbClr val="CBD5E1"/>
+                  <a:schemeClr val="dk1"/>
                 </a:solidFill>
-                <a:latin typeface="Arial"/>
-                <a:ea typeface="Arial"/>
-                <a:cs typeface="Arial"/>
-                <a:sym typeface="Arial"/>
               </a:rPr>
-              <a:t>Moderne GPU-Berechnung für das Web</a:t>
+              <a:t>Atakan Sentürk</a:t>
             </a:r>
             <a:endParaRPr b="0" i="0" sz="1800" u="none" cap="none" strike="noStrike">
               <a:solidFill>
@@ -3745,7 +7826,7 @@
 </p:sld>
 </file>
 
-<file path=ppt/slides/slide2.xml><?xml version="1.0" encoding="utf-8"?>
+<file path=ppt/slides/slide10.xml><?xml version="1.0" encoding="utf-8"?>
 <p:sld xmlns:a="http://schemas.openxmlformats.org/drawingml/2006/main" xmlns:r="http://schemas.openxmlformats.org/officeDocument/2006/relationships" xmlns:mc="http://schemas.openxmlformats.org/markup-compatibility/2006" xmlns:mv="urn:schemas-microsoft-com:mac:vml" xmlns:p="http://schemas.openxmlformats.org/presentationml/2006/main" xmlns:c="http://schemas.openxmlformats.org/drawingml/2006/chart" xmlns:dgm="http://schemas.openxmlformats.org/drawingml/2006/diagram" xmlns:o="urn:schemas-microsoft-com:office:office" xmlns:v="urn:schemas-microsoft-com:vml" xmlns:pvml="urn:schemas-microsoft-com:office:powerpoint" xmlns:com="http://schemas.openxmlformats.org/drawingml/2006/compatibility" xmlns:p14="http://schemas.microsoft.com/office/powerpoint/2010/main" xmlns:p15="http://schemas.microsoft.com/office/powerpoint/2012/main" xmlns:ahyp="http://schemas.microsoft.com/office/drawing/2018/hyperlinkcolor">
   <p:cSld>
     <p:bg>
@@ -3757,7 +7838,7 @@
     </p:bg>
     <p:spTree>
       <p:nvGrpSpPr>
-        <p:cNvPr id="22" name="Shape 22"/>
+        <p:cNvPr id="132" name="Shape 132"/>
         <p:cNvGrpSpPr/>
         <p:nvPr/>
       </p:nvGrpSpPr>
@@ -3771,7 +7852,7 @@
       </p:grpSpPr>
       <p:sp>
         <p:nvSpPr>
-          <p:cNvPr id="23" name="Google Shape;23;p4"/>
+          <p:cNvPr id="133" name="Google Shape;133;p23"/>
           <p:cNvSpPr/>
           <p:nvPr/>
         </p:nvSpPr>
@@ -3817,6 +7898,179 @@
                   <a:srgbClr val="38BDF8"/>
                 </a:solidFill>
               </a:rPr>
+              <a:t>Quellen</a:t>
+            </a:r>
+            <a:endParaRPr b="0" i="0" sz="2700" u="none" cap="none" strike="noStrike">
+              <a:solidFill>
+                <a:schemeClr val="dk1"/>
+              </a:solidFill>
+              <a:latin typeface="Calibri"/>
+              <a:ea typeface="Calibri"/>
+              <a:cs typeface="Calibri"/>
+              <a:sym typeface="Calibri"/>
+            </a:endParaRPr>
+          </a:p>
+        </p:txBody>
+      </p:sp>
+      <p:sp>
+        <p:nvSpPr>
+          <p:cNvPr id="134" name="Google Shape;134;p23"/>
+          <p:cNvSpPr txBox="1"/>
+          <p:nvPr/>
+        </p:nvSpPr>
+        <p:spPr>
+          <a:xfrm>
+            <a:off x="563100" y="1368350"/>
+            <a:ext cx="7486200" cy="3060300"/>
+          </a:xfrm>
+          <a:prstGeom prst="rect">
+            <a:avLst/>
+          </a:prstGeom>
+          <a:noFill/>
+          <a:ln>
+            <a:noFill/>
+          </a:ln>
+        </p:spPr>
+        <p:txBody>
+          <a:bodyPr anchorCtr="0" anchor="t" bIns="91425" lIns="91425" spcFirstLastPara="1" rIns="91425" wrap="square" tIns="91425">
+            <a:noAutofit/>
+          </a:bodyPr>
+          <a:lstStyle/>
+          <a:p>
+            <a:pPr indent="0" lvl="0" marL="0" rtl="0" algn="l">
+              <a:lnSpc>
+                <a:spcPct val="186666"/>
+              </a:lnSpc>
+              <a:spcBef>
+                <a:spcPts val="0"/>
+              </a:spcBef>
+              <a:spcAft>
+                <a:spcPts val="0"/>
+              </a:spcAft>
+              <a:buClr>
+                <a:srgbClr val="CBD5E1"/>
+              </a:buClr>
+              <a:buSzPts val="1350"/>
+              <a:buFont typeface="Arial"/>
+              <a:buNone/>
+            </a:pPr>
+            <a:r>
+              <a:rPr lang="en-US" sz="1200">
+                <a:solidFill>
+                  <a:srgbClr val="CBD5E1"/>
+                </a:solidFill>
+              </a:rPr>
+              <a:t>W3C Spec: w3.org/TR/webgpu</a:t>
+            </a:r>
+            <a:endParaRPr sz="1200">
+              <a:solidFill>
+                <a:schemeClr val="dk1"/>
+              </a:solidFill>
+              <a:latin typeface="Calibri"/>
+              <a:ea typeface="Calibri"/>
+              <a:cs typeface="Calibri"/>
+              <a:sym typeface="Calibri"/>
+            </a:endParaRPr>
+          </a:p>
+          <a:p>
+            <a:pPr indent="0" lvl="0" marL="0" rtl="0" algn="l">
+              <a:spcBef>
+                <a:spcPts val="0"/>
+              </a:spcBef>
+              <a:spcAft>
+                <a:spcPts val="0"/>
+              </a:spcAft>
+              <a:buNone/>
+            </a:pPr>
+            <a:r>
+              <a:rPr lang="en-US" sz="1200">
+                <a:solidFill>
+                  <a:srgbClr val="CBD5E1"/>
+                </a:solidFill>
+              </a:rPr>
+              <a:t>https://developer.mozilla.org/en-US/docs/Web/API/WebGPU_API</a:t>
+            </a:r>
+            <a:endParaRPr sz="1500">
+              <a:solidFill>
+                <a:srgbClr val="CBD5E1"/>
+              </a:solidFill>
+            </a:endParaRPr>
+          </a:p>
+        </p:txBody>
+      </p:sp>
+    </p:spTree>
+  </p:cSld>
+  <p:clrMapOvr>
+    <a:masterClrMapping/>
+  </p:clrMapOvr>
+</p:sld>
+</file>
+
+<file path=ppt/slides/slide2.xml><?xml version="1.0" encoding="utf-8"?>
+<p:sld xmlns:a="http://schemas.openxmlformats.org/drawingml/2006/main" xmlns:r="http://schemas.openxmlformats.org/officeDocument/2006/relationships" xmlns:mc="http://schemas.openxmlformats.org/markup-compatibility/2006" xmlns:mv="urn:schemas-microsoft-com:mac:vml" xmlns:p="http://schemas.openxmlformats.org/presentationml/2006/main" xmlns:c="http://schemas.openxmlformats.org/drawingml/2006/chart" xmlns:dgm="http://schemas.openxmlformats.org/drawingml/2006/diagram" xmlns:o="urn:schemas-microsoft-com:office:office" xmlns:v="urn:schemas-microsoft-com:vml" xmlns:pvml="urn:schemas-microsoft-com:office:powerpoint" xmlns:com="http://schemas.openxmlformats.org/drawingml/2006/compatibility" xmlns:p14="http://schemas.microsoft.com/office/powerpoint/2010/main" xmlns:p15="http://schemas.microsoft.com/office/powerpoint/2012/main" xmlns:ahyp="http://schemas.microsoft.com/office/drawing/2018/hyperlinkcolor">
+  <p:cSld>
+    <p:spTree>
+      <p:nvGrpSpPr>
+        <p:cNvPr id="66" name="Shape 66"/>
+        <p:cNvGrpSpPr/>
+        <p:nvPr/>
+      </p:nvGrpSpPr>
+      <p:grpSpPr>
+        <a:xfrm>
+          <a:off x="0" y="0"/>
+          <a:ext cx="0" cy="0"/>
+          <a:chOff x="0" y="0"/>
+          <a:chExt cx="0" cy="0"/>
+        </a:xfrm>
+      </p:grpSpPr>
+      <p:sp>
+        <p:nvSpPr>
+          <p:cNvPr id="67" name="Google Shape;67;p15"/>
+          <p:cNvSpPr/>
+          <p:nvPr/>
+        </p:nvSpPr>
+        <p:spPr>
+          <a:xfrm>
+            <a:off x="609600" y="609600"/>
+            <a:ext cx="8083200" cy="409500"/>
+          </a:xfrm>
+          <a:prstGeom prst="rect">
+            <a:avLst/>
+          </a:prstGeom>
+          <a:noFill/>
+          <a:ln>
+            <a:noFill/>
+          </a:ln>
+        </p:spPr>
+        <p:txBody>
+          <a:bodyPr anchorCtr="0" anchor="t" bIns="0" lIns="0" spcFirstLastPara="1" rIns="0" wrap="square" tIns="0">
+            <a:noAutofit/>
+          </a:bodyPr>
+          <a:lstStyle/>
+          <a:p>
+            <a:pPr indent="0" lvl="0" marL="0" marR="0" rtl="0" algn="l">
+              <a:lnSpc>
+                <a:spcPct val="160000"/>
+              </a:lnSpc>
+              <a:spcBef>
+                <a:spcPts val="0"/>
+              </a:spcBef>
+              <a:spcAft>
+                <a:spcPts val="0"/>
+              </a:spcAft>
+              <a:buClr>
+                <a:srgbClr val="38BDF8"/>
+              </a:buClr>
+              <a:buSzPts val="2700"/>
+              <a:buFont typeface="Arial"/>
+              <a:buNone/>
+            </a:pPr>
+            <a:r>
+              <a:rPr b="1" lang="en-US" sz="2700">
+                <a:solidFill>
+                  <a:srgbClr val="38BDF8"/>
+                </a:solidFill>
+              </a:rPr>
               <a:t>Historie</a:t>
             </a:r>
             <a:endParaRPr b="0" i="0" sz="2700" u="none" cap="none" strike="noStrike">
@@ -3833,7 +8087,7 @@
       </p:sp>
       <p:sp>
         <p:nvSpPr>
-          <p:cNvPr id="24" name="Google Shape;24;p4"/>
+          <p:cNvPr id="68" name="Google Shape;68;p15"/>
           <p:cNvSpPr/>
           <p:nvPr/>
         </p:nvSpPr>
@@ -3856,7 +8110,7 @@
           </a:bodyPr>
           <a:lstStyle/>
           <a:p>
-            <a:pPr indent="-342900" lvl="0" marL="342900" marR="0" rtl="0" algn="l">
+            <a:pPr indent="0" lvl="0" marL="0" marR="0" rtl="0" algn="l">
               <a:lnSpc>
                 <a:spcPct val="240000"/>
               </a:lnSpc>
@@ -3866,24 +8120,14 @@
               <a:spcAft>
                 <a:spcPts val="0"/>
               </a:spcAft>
-              <a:buClr>
-                <a:srgbClr val="CBD5E1"/>
-              </a:buClr>
-              <a:buSzPts val="1350"/>
-              <a:buFont typeface="Arial"/>
-              <a:buChar char="•"/>
+              <a:buNone/>
             </a:pPr>
             <a:r>
-              <a:rPr lang="en-US" sz="1350">
-                <a:solidFill>
-                  <a:srgbClr val="CBD5E1"/>
-                </a:solidFill>
-              </a:rPr>
-              <a:t>Nachfolger von WebGL</a:t>
+              <a:t/>
             </a:r>
             <a:endParaRPr sz="1350">
               <a:solidFill>
-                <a:srgbClr val="CBD5E1"/>
+                <a:schemeClr val="dk1"/>
               </a:solidFill>
             </a:endParaRPr>
           </a:p>
@@ -3899,7 +8143,7 @@
                 <a:spcPts val="0"/>
               </a:spcAft>
               <a:buClr>
-                <a:srgbClr val="CBD5E1"/>
+                <a:schemeClr val="dk1"/>
               </a:buClr>
               <a:buSzPts val="1350"/>
               <a:buChar char="•"/>
@@ -3907,14 +8151,14 @@
             <a:r>
               <a:rPr lang="en-US" sz="1350">
                 <a:solidFill>
-                  <a:srgbClr val="CBD5E1"/>
+                  <a:schemeClr val="dk1"/>
                 </a:solidFill>
               </a:rPr>
               <a:t>WebGL -&gt; OpenGL </a:t>
             </a:r>
             <a:endParaRPr sz="1350">
               <a:solidFill>
-                <a:srgbClr val="CBD5E1"/>
+                <a:schemeClr val="dk1"/>
               </a:solidFill>
             </a:endParaRPr>
           </a:p>
@@ -3930,7 +8174,7 @@
                 <a:spcPts val="0"/>
               </a:spcAft>
               <a:buClr>
-                <a:srgbClr val="CBD5E1"/>
+                <a:schemeClr val="dk1"/>
               </a:buClr>
               <a:buSzPts val="1350"/>
               <a:buChar char="•"/>
@@ -3938,14 +8182,14 @@
             <a:r>
               <a:rPr lang="en-US" sz="1350">
                 <a:solidFill>
-                  <a:srgbClr val="CBD5E1"/>
+                  <a:schemeClr val="dk1"/>
                 </a:solidFill>
               </a:rPr>
-              <a:t>WebGL war weniger performant </a:t>
+              <a:t>WebGL nicht mehr performant genug für heutige Anforderungen</a:t>
             </a:r>
             <a:endParaRPr sz="1350">
               <a:solidFill>
-                <a:srgbClr val="CBD5E1"/>
+                <a:schemeClr val="dk1"/>
               </a:solidFill>
             </a:endParaRPr>
           </a:p>
@@ -3961,7 +8205,7 @@
                 <a:spcPts val="0"/>
               </a:spcAft>
               <a:buClr>
-                <a:srgbClr val="CBD5E1"/>
+                <a:schemeClr val="dk1"/>
               </a:buClr>
               <a:buSzPts val="1350"/>
               <a:buChar char="•"/>
@@ -3969,14 +8213,14 @@
             <a:r>
               <a:rPr lang="en-US" sz="1350">
                 <a:solidFill>
-                  <a:srgbClr val="CBD5E1"/>
+                  <a:schemeClr val="dk1"/>
                 </a:solidFill>
               </a:rPr>
               <a:t>Keine Unterstützung von Metal, Vulkan, Direct3D 12</a:t>
             </a:r>
             <a:endParaRPr sz="1350">
               <a:solidFill>
-                <a:srgbClr val="CBD5E1"/>
+                <a:schemeClr val="dk1"/>
               </a:solidFill>
             </a:endParaRPr>
           </a:p>
@@ -3992,7 +8236,7 @@
                 <a:spcPts val="0"/>
               </a:spcAft>
               <a:buClr>
-                <a:srgbClr val="CBD5E1"/>
+                <a:schemeClr val="dk1"/>
               </a:buClr>
               <a:buSzPts val="1350"/>
               <a:buChar char="•"/>
@@ -4000,14 +8244,14 @@
             <a:r>
               <a:rPr lang="en-US" sz="1350">
                 <a:solidFill>
-                  <a:srgbClr val="CBD5E1"/>
+                  <a:schemeClr val="dk1"/>
                 </a:solidFill>
               </a:rPr>
               <a:t>Konnte GPGPU nicht gut handeln</a:t>
             </a:r>
             <a:endParaRPr sz="1350">
               <a:solidFill>
-                <a:srgbClr val="CBD5E1"/>
+                <a:schemeClr val="dk1"/>
               </a:solidFill>
             </a:endParaRPr>
           </a:p>
@@ -4024,16 +8268,9 @@
 <file path=ppt/slides/slide3.xml><?xml version="1.0" encoding="utf-8"?>
 <p:sld xmlns:a="http://schemas.openxmlformats.org/drawingml/2006/main" xmlns:r="http://schemas.openxmlformats.org/officeDocument/2006/relationships" xmlns:mc="http://schemas.openxmlformats.org/markup-compatibility/2006" xmlns:mv="urn:schemas-microsoft-com:mac:vml" xmlns:p="http://schemas.openxmlformats.org/presentationml/2006/main" xmlns:c="http://schemas.openxmlformats.org/drawingml/2006/chart" xmlns:dgm="http://schemas.openxmlformats.org/drawingml/2006/diagram" xmlns:o="urn:schemas-microsoft-com:office:office" xmlns:v="urn:schemas-microsoft-com:vml" xmlns:pvml="urn:schemas-microsoft-com:office:powerpoint" xmlns:com="http://schemas.openxmlformats.org/drawingml/2006/compatibility" xmlns:p14="http://schemas.microsoft.com/office/powerpoint/2010/main" xmlns:p15="http://schemas.microsoft.com/office/powerpoint/2012/main" xmlns:ahyp="http://schemas.microsoft.com/office/drawing/2018/hyperlinkcolor">
   <p:cSld>
-    <p:bg>
-      <p:bgPr>
-        <a:solidFill>
-          <a:srgbClr val="0F172A"/>
-        </a:solidFill>
-      </p:bgPr>
-    </p:bg>
     <p:spTree>
       <p:nvGrpSpPr>
-        <p:cNvPr id="29" name="Shape 29"/>
+        <p:cNvPr id="73" name="Shape 73"/>
         <p:cNvGrpSpPr/>
         <p:nvPr/>
       </p:nvGrpSpPr>
@@ -4047,7 +8284,7 @@
       </p:grpSpPr>
       <p:sp>
         <p:nvSpPr>
-          <p:cNvPr id="30" name="Google Shape;30;p5"/>
+          <p:cNvPr id="74" name="Google Shape;74;p16"/>
           <p:cNvSpPr/>
           <p:nvPr/>
         </p:nvSpPr>
@@ -4113,7 +8350,7 @@
       </p:sp>
       <p:sp>
         <p:nvSpPr>
-          <p:cNvPr id="31" name="Google Shape;31;p5"/>
+          <p:cNvPr id="75" name="Google Shape;75;p16"/>
           <p:cNvSpPr/>
           <p:nvPr/>
         </p:nvSpPr>
@@ -4147,7 +8384,7 @@
                 <a:spcPts val="0"/>
               </a:spcAft>
               <a:buClr>
-                <a:srgbClr val="CBD5E1"/>
+                <a:schemeClr val="dk1"/>
               </a:buClr>
               <a:buSzPts val="1350"/>
               <a:buFont typeface="Arial"/>
@@ -4156,7 +8393,7 @@
             <a:r>
               <a:rPr b="0" i="0" lang="en-US" sz="1350" u="none" cap="none" strike="noStrike">
                 <a:solidFill>
-                  <a:srgbClr val="CBD5E1"/>
+                  <a:schemeClr val="dk1"/>
                 </a:solidFill>
                 <a:latin typeface="Arial"/>
                 <a:ea typeface="Arial"/>
@@ -4168,7 +8405,7 @@
             <a:r>
               <a:rPr lang="en-US" sz="1350">
                 <a:solidFill>
-                  <a:srgbClr val="CBD5E1"/>
+                  <a:schemeClr val="dk1"/>
                 </a:solidFill>
               </a:rPr>
               <a:t>übers Web</a:t>
@@ -4195,7 +8432,7 @@
                 <a:spcPts val="0"/>
               </a:spcAft>
               <a:buClr>
-                <a:srgbClr val="CBD5E1"/>
+                <a:schemeClr val="dk1"/>
               </a:buClr>
               <a:buSzPts val="1350"/>
               <a:buFont typeface="Arial"/>
@@ -4204,7 +8441,7 @@
             <a:r>
               <a:rPr b="0" i="0" lang="en-US" sz="1350" u="none" cap="none" strike="noStrike">
                 <a:solidFill>
-                  <a:srgbClr val="CBD5E1"/>
+                  <a:schemeClr val="dk1"/>
                 </a:solidFill>
                 <a:latin typeface="Arial"/>
                 <a:ea typeface="Arial"/>
@@ -4235,7 +8472,7 @@
                 <a:spcPts val="0"/>
               </a:spcAft>
               <a:buClr>
-                <a:srgbClr val="CBD5E1"/>
+                <a:schemeClr val="dk1"/>
               </a:buClr>
               <a:buSzPts val="1350"/>
               <a:buFont typeface="Arial"/>
@@ -4244,7 +8481,7 @@
             <a:r>
               <a:rPr b="0" i="0" lang="en-US" sz="1350" u="none" cap="none" strike="noStrike">
                 <a:solidFill>
-                  <a:srgbClr val="CBD5E1"/>
+                  <a:schemeClr val="dk1"/>
                 </a:solidFill>
                 <a:latin typeface="Arial"/>
                 <a:ea typeface="Arial"/>
@@ -4276,16 +8513,9 @@
 <file path=ppt/slides/slide4.xml><?xml version="1.0" encoding="utf-8"?>
 <p:sld xmlns:a="http://schemas.openxmlformats.org/drawingml/2006/main" xmlns:r="http://schemas.openxmlformats.org/officeDocument/2006/relationships" xmlns:mc="http://schemas.openxmlformats.org/markup-compatibility/2006" xmlns:mv="urn:schemas-microsoft-com:mac:vml" xmlns:p="http://schemas.openxmlformats.org/presentationml/2006/main" xmlns:c="http://schemas.openxmlformats.org/drawingml/2006/chart" xmlns:dgm="http://schemas.openxmlformats.org/drawingml/2006/diagram" xmlns:o="urn:schemas-microsoft-com:office:office" xmlns:v="urn:schemas-microsoft-com:vml" xmlns:pvml="urn:schemas-microsoft-com:office:powerpoint" xmlns:com="http://schemas.openxmlformats.org/drawingml/2006/compatibility" xmlns:p14="http://schemas.microsoft.com/office/powerpoint/2010/main" xmlns:p15="http://schemas.microsoft.com/office/powerpoint/2012/main" xmlns:ahyp="http://schemas.microsoft.com/office/drawing/2018/hyperlinkcolor">
   <p:cSld>
-    <p:bg>
-      <p:bgPr>
-        <a:solidFill>
-          <a:srgbClr val="0F172A"/>
-        </a:solidFill>
-      </p:bgPr>
-    </p:bg>
     <p:spTree>
       <p:nvGrpSpPr>
-        <p:cNvPr id="36" name="Shape 36"/>
+        <p:cNvPr id="80" name="Shape 80"/>
         <p:cNvGrpSpPr/>
         <p:nvPr/>
       </p:nvGrpSpPr>
@@ -4299,7 +8529,7 @@
       </p:grpSpPr>
       <p:sp>
         <p:nvSpPr>
-          <p:cNvPr id="37" name="Google Shape;37;p6"/>
+          <p:cNvPr id="81" name="Google Shape;81;p17"/>
           <p:cNvSpPr/>
           <p:nvPr/>
         </p:nvSpPr>
@@ -4362,7 +8592,7 @@
       </p:sp>
       <p:sp>
         <p:nvSpPr>
-          <p:cNvPr id="38" name="Google Shape;38;p6"/>
+          <p:cNvPr id="82" name="Google Shape;82;p17"/>
           <p:cNvSpPr/>
           <p:nvPr/>
         </p:nvSpPr>
@@ -4425,7 +8655,7 @@
       </p:sp>
       <p:sp>
         <p:nvSpPr>
-          <p:cNvPr id="39" name="Google Shape;39;p6"/>
+          <p:cNvPr id="83" name="Google Shape;83;p17"/>
           <p:cNvSpPr/>
           <p:nvPr/>
         </p:nvSpPr>
@@ -4497,7 +8727,7 @@
       </p:sp>
       <p:sp>
         <p:nvSpPr>
-          <p:cNvPr id="40" name="Google Shape;40;p6"/>
+          <p:cNvPr id="84" name="Google Shape;84;p17"/>
           <p:cNvSpPr/>
           <p:nvPr/>
         </p:nvSpPr>
@@ -4563,7 +8793,7 @@
       </p:sp>
       <p:sp>
         <p:nvSpPr>
-          <p:cNvPr id="41" name="Google Shape;41;p6"/>
+          <p:cNvPr id="85" name="Google Shape;85;p17"/>
           <p:cNvSpPr/>
           <p:nvPr/>
         </p:nvSpPr>
@@ -4635,7 +8865,7 @@
       </p:sp>
       <p:sp>
         <p:nvSpPr>
-          <p:cNvPr id="42" name="Google Shape;42;p6"/>
+          <p:cNvPr id="86" name="Google Shape;86;p17"/>
           <p:cNvSpPr/>
           <p:nvPr/>
         </p:nvSpPr>
@@ -4707,7 +8937,7 @@
       </p:sp>
       <p:sp>
         <p:nvSpPr>
-          <p:cNvPr id="43" name="Google Shape;43;p6"/>
+          <p:cNvPr id="87" name="Google Shape;87;p17"/>
           <p:cNvSpPr/>
           <p:nvPr/>
         </p:nvSpPr>
@@ -4779,7 +9009,7 @@
       </p:sp>
       <p:sp>
         <p:nvSpPr>
-          <p:cNvPr id="44" name="Google Shape;44;p6"/>
+          <p:cNvPr id="88" name="Google Shape;88;p17"/>
           <p:cNvSpPr/>
           <p:nvPr/>
         </p:nvSpPr>
@@ -4851,7 +9081,7 @@
       </p:sp>
       <p:sp>
         <p:nvSpPr>
-          <p:cNvPr id="45" name="Google Shape;45;p6"/>
+          <p:cNvPr id="89" name="Google Shape;89;p17"/>
           <p:cNvSpPr/>
           <p:nvPr/>
         </p:nvSpPr>
@@ -4923,10 +9153,10 @@
       </p:sp>
       <p:cxnSp>
         <p:nvCxnSpPr>
-          <p:cNvPr id="46" name="Google Shape;46;p6"/>
+          <p:cNvPr id="90" name="Google Shape;90;p17"/>
           <p:cNvCxnSpPr>
-            <a:stCxn id="45" idx="3"/>
-            <a:endCxn id="37" idx="1"/>
+            <a:stCxn id="89" idx="3"/>
+            <a:endCxn id="81" idx="1"/>
           </p:cNvCxnSpPr>
           <p:nvPr/>
         </p:nvCxnSpPr>
@@ -4952,10 +9182,10 @@
       </p:cxnSp>
       <p:cxnSp>
         <p:nvCxnSpPr>
-          <p:cNvPr id="47" name="Google Shape;47;p6"/>
+          <p:cNvPr id="91" name="Google Shape;91;p17"/>
           <p:cNvCxnSpPr>
-            <a:stCxn id="37" idx="3"/>
-            <a:endCxn id="38" idx="1"/>
+            <a:stCxn id="81" idx="3"/>
+            <a:endCxn id="82" idx="1"/>
           </p:cNvCxnSpPr>
           <p:nvPr/>
         </p:nvCxnSpPr>
@@ -4990,16 +9220,9 @@
 <file path=ppt/slides/slide5.xml><?xml version="1.0" encoding="utf-8"?>
 <p:sld xmlns:a="http://schemas.openxmlformats.org/drawingml/2006/main" xmlns:r="http://schemas.openxmlformats.org/officeDocument/2006/relationships" xmlns:mc="http://schemas.openxmlformats.org/markup-compatibility/2006" xmlns:mv="urn:schemas-microsoft-com:mac:vml" xmlns:p="http://schemas.openxmlformats.org/presentationml/2006/main" xmlns:c="http://schemas.openxmlformats.org/drawingml/2006/chart" xmlns:dgm="http://schemas.openxmlformats.org/drawingml/2006/diagram" xmlns:o="urn:schemas-microsoft-com:office:office" xmlns:v="urn:schemas-microsoft-com:vml" xmlns:pvml="urn:schemas-microsoft-com:office:powerpoint" xmlns:com="http://schemas.openxmlformats.org/drawingml/2006/compatibility" xmlns:p14="http://schemas.microsoft.com/office/powerpoint/2010/main" xmlns:p15="http://schemas.microsoft.com/office/powerpoint/2012/main" xmlns:ahyp="http://schemas.microsoft.com/office/drawing/2018/hyperlinkcolor">
   <p:cSld>
-    <p:bg>
-      <p:bgPr>
-        <a:solidFill>
-          <a:srgbClr val="0F172A"/>
-        </a:solidFill>
-      </p:bgPr>
-    </p:bg>
     <p:spTree>
       <p:nvGrpSpPr>
-        <p:cNvPr id="52" name="Shape 52"/>
+        <p:cNvPr id="96" name="Shape 96"/>
         <p:cNvGrpSpPr/>
         <p:nvPr/>
       </p:nvGrpSpPr>
@@ -5013,7 +9236,7 @@
       </p:grpSpPr>
       <p:sp>
         <p:nvSpPr>
-          <p:cNvPr id="53" name="Google Shape;53;p7"/>
+          <p:cNvPr id="97" name="Google Shape;97;p18"/>
           <p:cNvSpPr/>
           <p:nvPr/>
         </p:nvSpPr>
@@ -5079,7 +9302,7 @@
       </p:sp>
       <p:sp>
         <p:nvSpPr>
-          <p:cNvPr id="54" name="Google Shape;54;p7"/>
+          <p:cNvPr id="98" name="Google Shape;98;p18"/>
           <p:cNvSpPr/>
           <p:nvPr/>
         </p:nvSpPr>
@@ -5149,7 +9372,7 @@
                 <a:spcPts val="0"/>
               </a:spcAft>
               <a:buClr>
-                <a:srgbClr val="38BDF8"/>
+                <a:schemeClr val="dk1"/>
               </a:buClr>
               <a:buSzPts val="1350"/>
               <a:buChar char="●"/>
@@ -5157,14 +9380,14 @@
             <a:r>
               <a:rPr lang="en-US" sz="1350">
                 <a:solidFill>
-                  <a:srgbClr val="CBD5E1"/>
+                  <a:schemeClr val="dk1"/>
                 </a:solidFill>
               </a:rPr>
               <a:t>Vertex → Rasterisierung → Fragment → Ausgabe</a:t>
             </a:r>
             <a:endParaRPr b="1" sz="1350">
               <a:solidFill>
-                <a:srgbClr val="38BDF8"/>
+                <a:schemeClr val="dk1"/>
               </a:solidFill>
             </a:endParaRPr>
           </a:p>
@@ -5220,7 +9443,7 @@
                 <a:spcPts val="0"/>
               </a:spcAft>
               <a:buClr>
-                <a:srgbClr val="38BDF8"/>
+                <a:schemeClr val="dk1"/>
               </a:buClr>
               <a:buSzPts val="1350"/>
               <a:buChar char="●"/>
@@ -5228,14 +9451,14 @@
             <a:r>
               <a:rPr lang="en-US" sz="1350">
                 <a:solidFill>
-                  <a:srgbClr val="CBD5E1"/>
+                  <a:schemeClr val="dk1"/>
                 </a:solidFill>
               </a:rPr>
               <a:t>Compute Stage</a:t>
             </a:r>
             <a:endParaRPr sz="1350">
               <a:solidFill>
-                <a:srgbClr val="CBD5E1"/>
+                <a:schemeClr val="dk1"/>
               </a:solidFill>
             </a:endParaRPr>
           </a:p>
@@ -5252,16 +9475,9 @@
 <file path=ppt/slides/slide6.xml><?xml version="1.0" encoding="utf-8"?>
 <p:sld xmlns:a="http://schemas.openxmlformats.org/drawingml/2006/main" xmlns:r="http://schemas.openxmlformats.org/officeDocument/2006/relationships" xmlns:mc="http://schemas.openxmlformats.org/markup-compatibility/2006" xmlns:mv="urn:schemas-microsoft-com:mac:vml" xmlns:p="http://schemas.openxmlformats.org/presentationml/2006/main" xmlns:c="http://schemas.openxmlformats.org/drawingml/2006/chart" xmlns:dgm="http://schemas.openxmlformats.org/drawingml/2006/diagram" xmlns:o="urn:schemas-microsoft-com:office:office" xmlns:v="urn:schemas-microsoft-com:vml" xmlns:pvml="urn:schemas-microsoft-com:office:powerpoint" xmlns:com="http://schemas.openxmlformats.org/drawingml/2006/compatibility" xmlns:p14="http://schemas.microsoft.com/office/powerpoint/2010/main" xmlns:p15="http://schemas.microsoft.com/office/powerpoint/2012/main" xmlns:ahyp="http://schemas.microsoft.com/office/drawing/2018/hyperlinkcolor">
   <p:cSld>
-    <p:bg>
-      <p:bgPr>
-        <a:solidFill>
-          <a:srgbClr val="0F172A"/>
-        </a:solidFill>
-      </p:bgPr>
-    </p:bg>
     <p:spTree>
       <p:nvGrpSpPr>
-        <p:cNvPr id="59" name="Shape 59"/>
+        <p:cNvPr id="103" name="Shape 103"/>
         <p:cNvGrpSpPr/>
         <p:nvPr/>
       </p:nvGrpSpPr>
@@ -5275,7 +9491,7 @@
       </p:grpSpPr>
       <p:sp>
         <p:nvSpPr>
-          <p:cNvPr id="60" name="Google Shape;60;p8"/>
+          <p:cNvPr id="104" name="Google Shape;104;p19"/>
           <p:cNvSpPr/>
           <p:nvPr/>
         </p:nvSpPr>
@@ -5341,7 +9557,7 @@
       </p:sp>
       <p:pic>
         <p:nvPicPr>
-          <p:cNvPr id="61" name="Google Shape;61;p8"/>
+          <p:cNvPr id="105" name="Google Shape;105;p19"/>
           <p:cNvPicPr preferRelativeResize="0"/>
           <p:nvPr/>
         </p:nvPicPr>
@@ -5369,7 +9585,7 @@
       </p:pic>
       <p:pic>
         <p:nvPicPr>
-          <p:cNvPr id="62" name="Google Shape;62;p8"/>
+          <p:cNvPr id="106" name="Google Shape;106;p19"/>
           <p:cNvPicPr preferRelativeResize="0"/>
           <p:nvPr/>
         </p:nvPicPr>
@@ -5406,16 +9622,9 @@
 <file path=ppt/slides/slide7.xml><?xml version="1.0" encoding="utf-8"?>
 <p:sld xmlns:a="http://schemas.openxmlformats.org/drawingml/2006/main" xmlns:r="http://schemas.openxmlformats.org/officeDocument/2006/relationships" xmlns:mc="http://schemas.openxmlformats.org/markup-compatibility/2006" xmlns:mv="urn:schemas-microsoft-com:mac:vml" xmlns:p="http://schemas.openxmlformats.org/presentationml/2006/main" xmlns:c="http://schemas.openxmlformats.org/drawingml/2006/chart" xmlns:dgm="http://schemas.openxmlformats.org/drawingml/2006/diagram" xmlns:o="urn:schemas-microsoft-com:office:office" xmlns:v="urn:schemas-microsoft-com:vml" xmlns:pvml="urn:schemas-microsoft-com:office:powerpoint" xmlns:com="http://schemas.openxmlformats.org/drawingml/2006/compatibility" xmlns:p14="http://schemas.microsoft.com/office/powerpoint/2010/main" xmlns:p15="http://schemas.microsoft.com/office/powerpoint/2012/main" xmlns:ahyp="http://schemas.microsoft.com/office/drawing/2018/hyperlinkcolor">
   <p:cSld>
-    <p:bg>
-      <p:bgPr>
-        <a:solidFill>
-          <a:srgbClr val="0F172A"/>
-        </a:solidFill>
-      </p:bgPr>
-    </p:bg>
     <p:spTree>
       <p:nvGrpSpPr>
-        <p:cNvPr id="67" name="Shape 67"/>
+        <p:cNvPr id="111" name="Shape 111"/>
         <p:cNvGrpSpPr/>
         <p:nvPr/>
       </p:nvGrpSpPr>
@@ -5429,7 +9638,182 @@
       </p:grpSpPr>
       <p:sp>
         <p:nvSpPr>
-          <p:cNvPr id="68" name="Google Shape;68;p9"/>
+          <p:cNvPr id="112" name="Google Shape;112;p20"/>
+          <p:cNvSpPr/>
+          <p:nvPr/>
+        </p:nvSpPr>
+        <p:spPr>
+          <a:xfrm>
+            <a:off x="609600" y="609600"/>
+            <a:ext cx="8083200" cy="409500"/>
+          </a:xfrm>
+          <a:prstGeom prst="rect">
+            <a:avLst/>
+          </a:prstGeom>
+          <a:noFill/>
+          <a:ln>
+            <a:noFill/>
+          </a:ln>
+        </p:spPr>
+        <p:txBody>
+          <a:bodyPr anchorCtr="0" anchor="t" bIns="0" lIns="0" spcFirstLastPara="1" rIns="0" wrap="square" tIns="0">
+            <a:noAutofit/>
+          </a:bodyPr>
+          <a:lstStyle/>
+          <a:p>
+            <a:pPr indent="0" lvl="0" marL="0" marR="0" rtl="0" algn="l">
+              <a:lnSpc>
+                <a:spcPct val="160000"/>
+              </a:lnSpc>
+              <a:spcBef>
+                <a:spcPts val="0"/>
+              </a:spcBef>
+              <a:spcAft>
+                <a:spcPts val="0"/>
+              </a:spcAft>
+              <a:buClr>
+                <a:srgbClr val="38BDF8"/>
+              </a:buClr>
+              <a:buSzPts val="2700"/>
+              <a:buFont typeface="Arial"/>
+              <a:buNone/>
+            </a:pPr>
+            <a:r>
+              <a:rPr b="1" lang="en-US" sz="2700">
+                <a:solidFill>
+                  <a:srgbClr val="38BDF8"/>
+                </a:solidFill>
+              </a:rPr>
+              <a:t>Rasterisierung</a:t>
+            </a:r>
+            <a:endParaRPr b="0" i="0" sz="2700" u="none" cap="none" strike="noStrike">
+              <a:solidFill>
+                <a:schemeClr val="dk1"/>
+              </a:solidFill>
+              <a:latin typeface="Calibri"/>
+              <a:ea typeface="Calibri"/>
+              <a:cs typeface="Calibri"/>
+              <a:sym typeface="Calibri"/>
+            </a:endParaRPr>
+          </a:p>
+        </p:txBody>
+      </p:sp>
+      <p:sp>
+        <p:nvSpPr>
+          <p:cNvPr id="113" name="Google Shape;113;p20"/>
+          <p:cNvSpPr/>
+          <p:nvPr/>
+        </p:nvSpPr>
+        <p:spPr>
+          <a:xfrm>
+            <a:off x="914400" y="1247775"/>
+            <a:ext cx="7620000" cy="1600200"/>
+          </a:xfrm>
+          <a:prstGeom prst="rect">
+            <a:avLst/>
+          </a:prstGeom>
+          <a:noFill/>
+          <a:ln>
+            <a:noFill/>
+          </a:ln>
+        </p:spPr>
+        <p:txBody>
+          <a:bodyPr anchorCtr="0" anchor="t" bIns="0" lIns="0" spcFirstLastPara="1" rIns="0" wrap="square" tIns="0">
+            <a:noAutofit/>
+          </a:bodyPr>
+          <a:lstStyle/>
+          <a:p>
+            <a:pPr indent="-314325" lvl="0" marL="457200" marR="0" rtl="0" algn="l">
+              <a:lnSpc>
+                <a:spcPct val="240000"/>
+              </a:lnSpc>
+              <a:spcBef>
+                <a:spcPts val="0"/>
+              </a:spcBef>
+              <a:spcAft>
+                <a:spcPts val="0"/>
+              </a:spcAft>
+              <a:buClr>
+                <a:schemeClr val="dk1"/>
+              </a:buClr>
+              <a:buSzPts val="1350"/>
+              <a:buChar char="●"/>
+            </a:pPr>
+            <a:r>
+              <a:rPr b="1" lang="en-US" sz="1350">
+                <a:solidFill>
+                  <a:schemeClr val="dk1"/>
+                </a:solidFill>
+              </a:rPr>
+              <a:t>Schaut welche Pixel der Primitives “sichtbar” sind </a:t>
+            </a:r>
+            <a:endParaRPr b="1" sz="1350">
+              <a:solidFill>
+                <a:schemeClr val="dk1"/>
+              </a:solidFill>
+            </a:endParaRPr>
+          </a:p>
+          <a:p>
+            <a:pPr indent="-314325" lvl="0" marL="457200" marR="0" rtl="0" algn="l">
+              <a:lnSpc>
+                <a:spcPct val="240000"/>
+              </a:lnSpc>
+              <a:spcBef>
+                <a:spcPts val="0"/>
+              </a:spcBef>
+              <a:spcAft>
+                <a:spcPts val="0"/>
+              </a:spcAft>
+              <a:buClr>
+                <a:schemeClr val="dk1"/>
+              </a:buClr>
+              <a:buSzPts val="1350"/>
+              <a:buChar char="●"/>
+            </a:pPr>
+            <a:r>
+              <a:rPr b="1" lang="en-US" sz="1350">
+                <a:solidFill>
+                  <a:schemeClr val="dk1"/>
+                </a:solidFill>
+              </a:rPr>
+              <a:t>Interpoliert für den jeweiligen Pixel Farbe, UV, etc.</a:t>
+            </a:r>
+            <a:endParaRPr b="1" sz="1350">
+              <a:solidFill>
+                <a:schemeClr val="dk1"/>
+              </a:solidFill>
+            </a:endParaRPr>
+          </a:p>
+        </p:txBody>
+      </p:sp>
+    </p:spTree>
+  </p:cSld>
+  <p:clrMapOvr>
+    <a:masterClrMapping/>
+  </p:clrMapOvr>
+</p:sld>
+</file>
+
+<file path=ppt/slides/slide8.xml><?xml version="1.0" encoding="utf-8"?>
+<p:sld xmlns:a="http://schemas.openxmlformats.org/drawingml/2006/main" xmlns:r="http://schemas.openxmlformats.org/officeDocument/2006/relationships" xmlns:mc="http://schemas.openxmlformats.org/markup-compatibility/2006" xmlns:mv="urn:schemas-microsoft-com:mac:vml" xmlns:p="http://schemas.openxmlformats.org/presentationml/2006/main" xmlns:c="http://schemas.openxmlformats.org/drawingml/2006/chart" xmlns:dgm="http://schemas.openxmlformats.org/drawingml/2006/diagram" xmlns:o="urn:schemas-microsoft-com:office:office" xmlns:v="urn:schemas-microsoft-com:vml" xmlns:pvml="urn:schemas-microsoft-com:office:powerpoint" xmlns:com="http://schemas.openxmlformats.org/drawingml/2006/compatibility" xmlns:p14="http://schemas.microsoft.com/office/powerpoint/2010/main" xmlns:p15="http://schemas.microsoft.com/office/powerpoint/2012/main" xmlns:ahyp="http://schemas.microsoft.com/office/drawing/2018/hyperlinkcolor">
+  <p:cSld>
+    <p:spTree>
+      <p:nvGrpSpPr>
+        <p:cNvPr id="118" name="Shape 118"/>
+        <p:cNvGrpSpPr/>
+        <p:nvPr/>
+      </p:nvGrpSpPr>
+      <p:grpSpPr>
+        <a:xfrm>
+          <a:off x="0" y="0"/>
+          <a:ext cx="0" cy="0"/>
+          <a:chOff x="0" y="0"/>
+          <a:chExt cx="0" cy="0"/>
+        </a:xfrm>
+      </p:grpSpPr>
+      <p:sp>
+        <p:nvSpPr>
+          <p:cNvPr id="119" name="Google Shape;119;p21"/>
           <p:cNvSpPr/>
           <p:nvPr/>
         </p:nvSpPr>
@@ -5495,7 +9879,7 @@
       </p:sp>
       <p:pic>
         <p:nvPicPr>
-          <p:cNvPr id="69" name="Google Shape;69;p9"/>
+          <p:cNvPr id="120" name="Google Shape;120;p21"/>
           <p:cNvPicPr preferRelativeResize="0"/>
           <p:nvPr/>
         </p:nvPicPr>
@@ -5529,19 +9913,12 @@
 </p:sld>
 </file>
 
-<file path=ppt/slides/slide8.xml><?xml version="1.0" encoding="utf-8"?>
+<file path=ppt/slides/slide9.xml><?xml version="1.0" encoding="utf-8"?>
 <p:sld xmlns:a="http://schemas.openxmlformats.org/drawingml/2006/main" xmlns:r="http://schemas.openxmlformats.org/officeDocument/2006/relationships" xmlns:mc="http://schemas.openxmlformats.org/markup-compatibility/2006" xmlns:mv="urn:schemas-microsoft-com:mac:vml" xmlns:p="http://schemas.openxmlformats.org/presentationml/2006/main" xmlns:c="http://schemas.openxmlformats.org/drawingml/2006/chart" xmlns:dgm="http://schemas.openxmlformats.org/drawingml/2006/diagram" xmlns:o="urn:schemas-microsoft-com:office:office" xmlns:v="urn:schemas-microsoft-com:vml" xmlns:pvml="urn:schemas-microsoft-com:office:powerpoint" xmlns:com="http://schemas.openxmlformats.org/drawingml/2006/compatibility" xmlns:p14="http://schemas.microsoft.com/office/powerpoint/2010/main" xmlns:p15="http://schemas.microsoft.com/office/powerpoint/2012/main" xmlns:ahyp="http://schemas.microsoft.com/office/drawing/2018/hyperlinkcolor">
   <p:cSld>
-    <p:bg>
-      <p:bgPr>
-        <a:solidFill>
-          <a:srgbClr val="020617"/>
-        </a:solidFill>
-      </p:bgPr>
-    </p:bg>
     <p:spTree>
       <p:nvGrpSpPr>
-        <p:cNvPr id="74" name="Shape 74"/>
+        <p:cNvPr id="125" name="Shape 125"/>
         <p:cNvGrpSpPr/>
         <p:nvPr/>
       </p:nvGrpSpPr>
@@ -5555,7 +9932,7 @@
       </p:grpSpPr>
       <p:sp>
         <p:nvSpPr>
-          <p:cNvPr id="75" name="Google Shape;75;p10"/>
+          <p:cNvPr id="126" name="Google Shape;126;p22"/>
           <p:cNvSpPr/>
           <p:nvPr/>
         </p:nvSpPr>
@@ -5621,7 +9998,7 @@
       </p:sp>
       <p:sp>
         <p:nvSpPr>
-          <p:cNvPr id="76" name="Google Shape;76;p10"/>
+          <p:cNvPr id="127" name="Google Shape;127;p22"/>
           <p:cNvSpPr/>
           <p:nvPr/>
         </p:nvSpPr>
@@ -5672,186 +10049,6 @@
               <a:ea typeface="Calibri"/>
               <a:cs typeface="Calibri"/>
               <a:sym typeface="Calibri"/>
-            </a:endParaRPr>
-          </a:p>
-        </p:txBody>
-      </p:sp>
-    </p:spTree>
-  </p:cSld>
-  <p:clrMapOvr>
-    <a:masterClrMapping/>
-  </p:clrMapOvr>
-</p:sld>
-</file>
-
-<file path=ppt/slides/slide9.xml><?xml version="1.0" encoding="utf-8"?>
-<p:sld xmlns:a="http://schemas.openxmlformats.org/drawingml/2006/main" xmlns:r="http://schemas.openxmlformats.org/officeDocument/2006/relationships" xmlns:mc="http://schemas.openxmlformats.org/markup-compatibility/2006" xmlns:mv="urn:schemas-microsoft-com:mac:vml" xmlns:p="http://schemas.openxmlformats.org/presentationml/2006/main" xmlns:c="http://schemas.openxmlformats.org/drawingml/2006/chart" xmlns:dgm="http://schemas.openxmlformats.org/drawingml/2006/diagram" xmlns:o="urn:schemas-microsoft-com:office:office" xmlns:v="urn:schemas-microsoft-com:vml" xmlns:pvml="urn:schemas-microsoft-com:office:powerpoint" xmlns:com="http://schemas.openxmlformats.org/drawingml/2006/compatibility" xmlns:p14="http://schemas.microsoft.com/office/powerpoint/2010/main" xmlns:p15="http://schemas.microsoft.com/office/powerpoint/2012/main" xmlns:ahyp="http://schemas.microsoft.com/office/drawing/2018/hyperlinkcolor">
-  <p:cSld>
-    <p:bg>
-      <p:bgPr>
-        <a:solidFill>
-          <a:srgbClr val="0F172A"/>
-        </a:solidFill>
-      </p:bgPr>
-    </p:bg>
-    <p:spTree>
-      <p:nvGrpSpPr>
-        <p:cNvPr id="81" name="Shape 81"/>
-        <p:cNvGrpSpPr/>
-        <p:nvPr/>
-      </p:nvGrpSpPr>
-      <p:grpSpPr>
-        <a:xfrm>
-          <a:off x="0" y="0"/>
-          <a:ext cx="0" cy="0"/>
-          <a:chOff x="0" y="0"/>
-          <a:chExt cx="0" cy="0"/>
-        </a:xfrm>
-      </p:grpSpPr>
-      <p:sp>
-        <p:nvSpPr>
-          <p:cNvPr id="82" name="Google Shape;82;p11"/>
-          <p:cNvSpPr/>
-          <p:nvPr/>
-        </p:nvSpPr>
-        <p:spPr>
-          <a:xfrm>
-            <a:off x="609600" y="609600"/>
-            <a:ext cx="8083200" cy="409500"/>
-          </a:xfrm>
-          <a:prstGeom prst="rect">
-            <a:avLst/>
-          </a:prstGeom>
-          <a:noFill/>
-          <a:ln>
-            <a:noFill/>
-          </a:ln>
-        </p:spPr>
-        <p:txBody>
-          <a:bodyPr anchorCtr="0" anchor="t" bIns="0" lIns="0" spcFirstLastPara="1" rIns="0" wrap="square" tIns="0">
-            <a:noAutofit/>
-          </a:bodyPr>
-          <a:lstStyle/>
-          <a:p>
-            <a:pPr indent="0" lvl="0" marL="0" marR="0" rtl="0" algn="l">
-              <a:lnSpc>
-                <a:spcPct val="160000"/>
-              </a:lnSpc>
-              <a:spcBef>
-                <a:spcPts val="0"/>
-              </a:spcBef>
-              <a:spcAft>
-                <a:spcPts val="0"/>
-              </a:spcAft>
-              <a:buClr>
-                <a:srgbClr val="38BDF8"/>
-              </a:buClr>
-              <a:buSzPts val="2700"/>
-              <a:buFont typeface="Arial"/>
-              <a:buNone/>
-            </a:pPr>
-            <a:r>
-              <a:rPr b="1" lang="en-US" sz="2700">
-                <a:solidFill>
-                  <a:srgbClr val="38BDF8"/>
-                </a:solidFill>
-              </a:rPr>
-              <a:t>Quellen</a:t>
-            </a:r>
-            <a:endParaRPr b="0" i="0" sz="2700" u="none" cap="none" strike="noStrike">
-              <a:solidFill>
-                <a:schemeClr val="dk1"/>
-              </a:solidFill>
-              <a:latin typeface="Calibri"/>
-              <a:ea typeface="Calibri"/>
-              <a:cs typeface="Calibri"/>
-              <a:sym typeface="Calibri"/>
-            </a:endParaRPr>
-          </a:p>
-        </p:txBody>
-      </p:sp>
-      <p:sp>
-        <p:nvSpPr>
-          <p:cNvPr id="83" name="Google Shape;83;p11"/>
-          <p:cNvSpPr txBox="1"/>
-          <p:nvPr/>
-        </p:nvSpPr>
-        <p:spPr>
-          <a:xfrm>
-            <a:off x="563100" y="1368350"/>
-            <a:ext cx="7486200" cy="3060300"/>
-          </a:xfrm>
-          <a:prstGeom prst="rect">
-            <a:avLst/>
-          </a:prstGeom>
-          <a:noFill/>
-          <a:ln>
-            <a:noFill/>
-          </a:ln>
-        </p:spPr>
-        <p:txBody>
-          <a:bodyPr anchorCtr="0" anchor="t" bIns="91425" lIns="91425" spcFirstLastPara="1" rIns="91425" wrap="square" tIns="91425">
-            <a:noAutofit/>
-          </a:bodyPr>
-          <a:lstStyle/>
-          <a:p>
-            <a:pPr indent="0" lvl="0" marL="0" rtl="0" algn="l">
-              <a:lnSpc>
-                <a:spcPct val="186666"/>
-              </a:lnSpc>
-              <a:spcBef>
-                <a:spcPts val="0"/>
-              </a:spcBef>
-              <a:spcAft>
-                <a:spcPts val="0"/>
-              </a:spcAft>
-              <a:buClr>
-                <a:srgbClr val="CBD5E1"/>
-              </a:buClr>
-              <a:buSzPts val="1350"/>
-              <a:buFont typeface="Arial"/>
-              <a:buNone/>
-            </a:pPr>
-            <a:r>
-              <a:rPr lang="en-US" sz="1200">
-                <a:solidFill>
-                  <a:srgbClr val="CBD5E1"/>
-                </a:solidFill>
-              </a:rPr>
-              <a:t>W3C Spec: w3.org/TR/webgpu</a:t>
-            </a:r>
-            <a:endParaRPr sz="1200">
-              <a:solidFill>
-                <a:schemeClr val="dk1"/>
-              </a:solidFill>
-              <a:latin typeface="Calibri"/>
-              <a:ea typeface="Calibri"/>
-              <a:cs typeface="Calibri"/>
-              <a:sym typeface="Calibri"/>
-            </a:endParaRPr>
-          </a:p>
-          <a:p>
-            <a:pPr indent="0" lvl="0" marL="0" rtl="0" algn="l">
-              <a:spcBef>
-                <a:spcPts val="0"/>
-              </a:spcBef>
-              <a:spcAft>
-                <a:spcPts val="0"/>
-              </a:spcAft>
-              <a:buNone/>
-            </a:pPr>
-            <a:r>
-              <a:rPr lang="en-US" sz="1200">
-                <a:solidFill>
-                  <a:srgbClr val="CBD5E1"/>
-                </a:solidFill>
-              </a:rPr>
-              <a:t>https://developer.mozilla.org/en-US/docs/Web/API/WebGPU_API</a:t>
-            </a:r>
-            <a:endParaRPr sz="1500">
-              <a:solidFill>
-                <a:srgbClr val="CBD5E1"/>
-              </a:solidFill>
             </a:endParaRPr>
           </a:p>
         </p:txBody>
@@ -6144,9 +10341,9 @@
 </file>
 
 <file path=ppt/theme/theme2.xml><?xml version="1.0" encoding="utf-8"?>
-<a:theme xmlns:a="http://schemas.openxmlformats.org/drawingml/2006/main" xmlns:r="http://schemas.openxmlformats.org/officeDocument/2006/relationships" name="Office Theme">
+<a:theme xmlns:a="http://schemas.openxmlformats.org/drawingml/2006/main" xmlns:r="http://schemas.openxmlformats.org/officeDocument/2006/relationships" name="Simple Light">
   <a:themeElements>
-    <a:clrScheme name="Office">
+    <a:clrScheme name="Simple Light">
       <a:dk1>
         <a:srgbClr val="000000"/>
       </a:dk1>
@@ -6154,34 +10351,34 @@
         <a:srgbClr val="FFFFFF"/>
       </a:lt1>
       <a:dk2>
-        <a:srgbClr val="44546A"/>
+        <a:srgbClr val="595959"/>
       </a:dk2>
       <a:lt2>
-        <a:srgbClr val="E7E6E6"/>
+        <a:srgbClr val="EEEEEE"/>
       </a:lt2>
       <a:accent1>
-        <a:srgbClr val="4472C4"/>
+        <a:srgbClr val="4285F4"/>
       </a:accent1>
       <a:accent2>
-        <a:srgbClr val="ED7D31"/>
+        <a:srgbClr val="212121"/>
       </a:accent2>
       <a:accent3>
-        <a:srgbClr val="A5A5A5"/>
+        <a:srgbClr val="78909C"/>
       </a:accent3>
       <a:accent4>
-        <a:srgbClr val="FFC000"/>
+        <a:srgbClr val="FFAB40"/>
       </a:accent4>
       <a:accent5>
-        <a:srgbClr val="5B9BD5"/>
+        <a:srgbClr val="0097A7"/>
       </a:accent5>
       <a:accent6>
-        <a:srgbClr val="70AD47"/>
+        <a:srgbClr val="EEFF41"/>
       </a:accent6>
       <a:hlink>
-        <a:srgbClr val="0563C1"/>
+        <a:srgbClr val="0097A7"/>
       </a:hlink>
       <a:folHlink>
-        <a:srgbClr val="954F72"/>
+        <a:srgbClr val="0097A7"/>
       </a:folHlink>
     </a:clrScheme>
     <a:fontScheme name="Office">
